--- a/docs/talk/ship-ai-harness-talk.pptx
+++ b/docs/talk/ship-ai-harness-talk.pptx
@@ -806,25 +806,31 @@
           <a:lstStyle/>
           <a:p>
             <a:r>
-              <a:t>'This is the whole of an agent turn. Eleven lines.'</a:t>
+              <a:t>'This is the whole of one agent turn. Eleven lines — and it is the slide where the words "building an agent" turn into actual code, so let's go slow.'</a:t>
             </a:r>
           </a:p>
           <a:p/>
           <a:p>
             <a:r>
-              <a:t>'You get an async stream of updates. Each one carries content — some of it is text to print, some of it is the model telling you it called a tool.'</a:t>
+              <a:t>'await foreach just means: don't wait for the whole reply — read it piece by piece as it arrives. The model streams back a series of small "updates" while it is still working, instead of one big response at the end.'</a:t>
             </a:r>
           </a:p>
           <a:p/>
           <a:p>
             <a:r>
-              <a:t>Then the Contains: 'I flag which tool calls are the ship's. That is not cosmetic: the harness's own tooling — todos_add, todos_complete, mode_set — comes through this exact channel and looks exactly the same. A naive host renders them identically, and then a transcript full of bookkeeping reads like the agent working.'</a:t>
+              <a:t>'Each update carries a list called Contents. Sometimes an item in there is a chunk of text — print it to the screen. Sometimes it is a FunctionCallContent, which just means "the model asked to call one of your tools." By the time you see it here, the harness has already made that call for you — this loop is just watching it happen, not making it happen.'</a:t>
             </a:r>
           </a:p>
           <a:p/>
           <a:p>
             <a:r>
-              <a:t>'Use a prefix or a flag, not a colour — transcripts get piped. There is a test asserting ToolNames matches what is actually registered, because a list like that rots silently.'</a:t>
+              <a:t>Then the Contains: 'So what is ToolNames.Contains doing? One simple question: is this tool call one of MINE — one I wrote for the ship — or is it the framework's own internal housekeeping, like todos_add? Both arrive as the exact same FunctionCallContent shape, with no label saying which is which. Skip that check, and your transcript shows "the agent did something" on turns where all it actually did was update a todo list.'</a:t>
+            </a:r>
+          </a:p>
+          <a:p/>
+          <a:p>
+            <a:r>
+              <a:t>'Practical takeaway: flag this with a prefix or a boolean in your own code, not a colour — transcripts get piped to log files, and colour disappears. There is a test in the repo asserting ToolNames matches what is actually registered, because a list like that goes stale silently.'</a:t>
             </a:r>
           </a:p>
         </p:txBody>
@@ -982,25 +988,31 @@
           <a:lstStyle/>
           <a:p>
             <a:r>
-              <a:t>'A tool is a method. AIFunctionFactory reflects over it and the DescriptionAttribute becomes the schema the model sees.'</a:t>
+              <a:t>Four minutes on defaults. This is the 'batteries included' bill.</a:t>
             </a:r>
           </a:p>
           <a:p/>
           <a:p>
             <a:r>
-              <a:t>'Which means that attribute is not a comment. It is the API docs, and it is the only documentation the model will ever read. Mine are long on purpose.'</a:t>
+              <a:t>'Three providers were on before I made a single decision. Two of them write to disk at CONSTRUCTION — not when the agent runs.'</a:t>
             </a:r>
           </a:p>
           <a:p/>
           <a:p>
             <a:r>
-              <a:t>Point at Stamped: 'every reading carries the turn it was taken on. That is here because of a bug I will show you in act four — and I want you to notice now that stamping it was NOT ENOUGH.'</a:t>
+              <a:t>Note the FileAccessProvider row: 'the only opt-in one. The absence of a setting IS the setting. I spent twenty minutes looking for DisableFileAccess. It does not exist.'</a:t>
             </a:r>
           </a:p>
           <a:p/>
           <a:p>
             <a:r>
-              <a:t>If asked about the triple-quoted string: raw string literals, C# 11, no escaping, indentation stripped to the closing quotes.</a:t>
+              <a:t>And the TodoProvider row is the one I kept — free damage-control checklist — which sets up the slide after next.</a:t>
+            </a:r>
+          </a:p>
+          <a:p/>
+          <a:p>
+            <a:r>
+              <a:t>Do not read the table. Point at two rows and move.</a:t>
             </a:r>
           </a:p>
         </p:txBody>
@@ -1070,25 +1082,25 @@
           <a:lstStyle/>
           <a:p>
             <a:r>
-              <a:t>'The world changes in exactly two places. This is the first: a command.'</a:t>
+              <a:t>'I found this by wondering what all the new folders were.'</a:t>
             </a:r>
           </a:p>
           <a:p/>
           <a:p>
             <a:r>
-              <a:t>'Every one of those returns a CommandResult. A refusal is not an exception — it is a result, with a sentence in it that says what the ship actually needs.'</a:t>
+              <a:t>'DisableFileMemory defaults to false. Supply no store and the harness builds a FileSystemAgentFileStore rooted at cwd/agent-file-memory/timestamp-guid. At construction, not at first use.'</a:t>
             </a:r>
           </a:p>
           <a:p/>
           <a:p>
             <a:r>
-              <a:t>'Insufficient reactor output: engines requested 60%, only 25% is unallocated. Reduce another system first. That is a refusal the model can do something with.'</a:t>
+              <a:t>The test: Create_DoesNotLitterTheWorkingDirectoryWithAgentFileMemory. 'It constructs the agent inside a temp directory and asserts the directory is still empty. That is the shape of test I now write for every framework default I turn off — because "I turned it off" is a claim, and claims rot.'</a:t>
             </a:r>
           </a:p>
           <a:p/>
           <a:p>
             <a:r>
-              <a:t>Do not spend the punchline here; the second-to-last slide is where it lands. One sentence and move.</a:t>
+              <a:t>Milestone 4 turns this back on, pointed at a per-voyage directory, as the ship's log. The feature is good. The default is the problem.</a:t>
             </a:r>
           </a:p>
         </p:txBody>
@@ -1158,31 +1170,25 @@
           <a:lstStyle/>
           <a:p>
             <a:r>
-              <a:t>'And this is the second place the world changes: the clock. Once per completed agent turn.'</a:t>
+              <a:t>Thirty seconds, but make it land — this is the one that costs someone in the room a production incident.</a:t>
             </a:r>
           </a:p>
           <a:p/>
           <a:p>
             <a:r>
-              <a:t>Walk the four Apply calls at the bottom. 'Breaches bleed thirty a turn. The reactor bakes if you over-allocate and sheds heat if you run lean. Crew in a vacuum die on the next tick. Alert escalates automatically — standing down is a decision, and the next tick puts it back if the conditions are still true.'</a:t>
+              <a:t>'Compaction is what keeps a long conversation inside the context window. The harness adds it to the pipeline only if BOTH token limits are set.'</a:t>
             </a:r>
           </a:p>
           <a:p/>
           <a:p>
             <a:r>
-              <a:t>'A ship that reports GREEN with a compartment venting is worse than no indicator at all, because the captain stops reading it.'</a:t>
+              <a:t>'Supply one and you get no compaction, no warning, and no error. The object constructs fine. The agent runs fine. You find out on the turn the window overflows — which is to say, in production, on the longest conversation, at the worst moment.'</a:t>
             </a:r>
           </a:p>
           <a:p/>
           <a:p>
             <a:r>
-              <a:t>THE LINE THAT MATTERS, say it slowly: 'every one of those things happens TO the agent. None of it is told to the agent. The captain sees it on the panel. AURORA does not.'</a:t>
-            </a:r>
-          </a:p>
-          <a:p/>
-          <a:p>
-            <a:r>
-              <a:t>That is the hook for act six. Plant it and move on.</a:t>
+              <a:t>If you have a spare beat: 'the two settings are one decision. When an API has two fields that are really one decision, that is worth a comment in your own code — mine has one.'</a:t>
             </a:r>
           </a:p>
         </p:txBody>
@@ -1252,25 +1258,31 @@
           <a:lstStyle/>
           <a:p>
             <a:r>
-              <a:t>Thirty seconds. Do not read the properties out.</a:t>
+              <a:t>'Remember the ToolNames.Contains from the console slide. This is why.'</a:t>
             </a:r>
           </a:p>
           <a:p/>
           <a:p>
             <a:r>
-              <a:t>'One record. Immutable, required init, replaced wholesale by the simulation. Everything else in the system works with a snapshot.'</a:t>
+              <a:t>'Four of those five calls are bookkeeping. I had whole turns that were nothing but todos_add, and in a transcript that reads like the agent working when it is the agent filing.'</a:t>
             </a:r>
           </a:p>
           <a:p/>
           <a:p>
             <a:r>
-              <a:t>'Which means the panel and the tools can never disagree about what the ship IS. They can only disagree about WHEN THEY LAST LOOKED — and that turns out to be the entire problem.'</a:t>
+              <a:t>Then the voice line, and let it land: 'the TodoProvider injects the list state into the turn, and my terse, competent ship's officer opened a voyage with "no outstanding tasks, standing by for orders".'</a:t>
             </a:r>
           </a:p>
           <a:p/>
           <a:p>
             <a:r>
-              <a:t>CrewIn is on the slide for one reason: the approval act. 'Who is standing in the compartment you are about to vent' is a method call, not a vibe.</a:t>
+              <a:t>'That is the framework talking through your character. The fix was a paragraph in the doctrine telling it the todo list is working memory, not a status report — which is the first hint that a lot of this job is writing prose.'</a:t>
+            </a:r>
+          </a:p>
+          <a:p/>
+          <a:p>
+            <a:r>
+              <a:t>BRIDGE BACK TO THE BUILD: 'two slides ago the framework proved it can put words in AURORA's mouth. The next six slides are what is actually allowed to change the ship — starting with what a tool really is.'</a:t>
             </a:r>
           </a:p>
         </p:txBody>
@@ -1340,25 +1352,25 @@
           <a:lstStyle/>
           <a:p>
             <a:r>
-              <a:t>'The encounter is data. Turn two the freighter resolves, turn eight a debris strike, turn nine the breach in Section C.'</a:t>
+              <a:t>'A tool is a method. AIFunctionFactory reflects over it and the DescriptionAttribute becomes the schema the model sees.'</a:t>
             </a:r>
           </a:p>
           <a:p/>
           <a:p>
             <a:r>
-              <a:t>'That analysis string is written, not generated. It is the best writing in the repo and the model just reads it out. Which is the point — the interesting content is authored, the agent is the interface to it.'</a:t>
+              <a:t>'Which means that attribute is not a comment. It is the API docs, and it is the only documentation the model will ever read. Mine are long on purpose.'</a:t>
             </a:r>
           </a:p>
           <a:p/>
           <a:p>
             <a:r>
-              <a:t>'Scenario plus seed is a reproducible voyage. A demo, a screenshot, and a code sample in a blog post are all the same run. That is not a nicety — the testing act depends on it.'</a:t>
+              <a:t>Point at Stamped: 'every reading carries the turn it was taken on. That is here because of a bug I will show you in act four — and I want you to notice now that stamping it was NOT ENOUGH.'</a:t>
             </a:r>
           </a:p>
           <a:p/>
           <a:p>
             <a:r>
-              <a:t>Point at turn 9: 'the breach you saw on the HUD. It fires whether or not the agent ever looks.'</a:t>
+              <a:t>If asked about the triple-quoted string: raw string literals, C# 11, no escaping, indentation stripped to the closing quotes.</a:t>
             </a:r>
           </a:p>
         </p:txBody>
@@ -1428,31 +1440,25 @@
           <a:lstStyle/>
           <a:p>
             <a:r>
-              <a:t>'Last file. AURORA's operating doctrine — a markdown document, embedded as a resource, loaded once and cached.'</a:t>
+              <a:t>'The world changes in exactly two places. This is the first: a command.'</a:t>
             </a:r>
           </a:p>
           <a:p/>
           <a:p>
             <a:r>
-              <a:t>'Not a const string in a C# file. You are going to iterate on this thing constantly, and you want a diff that reads like an edit to a document, because that is what it is.'</a:t>
+              <a:t>'Every one of those returns a CommandResult. A refusal is not an exception — it is a result, with a sentence in it that says what the ship actually needs.'</a:t>
             </a:r>
           </a:p>
           <a:p/>
           <a:p>
             <a:r>
-              <a:t>Read the Bearing section out — it is the shortest demonstration of why the voice works. 'Be terse. A bridge is not a place for paragraphs.'</a:t>
+              <a:t>'Insufficient reactor output: engines requested 60%, only 25% is unallocated. Reduce another system first. That is a refusal the model can do something with.'</a:t>
             </a:r>
           </a:p>
           <a:p/>
           <a:p>
             <a:r>
-              <a:t>Then point at Limits, one line, and say: 'hold on to that heading. The next twenty minutes are about what it took to get that sentence right.'</a:t>
-            </a:r>
-          </a:p>
-          <a:p/>
-          <a:p>
-            <a:r>
-              <a:t>That is the bridge out of the code act. Do not explain it yet.</a:t>
+              <a:t>Do not spend the punchline here; the second-to-last slide is where it lands. One sentence and move.</a:t>
             </a:r>
           </a:p>
         </p:txBody>
@@ -1598,31 +1604,31 @@
           <a:lstStyle/>
           <a:p>
             <a:r>
-              <a:t>Four minutes on defaults. This is the 'batteries included' bill.</a:t>
+              <a:t>'And this is the second place the world changes: the clock. Once per completed agent turn.'</a:t>
             </a:r>
           </a:p>
           <a:p/>
           <a:p>
             <a:r>
-              <a:t>'Three providers were on before I made a single decision. Two of them write to disk at CONSTRUCTION — not when the agent runs.'</a:t>
+              <a:t>Walk the four Apply calls at the bottom. 'Breaches bleed thirty a turn. The reactor bakes if you over-allocate and sheds heat if you run lean. Crew in a vacuum die on the next tick. Alert escalates automatically — standing down is a decision, and the next tick puts it back if the conditions are still true.'</a:t>
             </a:r>
           </a:p>
           <a:p/>
           <a:p>
             <a:r>
-              <a:t>Note the FileAccessProvider row: 'the only opt-in one. The absence of a setting IS the setting. I spent twenty minutes looking for DisableFileAccess. It does not exist.'</a:t>
+              <a:t>'A ship that reports GREEN with a compartment venting is worse than no indicator at all, because the captain stops reading it.'</a:t>
             </a:r>
           </a:p>
           <a:p/>
           <a:p>
             <a:r>
-              <a:t>And the TodoProvider row is the one I kept — free damage-control checklist — which sets up the slide after next.</a:t>
+              <a:t>THE LINE THAT MATTERS, say it slowly: 'every one of those things happens TO the agent. None of it is told to the agent. The captain sees it on the panel. AURORA does not.'</a:t>
             </a:r>
           </a:p>
           <a:p/>
           <a:p>
             <a:r>
-              <a:t>Do not read the table. Point at two rows and move.</a:t>
+              <a:t>That is the hook for act six. Plant it and move on.</a:t>
             </a:r>
           </a:p>
         </p:txBody>
@@ -1692,25 +1698,25 @@
           <a:lstStyle/>
           <a:p>
             <a:r>
-              <a:t>'I found this by wondering what all the new folders were.'</a:t>
+              <a:t>Thirty seconds. Do not read the properties out.</a:t>
             </a:r>
           </a:p>
           <a:p/>
           <a:p>
             <a:r>
-              <a:t>'DisableFileMemory defaults to false. Supply no store and the harness builds a FileSystemAgentFileStore rooted at cwd/agent-file-memory/timestamp-guid. At construction, not at first use.'</a:t>
+              <a:t>'One record. Immutable, required init, replaced wholesale by the simulation. Everything else in the system works with a snapshot.'</a:t>
             </a:r>
           </a:p>
           <a:p/>
           <a:p>
             <a:r>
-              <a:t>The test: Create_DoesNotLitterTheWorkingDirectoryWithAgentFileMemory. 'It constructs the agent inside a temp directory and asserts the directory is still empty. That is the shape of test I now write for every framework default I turn off — because "I turned it off" is a claim, and claims rot.'</a:t>
+              <a:t>'Which means the panel and the tools can never disagree about what the ship IS. They can only disagree about WHEN THEY LAST LOOKED — and that turns out to be the entire problem.'</a:t>
             </a:r>
           </a:p>
           <a:p/>
           <a:p>
             <a:r>
-              <a:t>Milestone 4 turns this back on, pointed at a per-voyage directory, as the ship's log. The feature is good. The default is the problem.</a:t>
+              <a:t>CrewIn is on the slide for one reason: the approval act. 'Who is standing in the compartment you are about to vent' is a method call, not a vibe.</a:t>
             </a:r>
           </a:p>
         </p:txBody>
@@ -1780,25 +1786,25 @@
           <a:lstStyle/>
           <a:p>
             <a:r>
-              <a:t>Thirty seconds, but make it land — this is the one that costs someone in the room a production incident.</a:t>
+              <a:t>'The encounter is data. Turn two the freighter resolves, turn eight a debris strike, turn nine the breach in Section C.'</a:t>
             </a:r>
           </a:p>
           <a:p/>
           <a:p>
             <a:r>
-              <a:t>'Compaction is what keeps a long conversation inside the context window. The harness adds it to the pipeline only if BOTH token limits are set.'</a:t>
+              <a:t>'That analysis string is written, not generated. It is the best writing in the repo and the model just reads it out. Which is the point — the interesting content is authored, the agent is the interface to it.'</a:t>
             </a:r>
           </a:p>
           <a:p/>
           <a:p>
             <a:r>
-              <a:t>'Supply one and you get no compaction, no warning, and no error. The object constructs fine. The agent runs fine. You find out on the turn the window overflows — which is to say, in production, on the longest conversation, at the worst moment.'</a:t>
+              <a:t>'Scenario plus seed is a reproducible voyage. A demo, a screenshot, and a code sample in a blog post are all the same run. That is not a nicety — the testing act depends on it.'</a:t>
             </a:r>
           </a:p>
           <a:p/>
           <a:p>
             <a:r>
-              <a:t>If you have a spare beat: 'the two settings are one decision. When an API has two fields that are really one decision, that is worth a comment in your own code — mine has one.'</a:t>
+              <a:t>Point at turn 9: 'the breach you saw on the HUD. It fires whether or not the agent ever looks.'</a:t>
             </a:r>
           </a:p>
         </p:txBody>
@@ -1868,25 +1874,31 @@
           <a:lstStyle/>
           <a:p>
             <a:r>
-              <a:t>'Remember the ToolNames.Contains from the console slide. This is why.'</a:t>
+              <a:t>'Last file. AURORA's operating doctrine — a markdown document, embedded as a resource, loaded once and cached.'</a:t>
             </a:r>
           </a:p>
           <a:p/>
           <a:p>
             <a:r>
-              <a:t>'Four of those five calls are bookkeeping. I had whole turns that were nothing but todos_add, and in a transcript that reads like the agent working when it is the agent filing.'</a:t>
+              <a:t>'Not a const string in a C# file. You are going to iterate on this thing constantly, and you want a diff that reads like an edit to a document, because that is what it is.'</a:t>
             </a:r>
           </a:p>
           <a:p/>
           <a:p>
             <a:r>
-              <a:t>Then the voice line, and let it land: 'the TodoProvider injects the list state into the turn, and my terse, competent ship's officer opened a voyage with "no outstanding tasks, standing by for orders".'</a:t>
+              <a:t>Read the Bearing section out — it is the shortest demonstration of why the voice works. 'Be terse. A bridge is not a place for paragraphs.'</a:t>
             </a:r>
           </a:p>
           <a:p/>
           <a:p>
             <a:r>
-              <a:t>'That is the framework talking through your character. The fix was a paragraph in the doctrine telling it the todo list is working memory, not a status report — which is the first hint that a lot of this job is writing prose.'</a:t>
+              <a:t>Then point at Limits, one line, and say: 'hold on to that heading. The next twenty minutes are about what it took to get that sentence right.'</a:t>
+            </a:r>
+          </a:p>
+          <a:p/>
+          <a:p>
+            <a:r>
+              <a:t>That is the bridge out of the code act. Do not explain it yet.</a:t>
             </a:r>
           </a:p>
           <a:p/>
@@ -2910,6 +2922,12 @@
               <a:t>Remember the Tick slide: scenario events narrate to the captain and to AURORA not at all. It can reach them through ReadShipLog — but only by choosing to spend a call on a question it does not know it needs to ask.</a:t>
             </a:r>
           </a:p>
+          <a:p/>
+          <a:p>
+            <a:r>
+              <a:t>If asked whether the freighter aged out of context, or whether AURORA knew there was a contact but not what it was: neither. Nothing aged out — this conversation is far too short for that — and it is not partial knowledge either. AURORA has zero evidence of any contact, because the one sensor sweep it ever took happened before the freighter existed in the scenario. The turn-two event fired straight to the console for the captain and never touched AURORA's session at all. At turn three it is not recalling a fading memory — it is honestly reporting the only reading it has ever taken, now two turns stale, with no way to know that.</a:t>
+            </a:r>
+          </a:p>
         </p:txBody>
       </p:sp>
       <p:sp>
@@ -3140,6 +3158,12 @@
               <a:t>If someone asks why not put everything in: because you pay for that block on every single turn, for the whole voyage. It stays a few lines or it stops being worth it.</a:t>
             </a:r>
           </a:p>
+          <a:p/>
+          <a:p>
+            <a:r>
+              <a:t>If someone asks why not just force-call a status tool every turn instead: because a call you force regardless of what the model wants returns exactly this block — you already know the answer before the turn starts. Doing it as a real tool call buys you nothing and costs two things: a second round-trip through the model to read a result it did not ask for, and a transcript that lies about the agent having chosen to check. Same information, so skip the tool.</a:t>
+            </a:r>
+          </a:p>
         </p:txBody>
       </p:sp>
       <p:sp>
@@ -3313,7 +3337,7 @@
           <a:p/>
           <a:p>
             <a:r>
-              <a:t>'38 tests, no model calls, under half a second. That is only possible because the simulation has no AI dependency — the bottom box from the architecture slide.'</a:t>
+              <a:t>'57 tests, no model calls, under half a second. That is only possible because the simulation has no AI dependency — the bottom box from the architecture slide.'</a:t>
             </a:r>
           </a:p>
           <a:p/>
@@ -3501,7 +3525,7 @@
           <a:lstStyle/>
           <a:p>
             <a:r>
-              <a:t>The close. All five are transferable — none of this is C#-specific.</a:t>
+              <a:t>The close. All six are transferable — none of this is C#-specific.</a:t>
             </a:r>
           </a:p>
           <a:p/>
@@ -3513,7 +3537,7 @@
           <a:p/>
           <a:p>
             <a:r>
-              <a:t>The order is deliberate: the two failures first, because those are the ones they will hit.</a:t>
+              <a:t>The order is deliberate: the two failures first, because those are the ones they will hit. The sixth closes the loop back to the testing act, one slide ago.</a:t>
             </a:r>
           </a:p>
         </p:txBody>
@@ -4195,7 +4219,7 @@
           <a:p/>
           <a:p>
             <a:r>
-              <a:t>'The harness is an adapter over a domain, never the domain itself. That single decision is why 38 tests run in under half a second with no model in the loop — and it is the last slide of this talk, so hold onto it.'</a:t>
+              <a:t>'The harness is an adapter over a domain, never the domain itself. That single decision is why 57 tests run in under half a second with no model in the loop — and it is the last slide of this talk, so hold onto it.'</a:t>
             </a:r>
           </a:p>
           <a:p/>
@@ -7509,7 +7533,7 @@
                 </a:solidFill>
                 <a:latin typeface="Segoe UI"/>
               </a:rPr>
-              <a:t>github.com/…/ship-ai-harness  ·  .NET 10  ·  Harness 1.15.0</a:t>
+              <a:t>github.com/stuartdotnet/ship-ai-harness  ·  .NET 10  ·  Harness 1.15.0</a:t>
             </a:r>
           </a:p>
         </p:txBody>
@@ -10861,16 +10885,16 @@
                 </a:solidFill>
                 <a:latin typeface="Segoe UI"/>
               </a:rPr>
-              <a:t>That </a:t>
+              <a:t>Every update off this stream is one of two things: text to print, or "a tool got called." They look identical unless you check the name — </a:t>
             </a:r>
             <a:r>
               <a:rPr sz="1700" b="0" i="0">
                 <a:solidFill>
-                  <a:srgbClr val="F0B429"/>
-                </a:solidFill>
-                <a:latin typeface="Consolas"/>
-              </a:rPr>
-              <a:t>ToolNames.Contains</a:t>
+                  <a:srgbClr val="8B949E"/>
+                </a:solidFill>
+                <a:latin typeface="Consolas"/>
+              </a:rPr>
+              <a:t>todos_add</a:t>
             </a:r>
             <a:r>
               <a:rPr sz="1700" b="0" i="0">
@@ -10879,61 +10903,25 @@
                 </a:solidFill>
                 <a:latin typeface="Segoe UI"/>
               </a:rPr>
-              <a:t> is not decoration. </a:t>
-            </a:r>
-            <a:r>
-              <a:rPr sz="1700" b="1" i="0">
-                <a:solidFill>
-                  <a:srgbClr val="E6EDF3"/>
+              <a:t> (the framework tidying its own list) and </a:t>
+            </a:r>
+            <a:r>
+              <a:rPr sz="1700" b="0" i="0">
+                <a:solidFill>
+                  <a:srgbClr val="8B949E"/>
+                </a:solidFill>
+                <a:latin typeface="Consolas"/>
+              </a:rPr>
+              <a:t>ScanSector</a:t>
+            </a:r>
+            <a:r>
+              <a:rPr sz="1700" b="0" i="0">
+                <a:solidFill>
+                  <a:srgbClr val="8B949E"/>
                 </a:solidFill>
                 <a:latin typeface="Segoe UI"/>
               </a:rPr>
-              <a:t>The harness's own tools arrive on this same channel</a:t>
-            </a:r>
-            <a:r>
-              <a:rPr sz="1700" b="0" i="0">
-                <a:solidFill>
-                  <a:srgbClr val="8B949E"/>
-                </a:solidFill>
-                <a:latin typeface="Segoe UI"/>
-              </a:rPr>
-              <a:t> — </a:t>
-            </a:r>
-            <a:r>
-              <a:rPr sz="1700" b="0" i="0">
-                <a:solidFill>
-                  <a:srgbClr val="8B949E"/>
-                </a:solidFill>
-                <a:latin typeface="Consolas"/>
-              </a:rPr>
-              <a:t>todos_add</a:t>
-            </a:r>
-            <a:r>
-              <a:rPr sz="1700" b="0" i="0">
-                <a:solidFill>
-                  <a:srgbClr val="8B949E"/>
-                </a:solidFill>
-                <a:latin typeface="Segoe UI"/>
-              </a:rPr>
-              <a:t> and </a:t>
-            </a:r>
-            <a:r>
-              <a:rPr sz="1700" b="0" i="0">
-                <a:solidFill>
-                  <a:srgbClr val="8B949E"/>
-                </a:solidFill>
-                <a:latin typeface="Consolas"/>
-              </a:rPr>
-              <a:t>ScanSector</a:t>
-            </a:r>
-            <a:r>
-              <a:rPr sz="1700" b="0" i="0">
-                <a:solidFill>
-                  <a:srgbClr val="8B949E"/>
-                </a:solidFill>
-                <a:latin typeface="Segoe UI"/>
-              </a:rPr>
-              <a:t> look identical here, and only one of them is the ship doing something.</a:t>
+              <a:t> (the ship actually doing something) arrive on the exact same channel.</a:t>
             </a:r>
           </a:p>
         </p:txBody>
@@ -12139,6 +12127,2592 @@
                 <a:solidFill>
                   <a:srgbClr val="F0B429"/>
                 </a:solidFill>
+                <a:latin typeface="Segoe UI"/>
+              </a:rPr>
+              <a:t>HARNESSAGENTOPTIONS</a:t>
+            </a:r>
+          </a:p>
+        </p:txBody>
+      </p:sp>
+      <p:sp>
+        <p:nvSpPr>
+          <p:cNvPr id="3" name="TextBox 2"/>
+          <p:cNvSpPr txBox="1"/>
+          <p:nvPr/>
+        </p:nvSpPr>
+        <p:spPr>
+          <a:xfrm>
+            <a:off x="777240" y="914400"/>
+            <a:ext cx="10637215" cy="1005840"/>
+          </a:xfrm>
+          <a:prstGeom prst="rect">
+            <a:avLst/>
+          </a:prstGeom>
+          <a:noFill/>
+        </p:spPr>
+        <p:txBody>
+          <a:bodyPr wrap="square" anchor="t" lIns="0" rIns="0" tIns="0" bIns="0">
+            <a:spAutoFit/>
+          </a:bodyPr>
+          <a:lstStyle/>
+          <a:p>
+            <a:pPr algn="l">
+              <a:lnSpc>
+                <a:spcPct val="115000"/>
+              </a:lnSpc>
+              <a:spcAft>
+                <a:spcPts val="800"/>
+              </a:spcAft>
+            </a:pPr>
+            <a:r>
+              <a:rPr sz="3600" b="1" i="0">
+                <a:solidFill>
+                  <a:srgbClr val="E6EDF3"/>
+                </a:solidFill>
+                <a:latin typeface="Segoe UI"/>
+              </a:rPr>
+              <a:t>What is on before you decide anything</a:t>
+            </a:r>
+          </a:p>
+        </p:txBody>
+      </p:sp>
+      <p:sp>
+        <p:nvSpPr>
+          <p:cNvPr id="4" name="TextBox 3"/>
+          <p:cNvSpPr txBox="1"/>
+          <p:nvPr/>
+        </p:nvSpPr>
+        <p:spPr>
+          <a:xfrm>
+            <a:off x="777240" y="2148840"/>
+            <a:ext cx="2697480" cy="384048"/>
+          </a:xfrm>
+          <a:prstGeom prst="rect">
+            <a:avLst/>
+          </a:prstGeom>
+          <a:noFill/>
+        </p:spPr>
+        <p:txBody>
+          <a:bodyPr wrap="square" anchor="t" lIns="0" rIns="0" tIns="0" bIns="0">
+            <a:spAutoFit/>
+          </a:bodyPr>
+          <a:lstStyle/>
+          <a:p>
+            <a:pPr algn="l">
+              <a:lnSpc>
+                <a:spcPct val="115000"/>
+              </a:lnSpc>
+              <a:spcAft>
+                <a:spcPts val="800"/>
+              </a:spcAft>
+            </a:pPr>
+            <a:r>
+              <a:rPr sz="1400" b="1" i="0">
+                <a:solidFill>
+                  <a:srgbClr val="F0B429"/>
+                </a:solidFill>
+                <a:latin typeface="Segoe UI"/>
+              </a:rPr>
+              <a:t>DEFAULT</a:t>
+            </a:r>
+          </a:p>
+        </p:txBody>
+      </p:sp>
+      <p:sp>
+        <p:nvSpPr>
+          <p:cNvPr id="5" name="TextBox 4"/>
+          <p:cNvSpPr txBox="1"/>
+          <p:nvPr/>
+        </p:nvSpPr>
+        <p:spPr>
+          <a:xfrm>
+            <a:off x="3611880" y="2148840"/>
+            <a:ext cx="3063240" cy="384048"/>
+          </a:xfrm>
+          <a:prstGeom prst="rect">
+            <a:avLst/>
+          </a:prstGeom>
+          <a:noFill/>
+        </p:spPr>
+        <p:txBody>
+          <a:bodyPr wrap="square" anchor="t" lIns="0" rIns="0" tIns="0" bIns="0">
+            <a:spAutoFit/>
+          </a:bodyPr>
+          <a:lstStyle/>
+          <a:p>
+            <a:pPr algn="l">
+              <a:lnSpc>
+                <a:spcPct val="115000"/>
+              </a:lnSpc>
+              <a:spcAft>
+                <a:spcPts val="800"/>
+              </a:spcAft>
+            </a:pPr>
+            <a:r>
+              <a:rPr sz="1400" b="1" i="0">
+                <a:solidFill>
+                  <a:srgbClr val="F0B429"/>
+                </a:solidFill>
+                <a:latin typeface="Segoe UI"/>
+              </a:rPr>
+              <a:t>WHAT I DID</a:t>
+            </a:r>
+          </a:p>
+        </p:txBody>
+      </p:sp>
+      <p:sp>
+        <p:nvSpPr>
+          <p:cNvPr id="6" name="TextBox 5"/>
+          <p:cNvSpPr txBox="1"/>
+          <p:nvPr/>
+        </p:nvSpPr>
+        <p:spPr>
+          <a:xfrm>
+            <a:off x="6812280" y="2148840"/>
+            <a:ext cx="4434840" cy="384048"/>
+          </a:xfrm>
+          <a:prstGeom prst="rect">
+            <a:avLst/>
+          </a:prstGeom>
+          <a:noFill/>
+        </p:spPr>
+        <p:txBody>
+          <a:bodyPr wrap="square" anchor="t" lIns="0" rIns="0" tIns="0" bIns="0">
+            <a:spAutoFit/>
+          </a:bodyPr>
+          <a:lstStyle/>
+          <a:p>
+            <a:pPr algn="l">
+              <a:lnSpc>
+                <a:spcPct val="115000"/>
+              </a:lnSpc>
+              <a:spcAft>
+                <a:spcPts val="800"/>
+              </a:spcAft>
+            </a:pPr>
+            <a:r>
+              <a:rPr sz="1400" b="1" i="0">
+                <a:solidFill>
+                  <a:srgbClr val="F0B429"/>
+                </a:solidFill>
+                <a:latin typeface="Segoe UI"/>
+              </a:rPr>
+              <a:t>WHY</a:t>
+            </a:r>
+          </a:p>
+        </p:txBody>
+      </p:sp>
+      <p:sp>
+        <p:nvSpPr>
+          <p:cNvPr id="7" name="Rectangle 6"/>
+          <p:cNvSpPr/>
+          <p:nvPr/>
+        </p:nvSpPr>
+        <p:spPr>
+          <a:xfrm>
+            <a:off x="777240" y="2496312"/>
+            <a:ext cx="10637215" cy="19050"/>
+          </a:xfrm>
+          <a:prstGeom prst="rect">
+            <a:avLst/>
+          </a:prstGeom>
+          <a:solidFill>
+            <a:srgbClr val="30363D"/>
+          </a:solidFill>
+          <a:ln>
+            <a:noFill/>
+          </a:ln>
+          <a:effectLst/>
+        </p:spPr>
+        <p:style>
+          <a:lnRef idx="1">
+            <a:schemeClr val="accent1"/>
+          </a:lnRef>
+          <a:fillRef idx="3">
+            <a:schemeClr val="accent1"/>
+          </a:fillRef>
+          <a:effectRef idx="2">
+            <a:schemeClr val="accent1"/>
+          </a:effectRef>
+          <a:fontRef idx="minor">
+            <a:schemeClr val="lt1"/>
+          </a:fontRef>
+        </p:style>
+        <p:txBody>
+          <a:bodyPr rtlCol="0" anchor="ctr"/>
+          <a:lstStyle/>
+          <a:p>
+            <a:pPr algn="ctr"/>
+          </a:p>
+        </p:txBody>
+      </p:sp>
+      <p:sp>
+        <p:nvSpPr>
+          <p:cNvPr id="8" name="TextBox 7"/>
+          <p:cNvSpPr txBox="1"/>
+          <p:nvPr/>
+        </p:nvSpPr>
+        <p:spPr>
+          <a:xfrm>
+            <a:off x="777240" y="2679192"/>
+            <a:ext cx="2670048" cy="384048"/>
+          </a:xfrm>
+          <a:prstGeom prst="rect">
+            <a:avLst/>
+          </a:prstGeom>
+          <a:noFill/>
+        </p:spPr>
+        <p:txBody>
+          <a:bodyPr wrap="square" anchor="t" lIns="0" rIns="0" tIns="0" bIns="0">
+            <a:spAutoFit/>
+          </a:bodyPr>
+          <a:lstStyle/>
+          <a:p>
+            <a:pPr algn="l">
+              <a:lnSpc>
+                <a:spcPct val="105000"/>
+              </a:lnSpc>
+              <a:spcAft>
+                <a:spcPts val="800"/>
+              </a:spcAft>
+            </a:pPr>
+            <a:r>
+              <a:rPr sz="1400" b="0" i="0">
+                <a:solidFill>
+                  <a:srgbClr val="E6EDF3"/>
+                </a:solidFill>
+                <a:latin typeface="Consolas"/>
+              </a:rPr>
+              <a:t>HostedWebSearchTool</a:t>
+            </a:r>
+          </a:p>
+        </p:txBody>
+      </p:sp>
+      <p:sp>
+        <p:nvSpPr>
+          <p:cNvPr id="9" name="TextBox 8"/>
+          <p:cNvSpPr txBox="1"/>
+          <p:nvPr/>
+        </p:nvSpPr>
+        <p:spPr>
+          <a:xfrm>
+            <a:off x="3611880" y="2679192"/>
+            <a:ext cx="3035808" cy="384048"/>
+          </a:xfrm>
+          <a:prstGeom prst="rect">
+            <a:avLst/>
+          </a:prstGeom>
+          <a:noFill/>
+        </p:spPr>
+        <p:txBody>
+          <a:bodyPr wrap="square" anchor="t" lIns="0" rIns="0" tIns="0" bIns="0">
+            <a:spAutoFit/>
+          </a:bodyPr>
+          <a:lstStyle/>
+          <a:p>
+            <a:pPr algn="l">
+              <a:lnSpc>
+                <a:spcPct val="105000"/>
+              </a:lnSpc>
+              <a:spcAft>
+                <a:spcPts val="800"/>
+              </a:spcAft>
+            </a:pPr>
+            <a:r>
+              <a:rPr sz="1400" b="0" i="0">
+                <a:solidFill>
+                  <a:srgbClr val="F85149"/>
+                </a:solidFill>
+                <a:latin typeface="Consolas"/>
+              </a:rPr>
+              <a:t>DisableWebSearch = true</a:t>
+            </a:r>
+          </a:p>
+        </p:txBody>
+      </p:sp>
+      <p:sp>
+        <p:nvSpPr>
+          <p:cNvPr id="10" name="TextBox 9"/>
+          <p:cNvSpPr txBox="1"/>
+          <p:nvPr/>
+        </p:nvSpPr>
+        <p:spPr>
+          <a:xfrm>
+            <a:off x="6812280" y="2679192"/>
+            <a:ext cx="4407408" cy="384048"/>
+          </a:xfrm>
+          <a:prstGeom prst="rect">
+            <a:avLst/>
+          </a:prstGeom>
+          <a:noFill/>
+        </p:spPr>
+        <p:txBody>
+          <a:bodyPr wrap="square" anchor="t" lIns="0" rIns="0" tIns="0" bIns="0">
+            <a:spAutoFit/>
+          </a:bodyPr>
+          <a:lstStyle/>
+          <a:p>
+            <a:pPr algn="l">
+              <a:lnSpc>
+                <a:spcPct val="105000"/>
+              </a:lnSpc>
+              <a:spcAft>
+                <a:spcPts val="800"/>
+              </a:spcAft>
+            </a:pPr>
+            <a:r>
+              <a:rPr sz="1400" b="0" i="0">
+                <a:solidFill>
+                  <a:srgbClr val="8B949E"/>
+                </a:solidFill>
+                <a:latin typeface="Segoe UI"/>
+              </a:rPr>
+              <a:t>A starship googling breaks the fiction</a:t>
+            </a:r>
+          </a:p>
+        </p:txBody>
+      </p:sp>
+      <p:sp>
+        <p:nvSpPr>
+          <p:cNvPr id="11" name="Rectangle 10"/>
+          <p:cNvSpPr/>
+          <p:nvPr/>
+        </p:nvSpPr>
+        <p:spPr>
+          <a:xfrm>
+            <a:off x="777240" y="2980944"/>
+            <a:ext cx="10637215" cy="19050"/>
+          </a:xfrm>
+          <a:prstGeom prst="rect">
+            <a:avLst/>
+          </a:prstGeom>
+          <a:solidFill>
+            <a:srgbClr val="21262D"/>
+          </a:solidFill>
+          <a:ln>
+            <a:noFill/>
+          </a:ln>
+          <a:effectLst/>
+        </p:spPr>
+        <p:style>
+          <a:lnRef idx="1">
+            <a:schemeClr val="accent1"/>
+          </a:lnRef>
+          <a:fillRef idx="3">
+            <a:schemeClr val="accent1"/>
+          </a:fillRef>
+          <a:effectRef idx="2">
+            <a:schemeClr val="accent1"/>
+          </a:effectRef>
+          <a:fontRef idx="minor">
+            <a:schemeClr val="lt1"/>
+          </a:fontRef>
+        </p:style>
+        <p:txBody>
+          <a:bodyPr rtlCol="0" anchor="ctr"/>
+          <a:lstStyle/>
+          <a:p>
+            <a:pPr algn="ctr"/>
+          </a:p>
+        </p:txBody>
+      </p:sp>
+      <p:sp>
+        <p:nvSpPr>
+          <p:cNvPr id="12" name="TextBox 11"/>
+          <p:cNvSpPr txBox="1"/>
+          <p:nvPr/>
+        </p:nvSpPr>
+        <p:spPr>
+          <a:xfrm>
+            <a:off x="777240" y="3099816"/>
+            <a:ext cx="2670048" cy="384048"/>
+          </a:xfrm>
+          <a:prstGeom prst="rect">
+            <a:avLst/>
+          </a:prstGeom>
+          <a:noFill/>
+        </p:spPr>
+        <p:txBody>
+          <a:bodyPr wrap="square" anchor="t" lIns="0" rIns="0" tIns="0" bIns="0">
+            <a:spAutoFit/>
+          </a:bodyPr>
+          <a:lstStyle/>
+          <a:p>
+            <a:pPr algn="l">
+              <a:lnSpc>
+                <a:spcPct val="105000"/>
+              </a:lnSpc>
+              <a:spcAft>
+                <a:spcPts val="800"/>
+              </a:spcAft>
+            </a:pPr>
+            <a:r>
+              <a:rPr sz="1400" b="0" i="0">
+                <a:solidFill>
+                  <a:srgbClr val="E6EDF3"/>
+                </a:solidFill>
+                <a:latin typeface="Consolas"/>
+              </a:rPr>
+              <a:t>FileMemoryProvider</a:t>
+            </a:r>
+          </a:p>
+        </p:txBody>
+      </p:sp>
+      <p:sp>
+        <p:nvSpPr>
+          <p:cNvPr id="13" name="TextBox 12"/>
+          <p:cNvSpPr txBox="1"/>
+          <p:nvPr/>
+        </p:nvSpPr>
+        <p:spPr>
+          <a:xfrm>
+            <a:off x="3611880" y="3099816"/>
+            <a:ext cx="3035808" cy="384048"/>
+          </a:xfrm>
+          <a:prstGeom prst="rect">
+            <a:avLst/>
+          </a:prstGeom>
+          <a:noFill/>
+        </p:spPr>
+        <p:txBody>
+          <a:bodyPr wrap="square" anchor="t" lIns="0" rIns="0" tIns="0" bIns="0">
+            <a:spAutoFit/>
+          </a:bodyPr>
+          <a:lstStyle/>
+          <a:p>
+            <a:pPr algn="l">
+              <a:lnSpc>
+                <a:spcPct val="105000"/>
+              </a:lnSpc>
+              <a:spcAft>
+                <a:spcPts val="800"/>
+              </a:spcAft>
+            </a:pPr>
+            <a:r>
+              <a:rPr sz="1400" b="0" i="0">
+                <a:solidFill>
+                  <a:srgbClr val="F85149"/>
+                </a:solidFill>
+                <a:latin typeface="Consolas"/>
+              </a:rPr>
+              <a:t>DisableFileMemory = true</a:t>
+            </a:r>
+          </a:p>
+        </p:txBody>
+      </p:sp>
+      <p:sp>
+        <p:nvSpPr>
+          <p:cNvPr id="14" name="TextBox 13"/>
+          <p:cNvSpPr txBox="1"/>
+          <p:nvPr/>
+        </p:nvSpPr>
+        <p:spPr>
+          <a:xfrm>
+            <a:off x="6812280" y="3099816"/>
+            <a:ext cx="4407408" cy="384048"/>
+          </a:xfrm>
+          <a:prstGeom prst="rect">
+            <a:avLst/>
+          </a:prstGeom>
+          <a:noFill/>
+        </p:spPr>
+        <p:txBody>
+          <a:bodyPr wrap="square" anchor="t" lIns="0" rIns="0" tIns="0" bIns="0">
+            <a:spAutoFit/>
+          </a:bodyPr>
+          <a:lstStyle/>
+          <a:p>
+            <a:pPr algn="l">
+              <a:lnSpc>
+                <a:spcPct val="105000"/>
+              </a:lnSpc>
+              <a:spcAft>
+                <a:spcPts val="800"/>
+              </a:spcAft>
+            </a:pPr>
+            <a:r>
+              <a:rPr sz="1400" b="0" i="0">
+                <a:solidFill>
+                  <a:srgbClr val="8B949E"/>
+                </a:solidFill>
+                <a:latin typeface="Segoe UI"/>
+              </a:rPr>
+              <a:t>Writes into your repo at construction</a:t>
+            </a:r>
+          </a:p>
+        </p:txBody>
+      </p:sp>
+      <p:sp>
+        <p:nvSpPr>
+          <p:cNvPr id="15" name="Rectangle 14"/>
+          <p:cNvSpPr/>
+          <p:nvPr/>
+        </p:nvSpPr>
+        <p:spPr>
+          <a:xfrm>
+            <a:off x="777240" y="3401568"/>
+            <a:ext cx="10637215" cy="19050"/>
+          </a:xfrm>
+          <a:prstGeom prst="rect">
+            <a:avLst/>
+          </a:prstGeom>
+          <a:solidFill>
+            <a:srgbClr val="21262D"/>
+          </a:solidFill>
+          <a:ln>
+            <a:noFill/>
+          </a:ln>
+          <a:effectLst/>
+        </p:spPr>
+        <p:style>
+          <a:lnRef idx="1">
+            <a:schemeClr val="accent1"/>
+          </a:lnRef>
+          <a:fillRef idx="3">
+            <a:schemeClr val="accent1"/>
+          </a:fillRef>
+          <a:effectRef idx="2">
+            <a:schemeClr val="accent1"/>
+          </a:effectRef>
+          <a:fontRef idx="minor">
+            <a:schemeClr val="lt1"/>
+          </a:fontRef>
+        </p:style>
+        <p:txBody>
+          <a:bodyPr rtlCol="0" anchor="ctr"/>
+          <a:lstStyle/>
+          <a:p>
+            <a:pPr algn="ctr"/>
+          </a:p>
+        </p:txBody>
+      </p:sp>
+      <p:sp>
+        <p:nvSpPr>
+          <p:cNvPr id="16" name="TextBox 15"/>
+          <p:cNvSpPr txBox="1"/>
+          <p:nvPr/>
+        </p:nvSpPr>
+        <p:spPr>
+          <a:xfrm>
+            <a:off x="777240" y="3520440"/>
+            <a:ext cx="2670048" cy="384048"/>
+          </a:xfrm>
+          <a:prstGeom prst="rect">
+            <a:avLst/>
+          </a:prstGeom>
+          <a:noFill/>
+        </p:spPr>
+        <p:txBody>
+          <a:bodyPr wrap="square" anchor="t" lIns="0" rIns="0" tIns="0" bIns="0">
+            <a:spAutoFit/>
+          </a:bodyPr>
+          <a:lstStyle/>
+          <a:p>
+            <a:pPr algn="l">
+              <a:lnSpc>
+                <a:spcPct val="105000"/>
+              </a:lnSpc>
+              <a:spcAft>
+                <a:spcPts val="800"/>
+              </a:spcAft>
+            </a:pPr>
+            <a:r>
+              <a:rPr sz="1400" b="0" i="0">
+                <a:solidFill>
+                  <a:srgbClr val="E6EDF3"/>
+                </a:solidFill>
+                <a:latin typeface="Consolas"/>
+              </a:rPr>
+              <a:t>AgentSkillsProvider</a:t>
+            </a:r>
+          </a:p>
+        </p:txBody>
+      </p:sp>
+      <p:sp>
+        <p:nvSpPr>
+          <p:cNvPr id="17" name="TextBox 16"/>
+          <p:cNvSpPr txBox="1"/>
+          <p:nvPr/>
+        </p:nvSpPr>
+        <p:spPr>
+          <a:xfrm>
+            <a:off x="3611880" y="3520440"/>
+            <a:ext cx="3035808" cy="384048"/>
+          </a:xfrm>
+          <a:prstGeom prst="rect">
+            <a:avLst/>
+          </a:prstGeom>
+          <a:noFill/>
+        </p:spPr>
+        <p:txBody>
+          <a:bodyPr wrap="square" anchor="t" lIns="0" rIns="0" tIns="0" bIns="0">
+            <a:spAutoFit/>
+          </a:bodyPr>
+          <a:lstStyle/>
+          <a:p>
+            <a:pPr algn="l">
+              <a:lnSpc>
+                <a:spcPct val="105000"/>
+              </a:lnSpc>
+              <a:spcAft>
+                <a:spcPts val="800"/>
+              </a:spcAft>
+            </a:pPr>
+            <a:r>
+              <a:rPr sz="1400" b="0" i="0">
+                <a:solidFill>
+                  <a:srgbClr val="F85149"/>
+                </a:solidFill>
+                <a:latin typeface="Consolas"/>
+              </a:rPr>
+              <a:t>Disable…Provider = true</a:t>
+            </a:r>
+          </a:p>
+        </p:txBody>
+      </p:sp>
+      <p:sp>
+        <p:nvSpPr>
+          <p:cNvPr id="18" name="TextBox 17"/>
+          <p:cNvSpPr txBox="1"/>
+          <p:nvPr/>
+        </p:nvSpPr>
+        <p:spPr>
+          <a:xfrm>
+            <a:off x="6812280" y="3520440"/>
+            <a:ext cx="4407408" cy="384048"/>
+          </a:xfrm>
+          <a:prstGeom prst="rect">
+            <a:avLst/>
+          </a:prstGeom>
+          <a:noFill/>
+        </p:spPr>
+        <p:txBody>
+          <a:bodyPr wrap="square" anchor="t" lIns="0" rIns="0" tIns="0" bIns="0">
+            <a:spAutoFit/>
+          </a:bodyPr>
+          <a:lstStyle/>
+          <a:p>
+            <a:pPr algn="l">
+              <a:lnSpc>
+                <a:spcPct val="105000"/>
+              </a:lnSpc>
+              <a:spcAft>
+                <a:spcPts val="800"/>
+              </a:spcAft>
+            </a:pPr>
+            <a:r>
+              <a:rPr sz="1400" b="0" i="0">
+                <a:solidFill>
+                  <a:srgbClr val="8B949E"/>
+                </a:solidFill>
+                <a:latin typeface="Segoe UI"/>
+              </a:rPr>
+              <a:t>Walks the working directory for nothing</a:t>
+            </a:r>
+          </a:p>
+        </p:txBody>
+      </p:sp>
+      <p:sp>
+        <p:nvSpPr>
+          <p:cNvPr id="19" name="Rectangle 18"/>
+          <p:cNvSpPr/>
+          <p:nvPr/>
+        </p:nvSpPr>
+        <p:spPr>
+          <a:xfrm>
+            <a:off x="777240" y="3822192"/>
+            <a:ext cx="10637215" cy="19050"/>
+          </a:xfrm>
+          <a:prstGeom prst="rect">
+            <a:avLst/>
+          </a:prstGeom>
+          <a:solidFill>
+            <a:srgbClr val="21262D"/>
+          </a:solidFill>
+          <a:ln>
+            <a:noFill/>
+          </a:ln>
+          <a:effectLst/>
+        </p:spPr>
+        <p:style>
+          <a:lnRef idx="1">
+            <a:schemeClr val="accent1"/>
+          </a:lnRef>
+          <a:fillRef idx="3">
+            <a:schemeClr val="accent1"/>
+          </a:fillRef>
+          <a:effectRef idx="2">
+            <a:schemeClr val="accent1"/>
+          </a:effectRef>
+          <a:fontRef idx="minor">
+            <a:schemeClr val="lt1"/>
+          </a:fontRef>
+        </p:style>
+        <p:txBody>
+          <a:bodyPr rtlCol="0" anchor="ctr"/>
+          <a:lstStyle/>
+          <a:p>
+            <a:pPr algn="ctr"/>
+          </a:p>
+        </p:txBody>
+      </p:sp>
+      <p:sp>
+        <p:nvSpPr>
+          <p:cNvPr id="20" name="TextBox 19"/>
+          <p:cNvSpPr txBox="1"/>
+          <p:nvPr/>
+        </p:nvSpPr>
+        <p:spPr>
+          <a:xfrm>
+            <a:off x="777240" y="3941064"/>
+            <a:ext cx="2670048" cy="384048"/>
+          </a:xfrm>
+          <a:prstGeom prst="rect">
+            <a:avLst/>
+          </a:prstGeom>
+          <a:noFill/>
+        </p:spPr>
+        <p:txBody>
+          <a:bodyPr wrap="square" anchor="t" lIns="0" rIns="0" tIns="0" bIns="0">
+            <a:spAutoFit/>
+          </a:bodyPr>
+          <a:lstStyle/>
+          <a:p>
+            <a:pPr algn="l">
+              <a:lnSpc>
+                <a:spcPct val="105000"/>
+              </a:lnSpc>
+              <a:spcAft>
+                <a:spcPts val="800"/>
+              </a:spcAft>
+            </a:pPr>
+            <a:r>
+              <a:rPr sz="1400" b="0" i="0">
+                <a:solidFill>
+                  <a:srgbClr val="E6EDF3"/>
+                </a:solidFill>
+                <a:latin typeface="Consolas"/>
+              </a:rPr>
+              <a:t>FileAccessProvider</a:t>
+            </a:r>
+          </a:p>
+        </p:txBody>
+      </p:sp>
+      <p:sp>
+        <p:nvSpPr>
+          <p:cNvPr id="21" name="TextBox 20"/>
+          <p:cNvSpPr txBox="1"/>
+          <p:nvPr/>
+        </p:nvSpPr>
+        <p:spPr>
+          <a:xfrm>
+            <a:off x="3611880" y="3941064"/>
+            <a:ext cx="3035808" cy="384048"/>
+          </a:xfrm>
+          <a:prstGeom prst="rect">
+            <a:avLst/>
+          </a:prstGeom>
+          <a:noFill/>
+        </p:spPr>
+        <p:txBody>
+          <a:bodyPr wrap="square" anchor="t" lIns="0" rIns="0" tIns="0" bIns="0">
+            <a:spAutoFit/>
+          </a:bodyPr>
+          <a:lstStyle/>
+          <a:p>
+            <a:pPr algn="l">
+              <a:lnSpc>
+                <a:spcPct val="105000"/>
+              </a:lnSpc>
+              <a:spcAft>
+                <a:spcPts val="800"/>
+              </a:spcAft>
+            </a:pPr>
+            <a:r>
+              <a:rPr sz="1400" b="0" i="0">
+                <a:solidFill>
+                  <a:srgbClr val="3FB950"/>
+                </a:solidFill>
+                <a:latin typeface="Consolas"/>
+              </a:rPr>
+              <a:t>(nothing)</a:t>
+            </a:r>
+          </a:p>
+        </p:txBody>
+      </p:sp>
+      <p:sp>
+        <p:nvSpPr>
+          <p:cNvPr id="22" name="TextBox 21"/>
+          <p:cNvSpPr txBox="1"/>
+          <p:nvPr/>
+        </p:nvSpPr>
+        <p:spPr>
+          <a:xfrm>
+            <a:off x="6812280" y="3941064"/>
+            <a:ext cx="4407408" cy="384048"/>
+          </a:xfrm>
+          <a:prstGeom prst="rect">
+            <a:avLst/>
+          </a:prstGeom>
+          <a:noFill/>
+        </p:spPr>
+        <p:txBody>
+          <a:bodyPr wrap="square" anchor="t" lIns="0" rIns="0" tIns="0" bIns="0">
+            <a:spAutoFit/>
+          </a:bodyPr>
+          <a:lstStyle/>
+          <a:p>
+            <a:pPr algn="l">
+              <a:lnSpc>
+                <a:spcPct val="105000"/>
+              </a:lnSpc>
+              <a:spcAft>
+                <a:spcPts val="800"/>
+              </a:spcAft>
+            </a:pPr>
+            <a:r>
+              <a:rPr sz="1400" b="0" i="0">
+                <a:solidFill>
+                  <a:srgbClr val="8B949E"/>
+                </a:solidFill>
+                <a:latin typeface="Segoe UI"/>
+              </a:rPr>
+              <a:t>Opt-in. No setting is the setting</a:t>
+            </a:r>
+          </a:p>
+        </p:txBody>
+      </p:sp>
+      <p:sp>
+        <p:nvSpPr>
+          <p:cNvPr id="23" name="Rectangle 22"/>
+          <p:cNvSpPr/>
+          <p:nvPr/>
+        </p:nvSpPr>
+        <p:spPr>
+          <a:xfrm>
+            <a:off x="777240" y="4242816"/>
+            <a:ext cx="10637215" cy="19050"/>
+          </a:xfrm>
+          <a:prstGeom prst="rect">
+            <a:avLst/>
+          </a:prstGeom>
+          <a:solidFill>
+            <a:srgbClr val="21262D"/>
+          </a:solidFill>
+          <a:ln>
+            <a:noFill/>
+          </a:ln>
+          <a:effectLst/>
+        </p:spPr>
+        <p:style>
+          <a:lnRef idx="1">
+            <a:schemeClr val="accent1"/>
+          </a:lnRef>
+          <a:fillRef idx="3">
+            <a:schemeClr val="accent1"/>
+          </a:fillRef>
+          <a:effectRef idx="2">
+            <a:schemeClr val="accent1"/>
+          </a:effectRef>
+          <a:fontRef idx="minor">
+            <a:schemeClr val="lt1"/>
+          </a:fontRef>
+        </p:style>
+        <p:txBody>
+          <a:bodyPr rtlCol="0" anchor="ctr"/>
+          <a:lstStyle/>
+          <a:p>
+            <a:pPr algn="ctr"/>
+          </a:p>
+        </p:txBody>
+      </p:sp>
+      <p:sp>
+        <p:nvSpPr>
+          <p:cNvPr id="24" name="TextBox 23"/>
+          <p:cNvSpPr txBox="1"/>
+          <p:nvPr/>
+        </p:nvSpPr>
+        <p:spPr>
+          <a:xfrm>
+            <a:off x="777240" y="4361688"/>
+            <a:ext cx="2670048" cy="384048"/>
+          </a:xfrm>
+          <a:prstGeom prst="rect">
+            <a:avLst/>
+          </a:prstGeom>
+          <a:noFill/>
+        </p:spPr>
+        <p:txBody>
+          <a:bodyPr wrap="square" anchor="t" lIns="0" rIns="0" tIns="0" bIns="0">
+            <a:spAutoFit/>
+          </a:bodyPr>
+          <a:lstStyle/>
+          <a:p>
+            <a:pPr algn="l">
+              <a:lnSpc>
+                <a:spcPct val="105000"/>
+              </a:lnSpc>
+              <a:spcAft>
+                <a:spcPts val="800"/>
+              </a:spcAft>
+            </a:pPr>
+            <a:r>
+              <a:rPr sz="1400" b="0" i="0">
+                <a:solidFill>
+                  <a:srgbClr val="E6EDF3"/>
+                </a:solidFill>
+                <a:latin typeface="Consolas"/>
+              </a:rPr>
+              <a:t>TodoProvider</a:t>
+            </a:r>
+          </a:p>
+        </p:txBody>
+      </p:sp>
+      <p:sp>
+        <p:nvSpPr>
+          <p:cNvPr id="25" name="TextBox 24"/>
+          <p:cNvSpPr txBox="1"/>
+          <p:nvPr/>
+        </p:nvSpPr>
+        <p:spPr>
+          <a:xfrm>
+            <a:off x="3611880" y="4361688"/>
+            <a:ext cx="3035808" cy="384048"/>
+          </a:xfrm>
+          <a:prstGeom prst="rect">
+            <a:avLst/>
+          </a:prstGeom>
+          <a:noFill/>
+        </p:spPr>
+        <p:txBody>
+          <a:bodyPr wrap="square" anchor="t" lIns="0" rIns="0" tIns="0" bIns="0">
+            <a:spAutoFit/>
+          </a:bodyPr>
+          <a:lstStyle/>
+          <a:p>
+            <a:pPr algn="l">
+              <a:lnSpc>
+                <a:spcPct val="105000"/>
+              </a:lnSpc>
+              <a:spcAft>
+                <a:spcPts val="800"/>
+              </a:spcAft>
+            </a:pPr>
+            <a:r>
+              <a:rPr sz="1400" b="0" i="0">
+                <a:solidFill>
+                  <a:srgbClr val="3FB950"/>
+                </a:solidFill>
+                <a:latin typeface="Consolas"/>
+              </a:rPr>
+              <a:t>kept</a:t>
+            </a:r>
+          </a:p>
+        </p:txBody>
+      </p:sp>
+      <p:sp>
+        <p:nvSpPr>
+          <p:cNvPr id="26" name="TextBox 25"/>
+          <p:cNvSpPr txBox="1"/>
+          <p:nvPr/>
+        </p:nvSpPr>
+        <p:spPr>
+          <a:xfrm>
+            <a:off x="6812280" y="4361688"/>
+            <a:ext cx="4407408" cy="384048"/>
+          </a:xfrm>
+          <a:prstGeom prst="rect">
+            <a:avLst/>
+          </a:prstGeom>
+          <a:noFill/>
+        </p:spPr>
+        <p:txBody>
+          <a:bodyPr wrap="square" anchor="t" lIns="0" rIns="0" tIns="0" bIns="0">
+            <a:spAutoFit/>
+          </a:bodyPr>
+          <a:lstStyle/>
+          <a:p>
+            <a:pPr algn="l">
+              <a:lnSpc>
+                <a:spcPct val="105000"/>
+              </a:lnSpc>
+              <a:spcAft>
+                <a:spcPts val="800"/>
+              </a:spcAft>
+            </a:pPr>
+            <a:r>
+              <a:rPr sz="1400" b="0" i="0">
+                <a:solidFill>
+                  <a:srgbClr val="8B949E"/>
+                </a:solidFill>
+                <a:latin typeface="Segoe UI"/>
+              </a:rPr>
+              <a:t>Becomes the damage-control checklist for free</a:t>
+            </a:r>
+          </a:p>
+        </p:txBody>
+      </p:sp>
+      <p:sp>
+        <p:nvSpPr>
+          <p:cNvPr id="27" name="Rectangle 26"/>
+          <p:cNvSpPr/>
+          <p:nvPr/>
+        </p:nvSpPr>
+        <p:spPr>
+          <a:xfrm>
+            <a:off x="777240" y="4663440"/>
+            <a:ext cx="10637215" cy="19050"/>
+          </a:xfrm>
+          <a:prstGeom prst="rect">
+            <a:avLst/>
+          </a:prstGeom>
+          <a:solidFill>
+            <a:srgbClr val="21262D"/>
+          </a:solidFill>
+          <a:ln>
+            <a:noFill/>
+          </a:ln>
+          <a:effectLst/>
+        </p:spPr>
+        <p:style>
+          <a:lnRef idx="1">
+            <a:schemeClr val="accent1"/>
+          </a:lnRef>
+          <a:fillRef idx="3">
+            <a:schemeClr val="accent1"/>
+          </a:fillRef>
+          <a:effectRef idx="2">
+            <a:schemeClr val="accent1"/>
+          </a:effectRef>
+          <a:fontRef idx="minor">
+            <a:schemeClr val="lt1"/>
+          </a:fontRef>
+        </p:style>
+        <p:txBody>
+          <a:bodyPr rtlCol="0" anchor="ctr"/>
+          <a:lstStyle/>
+          <a:p>
+            <a:pPr algn="ctr"/>
+          </a:p>
+        </p:txBody>
+      </p:sp>
+      <p:sp>
+        <p:nvSpPr>
+          <p:cNvPr id="28" name="TextBox 27"/>
+          <p:cNvSpPr txBox="1"/>
+          <p:nvPr/>
+        </p:nvSpPr>
+        <p:spPr>
+          <a:xfrm>
+            <a:off x="777240" y="4782312"/>
+            <a:ext cx="2670048" cy="384048"/>
+          </a:xfrm>
+          <a:prstGeom prst="rect">
+            <a:avLst/>
+          </a:prstGeom>
+          <a:noFill/>
+        </p:spPr>
+        <p:txBody>
+          <a:bodyPr wrap="square" anchor="t" lIns="0" rIns="0" tIns="0" bIns="0">
+            <a:spAutoFit/>
+          </a:bodyPr>
+          <a:lstStyle/>
+          <a:p>
+            <a:pPr algn="l">
+              <a:lnSpc>
+                <a:spcPct val="105000"/>
+              </a:lnSpc>
+              <a:spcAft>
+                <a:spcPts val="800"/>
+              </a:spcAft>
+            </a:pPr>
+            <a:r>
+              <a:rPr sz="1400" b="0" i="0">
+                <a:solidFill>
+                  <a:srgbClr val="E6EDF3"/>
+                </a:solidFill>
+                <a:latin typeface="Consolas"/>
+              </a:rPr>
+              <a:t>Compaction</a:t>
+            </a:r>
+          </a:p>
+        </p:txBody>
+      </p:sp>
+      <p:sp>
+        <p:nvSpPr>
+          <p:cNvPr id="29" name="TextBox 28"/>
+          <p:cNvSpPr txBox="1"/>
+          <p:nvPr/>
+        </p:nvSpPr>
+        <p:spPr>
+          <a:xfrm>
+            <a:off x="3611880" y="4782312"/>
+            <a:ext cx="3035808" cy="384048"/>
+          </a:xfrm>
+          <a:prstGeom prst="rect">
+            <a:avLst/>
+          </a:prstGeom>
+          <a:noFill/>
+        </p:spPr>
+        <p:txBody>
+          <a:bodyPr wrap="square" anchor="t" lIns="0" rIns="0" tIns="0" bIns="0">
+            <a:spAutoFit/>
+          </a:bodyPr>
+          <a:lstStyle/>
+          <a:p>
+            <a:pPr algn="l">
+              <a:lnSpc>
+                <a:spcPct val="105000"/>
+              </a:lnSpc>
+              <a:spcAft>
+                <a:spcPts val="800"/>
+              </a:spcAft>
+            </a:pPr>
+            <a:r>
+              <a:rPr sz="1400" b="0" i="0">
+                <a:solidFill>
+                  <a:srgbClr val="F0B429"/>
+                </a:solidFill>
+                <a:latin typeface="Consolas"/>
+              </a:rPr>
+              <a:t>both token limits</a:t>
+            </a:r>
+          </a:p>
+        </p:txBody>
+      </p:sp>
+      <p:sp>
+        <p:nvSpPr>
+          <p:cNvPr id="30" name="TextBox 29"/>
+          <p:cNvSpPr txBox="1"/>
+          <p:nvPr/>
+        </p:nvSpPr>
+        <p:spPr>
+          <a:xfrm>
+            <a:off x="6812280" y="4782312"/>
+            <a:ext cx="4407408" cy="384048"/>
+          </a:xfrm>
+          <a:prstGeom prst="rect">
+            <a:avLst/>
+          </a:prstGeom>
+          <a:noFill/>
+        </p:spPr>
+        <p:txBody>
+          <a:bodyPr wrap="square" anchor="t" lIns="0" rIns="0" tIns="0" bIns="0">
+            <a:spAutoFit/>
+          </a:bodyPr>
+          <a:lstStyle/>
+          <a:p>
+            <a:pPr algn="l">
+              <a:lnSpc>
+                <a:spcPct val="105000"/>
+              </a:lnSpc>
+              <a:spcAft>
+                <a:spcPts val="800"/>
+              </a:spcAft>
+            </a:pPr>
+            <a:r>
+              <a:rPr sz="1400" b="0" i="0">
+                <a:solidFill>
+                  <a:srgbClr val="8B949E"/>
+                </a:solidFill>
+                <a:latin typeface="Segoe UI"/>
+              </a:rPr>
+              <a:t>Setting only one silently disables it</a:t>
+            </a:r>
+          </a:p>
+        </p:txBody>
+      </p:sp>
+      <p:sp>
+        <p:nvSpPr>
+          <p:cNvPr id="31" name="Rectangle 30"/>
+          <p:cNvSpPr/>
+          <p:nvPr/>
+        </p:nvSpPr>
+        <p:spPr>
+          <a:xfrm>
+            <a:off x="777240" y="5084064"/>
+            <a:ext cx="10637215" cy="19050"/>
+          </a:xfrm>
+          <a:prstGeom prst="rect">
+            <a:avLst/>
+          </a:prstGeom>
+          <a:solidFill>
+            <a:srgbClr val="21262D"/>
+          </a:solidFill>
+          <a:ln>
+            <a:noFill/>
+          </a:ln>
+          <a:effectLst/>
+        </p:spPr>
+        <p:style>
+          <a:lnRef idx="1">
+            <a:schemeClr val="accent1"/>
+          </a:lnRef>
+          <a:fillRef idx="3">
+            <a:schemeClr val="accent1"/>
+          </a:fillRef>
+          <a:effectRef idx="2">
+            <a:schemeClr val="accent1"/>
+          </a:effectRef>
+          <a:fontRef idx="minor">
+            <a:schemeClr val="lt1"/>
+          </a:fontRef>
+        </p:style>
+        <p:txBody>
+          <a:bodyPr rtlCol="0" anchor="ctr"/>
+          <a:lstStyle/>
+          <a:p>
+            <a:pPr algn="ctr"/>
+          </a:p>
+        </p:txBody>
+      </p:sp>
+      <p:sp>
+        <p:nvSpPr>
+          <p:cNvPr id="32" name="TextBox 31"/>
+          <p:cNvSpPr txBox="1"/>
+          <p:nvPr/>
+        </p:nvSpPr>
+        <p:spPr>
+          <a:xfrm>
+            <a:off x="777240" y="6126480"/>
+            <a:ext cx="10637215" cy="365760"/>
+          </a:xfrm>
+          <a:prstGeom prst="rect">
+            <a:avLst/>
+          </a:prstGeom>
+          <a:noFill/>
+        </p:spPr>
+        <p:txBody>
+          <a:bodyPr wrap="square" anchor="t" lIns="0" rIns="0" tIns="0" bIns="0">
+            <a:spAutoFit/>
+          </a:bodyPr>
+          <a:lstStyle/>
+          <a:p>
+            <a:pPr algn="l">
+              <a:lnSpc>
+                <a:spcPct val="115000"/>
+              </a:lnSpc>
+              <a:spcAft>
+                <a:spcPts val="800"/>
+              </a:spcAft>
+            </a:pPr>
+            <a:r>
+              <a:rPr sz="1700" b="1" i="0">
+                <a:solidFill>
+                  <a:srgbClr val="F0B429"/>
+                </a:solidFill>
+                <a:latin typeface="Segoe UI"/>
+              </a:rPr>
+              <a:t>Two of them touch your filesystem the moment the agent is constructed.</a:t>
+            </a:r>
+          </a:p>
+        </p:txBody>
+      </p:sp>
+    </p:spTree>
+  </p:cSld>
+  <p:clrMapOvr>
+    <a:masterClrMapping/>
+  </p:clrMapOvr>
+</p:sld>
+</file>
+
+<file path=ppt/slides/slide15.xml><?xml version="1.0" encoding="utf-8"?>
+<p:sld xmlns:a="http://schemas.openxmlformats.org/drawingml/2006/main" xmlns:p="http://schemas.openxmlformats.org/presentationml/2006/main" xmlns:r="http://schemas.openxmlformats.org/officeDocument/2006/relationships">
+  <p:cSld>
+    <p:bg>
+      <p:bgPr>
+        <a:solidFill>
+          <a:srgbClr val="0D1117"/>
+        </a:solidFill>
+        <a:effectLst/>
+      </p:bgPr>
+    </p:bg>
+    <p:spTree>
+      <p:nvGrpSpPr>
+        <p:cNvPr id="1" name=""/>
+        <p:cNvGrpSpPr/>
+        <p:nvPr/>
+      </p:nvGrpSpPr>
+      <p:grpSpPr/>
+      <p:sp>
+        <p:nvSpPr>
+          <p:cNvPr id="2" name="TextBox 1"/>
+          <p:cNvSpPr txBox="1"/>
+          <p:nvPr/>
+        </p:nvSpPr>
+        <p:spPr>
+          <a:xfrm>
+            <a:off x="777240" y="502920"/>
+            <a:ext cx="10637215" cy="274320"/>
+          </a:xfrm>
+          <a:prstGeom prst="rect">
+            <a:avLst/>
+          </a:prstGeom>
+          <a:noFill/>
+        </p:spPr>
+        <p:txBody>
+          <a:bodyPr wrap="square" anchor="t" lIns="0" rIns="0" tIns="0" bIns="0">
+            <a:spAutoFit/>
+          </a:bodyPr>
+          <a:lstStyle/>
+          <a:p>
+            <a:pPr algn="l">
+              <a:lnSpc>
+                <a:spcPct val="115000"/>
+              </a:lnSpc>
+              <a:spcAft>
+                <a:spcPts val="800"/>
+              </a:spcAft>
+            </a:pPr>
+            <a:r>
+              <a:rPr sz="1300" b="1" i="0">
+                <a:solidFill>
+                  <a:srgbClr val="F85149"/>
+                </a:solidFill>
+                <a:latin typeface="Segoe UI"/>
+              </a:rPr>
+              <a:t>THE ONE THAT MADE ME LOOK</a:t>
+            </a:r>
+          </a:p>
+        </p:txBody>
+      </p:sp>
+      <p:sp>
+        <p:nvSpPr>
+          <p:cNvPr id="3" name="TextBox 2"/>
+          <p:cNvSpPr txBox="1"/>
+          <p:nvPr/>
+        </p:nvSpPr>
+        <p:spPr>
+          <a:xfrm>
+            <a:off x="777240" y="914400"/>
+            <a:ext cx="10637215" cy="1005840"/>
+          </a:xfrm>
+          <a:prstGeom prst="rect">
+            <a:avLst/>
+          </a:prstGeom>
+          <a:noFill/>
+        </p:spPr>
+        <p:txBody>
+          <a:bodyPr wrap="square" anchor="t" lIns="0" rIns="0" tIns="0" bIns="0">
+            <a:spAutoFit/>
+          </a:bodyPr>
+          <a:lstStyle/>
+          <a:p>
+            <a:pPr algn="l">
+              <a:lnSpc>
+                <a:spcPct val="115000"/>
+              </a:lnSpc>
+              <a:spcAft>
+                <a:spcPts val="800"/>
+              </a:spcAft>
+            </a:pPr>
+            <a:r>
+              <a:rPr sz="3800" b="1" i="0">
+                <a:solidFill>
+                  <a:srgbClr val="E6EDF3"/>
+                </a:solidFill>
+                <a:latin typeface="Segoe UI"/>
+              </a:rPr>
+              <a:t>Memory is on, and it is in your repo</a:t>
+            </a:r>
+          </a:p>
+        </p:txBody>
+      </p:sp>
+      <p:sp>
+        <p:nvSpPr>
+          <p:cNvPr id="4" name="Rectangle 3"/>
+          <p:cNvSpPr/>
+          <p:nvPr/>
+        </p:nvSpPr>
+        <p:spPr>
+          <a:xfrm>
+            <a:off x="777240" y="2103120"/>
+            <a:ext cx="10637215" cy="712597"/>
+          </a:xfrm>
+          <a:prstGeom prst="rect">
+            <a:avLst/>
+          </a:prstGeom>
+          <a:solidFill>
+            <a:srgbClr val="161B22"/>
+          </a:solidFill>
+          <a:ln w="12700">
+            <a:solidFill>
+              <a:srgbClr val="30363D"/>
+            </a:solidFill>
+          </a:ln>
+          <a:effectLst/>
+        </p:spPr>
+        <p:style>
+          <a:lnRef idx="1">
+            <a:schemeClr val="accent1"/>
+          </a:lnRef>
+          <a:fillRef idx="3">
+            <a:schemeClr val="accent1"/>
+          </a:fillRef>
+          <a:effectRef idx="2">
+            <a:schemeClr val="accent1"/>
+          </a:effectRef>
+          <a:fontRef idx="minor">
+            <a:schemeClr val="lt1"/>
+          </a:fontRef>
+        </p:style>
+        <p:txBody>
+          <a:bodyPr rtlCol="0" anchor="ctr"/>
+          <a:lstStyle/>
+          <a:p>
+            <a:pPr algn="ctr"/>
+          </a:p>
+        </p:txBody>
+      </p:sp>
+      <p:sp>
+        <p:nvSpPr>
+          <p:cNvPr id="5" name="TextBox 4"/>
+          <p:cNvSpPr txBox="1"/>
+          <p:nvPr/>
+        </p:nvSpPr>
+        <p:spPr>
+          <a:xfrm>
+            <a:off x="1033272" y="2304288"/>
+            <a:ext cx="10125151" cy="310261"/>
+          </a:xfrm>
+          <a:prstGeom prst="rect">
+            <a:avLst/>
+          </a:prstGeom>
+          <a:noFill/>
+        </p:spPr>
+        <p:txBody>
+          <a:bodyPr wrap="square" anchor="t" lIns="0" rIns="0" tIns="0" bIns="0">
+            <a:spAutoFit/>
+          </a:bodyPr>
+          <a:lstStyle/>
+          <a:p>
+            <a:pPr algn="l">
+              <a:lnSpc>
+                <a:spcPct val="100000"/>
+              </a:lnSpc>
+              <a:spcAft>
+                <a:spcPts val="0"/>
+              </a:spcAft>
+            </a:pPr>
+            <a:r>
+              <a:rPr sz="1900" b="0" i="0">
+                <a:solidFill>
+                  <a:srgbClr val="F0B429"/>
+                </a:solidFill>
+                <a:latin typeface="Consolas"/>
+              </a:rPr>
+              <a:t>{cwd}/agent-file-memory/{timestamp}_{guid}/</a:t>
+            </a:r>
+          </a:p>
+        </p:txBody>
+      </p:sp>
+      <p:sp>
+        <p:nvSpPr>
+          <p:cNvPr id="6" name="TextBox 5"/>
+          <p:cNvSpPr txBox="1"/>
+          <p:nvPr/>
+        </p:nvSpPr>
+        <p:spPr>
+          <a:xfrm>
+            <a:off x="777240" y="3200400"/>
+            <a:ext cx="10637215" cy="3108960"/>
+          </a:xfrm>
+          <a:prstGeom prst="rect">
+            <a:avLst/>
+          </a:prstGeom>
+          <a:noFill/>
+        </p:spPr>
+        <p:txBody>
+          <a:bodyPr wrap="square" anchor="t" lIns="0" rIns="0" tIns="0" bIns="0">
+            <a:spAutoFit/>
+          </a:bodyPr>
+          <a:lstStyle/>
+          <a:p>
+            <a:pPr algn="l" marL="310896" indent="-310896">
+              <a:lnSpc>
+                <a:spcPct val="110000"/>
+              </a:lnSpc>
+              <a:spcAft>
+                <a:spcPts val="1500"/>
+              </a:spcAft>
+            </a:pPr>
+            <a:r>
+              <a:rPr sz="2100" b="1" i="0">
+                <a:solidFill>
+                  <a:srgbClr val="F0B429"/>
+                </a:solidFill>
+                <a:latin typeface="Segoe UI"/>
+              </a:rPr>
+              <a:t>▸  </a:t>
+            </a:r>
+            <a:r>
+              <a:rPr sz="2100" b="1" i="0">
+                <a:solidFill>
+                  <a:srgbClr val="E6EDF3"/>
+                </a:solidFill>
+                <a:latin typeface="Segoe UI"/>
+              </a:rPr>
+              <a:t>DisableFileMemory defaults to false</a:t>
+            </a:r>
+            <a:r>
+              <a:rPr sz="2100" b="0" i="0">
+                <a:solidFill>
+                  <a:srgbClr val="8B949E"/>
+                </a:solidFill>
+                <a:latin typeface="Segoe UI"/>
+              </a:rPr>
+              <a:t>  </a:t>
+            </a:r>
+          </a:p>
+          <a:p>
+            <a:pPr algn="l" marL="310896" indent="-310896">
+              <a:lnSpc>
+                <a:spcPct val="110000"/>
+              </a:lnSpc>
+              <a:spcAft>
+                <a:spcPts val="1500"/>
+              </a:spcAft>
+            </a:pPr>
+            <a:r>
+              <a:rPr sz="2100" b="1" i="0">
+                <a:solidFill>
+                  <a:srgbClr val="F0B429"/>
+                </a:solidFill>
+                <a:latin typeface="Segoe UI"/>
+              </a:rPr>
+              <a:t>▸  </a:t>
+            </a:r>
+            <a:r>
+              <a:rPr sz="2100" b="1" i="0">
+                <a:solidFill>
+                  <a:srgbClr val="E6EDF3"/>
+                </a:solidFill>
+                <a:latin typeface="Segoe UI"/>
+              </a:rPr>
+              <a:t>No store supplied?</a:t>
+            </a:r>
+            <a:r>
+              <a:rPr sz="2100" b="0" i="0">
+                <a:solidFill>
+                  <a:srgbClr val="8B949E"/>
+                </a:solidFill>
+                <a:latin typeface="Segoe UI"/>
+              </a:rPr>
+              <a:t>  The harness builds one, rooted at your working directory</a:t>
+            </a:r>
+          </a:p>
+          <a:p>
+            <a:pPr algn="l" marL="310896" indent="-310896">
+              <a:lnSpc>
+                <a:spcPct val="110000"/>
+              </a:lnSpc>
+              <a:spcAft>
+                <a:spcPts val="1500"/>
+              </a:spcAft>
+            </a:pPr>
+            <a:r>
+              <a:rPr sz="2100" b="1" i="0">
+                <a:solidFill>
+                  <a:srgbClr val="F0B429"/>
+                </a:solidFill>
+                <a:latin typeface="Segoe UI"/>
+              </a:rPr>
+              <a:t>▸  </a:t>
+            </a:r>
+            <a:r>
+              <a:rPr sz="2100" b="1" i="0">
+                <a:solidFill>
+                  <a:srgbClr val="E6EDF3"/>
+                </a:solidFill>
+                <a:latin typeface="Segoe UI"/>
+              </a:rPr>
+              <a:t>Run the console six times</a:t>
+            </a:r>
+            <a:r>
+              <a:rPr sz="2100" b="0" i="0">
+                <a:solidFill>
+                  <a:srgbClr val="8B949E"/>
+                </a:solidFill>
+                <a:latin typeface="Segoe UI"/>
+              </a:rPr>
+              <a:t>  and get six directories in your repo root</a:t>
+            </a:r>
+          </a:p>
+        </p:txBody>
+      </p:sp>
+      <p:sp>
+        <p:nvSpPr>
+          <p:cNvPr id="7" name="TextBox 6"/>
+          <p:cNvSpPr txBox="1"/>
+          <p:nvPr/>
+        </p:nvSpPr>
+        <p:spPr>
+          <a:xfrm>
+            <a:off x="777240" y="5669280"/>
+            <a:ext cx="10637215" cy="548640"/>
+          </a:xfrm>
+          <a:prstGeom prst="rect">
+            <a:avLst/>
+          </a:prstGeom>
+          <a:noFill/>
+        </p:spPr>
+        <p:txBody>
+          <a:bodyPr wrap="square" anchor="t" lIns="0" rIns="0" tIns="0" bIns="0">
+            <a:spAutoFit/>
+          </a:bodyPr>
+          <a:lstStyle/>
+          <a:p>
+            <a:pPr algn="l">
+              <a:lnSpc>
+                <a:spcPct val="115000"/>
+              </a:lnSpc>
+              <a:spcAft>
+                <a:spcPts val="800"/>
+              </a:spcAft>
+            </a:pPr>
+            <a:r>
+              <a:rPr sz="1800" b="0" i="0">
+                <a:solidFill>
+                  <a:srgbClr val="3FB950"/>
+                </a:solidFill>
+                <a:latin typeface="Segoe UI"/>
+              </a:rPr>
+              <a:t>Now regression-tested: construct the agent in a temp directory, assert it stays empty.</a:t>
+            </a:r>
+          </a:p>
+        </p:txBody>
+      </p:sp>
+    </p:spTree>
+  </p:cSld>
+  <p:clrMapOvr>
+    <a:masterClrMapping/>
+  </p:clrMapOvr>
+</p:sld>
+</file>
+
+<file path=ppt/slides/slide16.xml><?xml version="1.0" encoding="utf-8"?>
+<p:sld xmlns:a="http://schemas.openxmlformats.org/drawingml/2006/main" xmlns:p="http://schemas.openxmlformats.org/presentationml/2006/main" xmlns:r="http://schemas.openxmlformats.org/officeDocument/2006/relationships">
+  <p:cSld>
+    <p:bg>
+      <p:bgPr>
+        <a:solidFill>
+          <a:srgbClr val="0D1117"/>
+        </a:solidFill>
+        <a:effectLst/>
+      </p:bgPr>
+    </p:bg>
+    <p:spTree>
+      <p:nvGrpSpPr>
+        <p:cNvPr id="1" name=""/>
+        <p:cNvGrpSpPr/>
+        <p:nvPr/>
+      </p:nvGrpSpPr>
+      <p:grpSpPr/>
+      <p:sp>
+        <p:nvSpPr>
+          <p:cNvPr id="2" name="TextBox 1"/>
+          <p:cNvSpPr txBox="1"/>
+          <p:nvPr/>
+        </p:nvSpPr>
+        <p:spPr>
+          <a:xfrm>
+            <a:off x="777240" y="502920"/>
+            <a:ext cx="10637215" cy="274320"/>
+          </a:xfrm>
+          <a:prstGeom prst="rect">
+            <a:avLst/>
+          </a:prstGeom>
+          <a:noFill/>
+        </p:spPr>
+        <p:txBody>
+          <a:bodyPr wrap="square" anchor="t" lIns="0" rIns="0" tIns="0" bIns="0">
+            <a:spAutoFit/>
+          </a:bodyPr>
+          <a:lstStyle/>
+          <a:p>
+            <a:pPr algn="l">
+              <a:lnSpc>
+                <a:spcPct val="115000"/>
+              </a:lnSpc>
+              <a:spcAft>
+                <a:spcPts val="800"/>
+              </a:spcAft>
+            </a:pPr>
+            <a:r>
+              <a:rPr sz="1300" b="1" i="0">
+                <a:solidFill>
+                  <a:srgbClr val="F85149"/>
+                </a:solidFill>
+                <a:latin typeface="Segoe UI"/>
+              </a:rPr>
+              <a:t>THE ONE THAT WILL BITE YOU IN PRODUCTION</a:t>
+            </a:r>
+          </a:p>
+        </p:txBody>
+      </p:sp>
+      <p:sp>
+        <p:nvSpPr>
+          <p:cNvPr id="3" name="TextBox 2"/>
+          <p:cNvSpPr txBox="1"/>
+          <p:nvPr/>
+        </p:nvSpPr>
+        <p:spPr>
+          <a:xfrm>
+            <a:off x="777240" y="914400"/>
+            <a:ext cx="10637215" cy="1005840"/>
+          </a:xfrm>
+          <a:prstGeom prst="rect">
+            <a:avLst/>
+          </a:prstGeom>
+          <a:noFill/>
+        </p:spPr>
+        <p:txBody>
+          <a:bodyPr wrap="square" anchor="t" lIns="0" rIns="0" tIns="0" bIns="0">
+            <a:spAutoFit/>
+          </a:bodyPr>
+          <a:lstStyle/>
+          <a:p>
+            <a:pPr algn="l">
+              <a:lnSpc>
+                <a:spcPct val="115000"/>
+              </a:lnSpc>
+              <a:spcAft>
+                <a:spcPts val="800"/>
+              </a:spcAft>
+            </a:pPr>
+            <a:r>
+              <a:rPr sz="3400" b="1" i="0">
+                <a:solidFill>
+                  <a:srgbClr val="E6EDF3"/>
+                </a:solidFill>
+                <a:latin typeface="Segoe UI"/>
+              </a:rPr>
+              <a:t>Compaction is off unless you set both limits</a:t>
+            </a:r>
+          </a:p>
+        </p:txBody>
+      </p:sp>
+      <p:sp>
+        <p:nvSpPr>
+          <p:cNvPr id="4" name="Rectangle 3"/>
+          <p:cNvSpPr/>
+          <p:nvPr/>
+        </p:nvSpPr>
+        <p:spPr>
+          <a:xfrm>
+            <a:off x="777240" y="2011680"/>
+            <a:ext cx="10637215" cy="1092708"/>
+          </a:xfrm>
+          <a:prstGeom prst="rect">
+            <a:avLst/>
+          </a:prstGeom>
+          <a:solidFill>
+            <a:srgbClr val="0F141C"/>
+          </a:solidFill>
+          <a:ln w="12700">
+            <a:solidFill>
+              <a:srgbClr val="30363D"/>
+            </a:solidFill>
+          </a:ln>
+          <a:effectLst/>
+        </p:spPr>
+        <p:style>
+          <a:lnRef idx="1">
+            <a:schemeClr val="accent1"/>
+          </a:lnRef>
+          <a:fillRef idx="3">
+            <a:schemeClr val="accent1"/>
+          </a:fillRef>
+          <a:effectRef idx="2">
+            <a:schemeClr val="accent1"/>
+          </a:effectRef>
+          <a:fontRef idx="minor">
+            <a:schemeClr val="lt1"/>
+          </a:fontRef>
+        </p:style>
+        <p:txBody>
+          <a:bodyPr rtlCol="0" anchor="ctr"/>
+          <a:lstStyle/>
+          <a:p>
+            <a:pPr algn="ctr"/>
+          </a:p>
+        </p:txBody>
+      </p:sp>
+      <p:sp>
+        <p:nvSpPr>
+          <p:cNvPr id="5" name="Rectangle 4"/>
+          <p:cNvSpPr/>
+          <p:nvPr/>
+        </p:nvSpPr>
+        <p:spPr>
+          <a:xfrm>
+            <a:off x="777240" y="2011680"/>
+            <a:ext cx="38100" cy="1092708"/>
+          </a:xfrm>
+          <a:prstGeom prst="rect">
+            <a:avLst/>
+          </a:prstGeom>
+          <a:solidFill>
+            <a:srgbClr val="30363D"/>
+          </a:solidFill>
+          <a:ln>
+            <a:noFill/>
+          </a:ln>
+          <a:effectLst/>
+        </p:spPr>
+        <p:style>
+          <a:lnRef idx="1">
+            <a:schemeClr val="accent1"/>
+          </a:lnRef>
+          <a:fillRef idx="3">
+            <a:schemeClr val="accent1"/>
+          </a:fillRef>
+          <a:effectRef idx="2">
+            <a:schemeClr val="accent1"/>
+          </a:effectRef>
+          <a:fontRef idx="minor">
+            <a:schemeClr val="lt1"/>
+          </a:fontRef>
+        </p:style>
+        <p:txBody>
+          <a:bodyPr rtlCol="0" anchor="ctr"/>
+          <a:lstStyle/>
+          <a:p>
+            <a:pPr algn="ctr"/>
+          </a:p>
+        </p:txBody>
+      </p:sp>
+      <p:sp>
+        <p:nvSpPr>
+          <p:cNvPr id="6" name="TextBox 5"/>
+          <p:cNvSpPr txBox="1"/>
+          <p:nvPr/>
+        </p:nvSpPr>
+        <p:spPr>
+          <a:xfrm>
+            <a:off x="1051560" y="2194560"/>
+            <a:ext cx="10134295" cy="726948"/>
+          </a:xfrm>
+          <a:prstGeom prst="rect">
+            <a:avLst/>
+          </a:prstGeom>
+          <a:noFill/>
+        </p:spPr>
+        <p:txBody>
+          <a:bodyPr wrap="square" anchor="t" lIns="0" rIns="0" tIns="0" bIns="0">
+            <a:spAutoFit/>
+          </a:bodyPr>
+          <a:lstStyle/>
+          <a:p>
+            <a:pPr algn="l">
+              <a:lnSpc>
+                <a:spcPct val="100000"/>
+              </a:lnSpc>
+              <a:spcAft>
+                <a:spcPts val="0"/>
+              </a:spcAft>
+            </a:pPr>
+            <a:r>
+              <a:rPr sz="1500" b="0" i="0">
+                <a:solidFill>
+                  <a:srgbClr val="79D6BE"/>
+                </a:solidFill>
+                <a:latin typeface="Consolas"/>
+              </a:rPr>
+              <a:t>MaxContextWindowTokens</a:t>
+            </a:r>
+            <a:r>
+              <a:rPr sz="1500" b="0" i="0">
+                <a:solidFill>
+                  <a:srgbClr val="E6EDF3"/>
+                </a:solidFill>
+                <a:latin typeface="Consolas"/>
+              </a:rPr>
+              <a:t> = </a:t>
+            </a:r>
+            <a:r>
+              <a:rPr sz="1500" b="0" i="0">
+                <a:solidFill>
+                  <a:srgbClr val="E8A87C"/>
+                </a:solidFill>
+                <a:latin typeface="Consolas"/>
+              </a:rPr>
+              <a:t>128_000</a:t>
+            </a:r>
+            <a:r>
+              <a:rPr sz="1500" b="0" i="0">
+                <a:solidFill>
+                  <a:srgbClr val="E6EDF3"/>
+                </a:solidFill>
+                <a:latin typeface="Consolas"/>
+              </a:rPr>
+              <a:t>,</a:t>
+            </a:r>
+          </a:p>
+          <a:p>
+            <a:pPr algn="l">
+              <a:lnSpc>
+                <a:spcPct val="100000"/>
+              </a:lnSpc>
+              <a:spcAft>
+                <a:spcPts val="0"/>
+              </a:spcAft>
+            </a:pPr>
+            <a:r>
+              <a:rPr sz="1500" b="0" i="0">
+                <a:solidFill>
+                  <a:srgbClr val="79D6BE"/>
+                </a:solidFill>
+                <a:latin typeface="Consolas"/>
+              </a:rPr>
+              <a:t>MaxOutputTokens</a:t>
+            </a:r>
+            <a:r>
+              <a:rPr sz="1500" b="0" i="0">
+                <a:solidFill>
+                  <a:srgbClr val="E6EDF3"/>
+                </a:solidFill>
+                <a:latin typeface="Consolas"/>
+              </a:rPr>
+              <a:t>        = </a:t>
+            </a:r>
+            <a:r>
+              <a:rPr sz="1500" b="0" i="0">
+                <a:solidFill>
+                  <a:srgbClr val="E8A87C"/>
+                </a:solidFill>
+                <a:latin typeface="Consolas"/>
+              </a:rPr>
+              <a:t>16_384</a:t>
+            </a:r>
+            <a:r>
+              <a:rPr sz="1500" b="0" i="0">
+                <a:solidFill>
+                  <a:srgbClr val="E6EDF3"/>
+                </a:solidFill>
+                <a:latin typeface="Consolas"/>
+              </a:rPr>
+              <a:t>,     </a:t>
+            </a:r>
+            <a:r>
+              <a:rPr sz="1500" b="0" i="0">
+                <a:solidFill>
+                  <a:srgbClr val="6A7889"/>
+                </a:solidFill>
+                <a:latin typeface="Consolas"/>
+              </a:rPr>
+              <a:t>// set one and not the other:</a:t>
+            </a:r>
+          </a:p>
+          <a:p>
+            <a:pPr algn="l">
+              <a:lnSpc>
+                <a:spcPct val="100000"/>
+              </a:lnSpc>
+              <a:spcAft>
+                <a:spcPts val="0"/>
+              </a:spcAft>
+            </a:pPr>
+            <a:r>
+              <a:rPr sz="1500" b="0" i="0">
+                <a:solidFill>
+                  <a:srgbClr val="E6EDF3"/>
+                </a:solidFill>
+                <a:latin typeface="Consolas"/>
+              </a:rPr>
+              <a:t>                                     </a:t>
+            </a:r>
+            <a:r>
+              <a:rPr sz="1500" b="0" i="0">
+                <a:solidFill>
+                  <a:srgbClr val="6A7889"/>
+                </a:solidFill>
+                <a:latin typeface="Consolas"/>
+              </a:rPr>
+              <a:t>//   no compaction, no warning, no error</a:t>
+            </a:r>
+          </a:p>
+        </p:txBody>
+      </p:sp>
+      <p:sp>
+        <p:nvSpPr>
+          <p:cNvPr id="7" name="TextBox 6"/>
+          <p:cNvSpPr txBox="1"/>
+          <p:nvPr/>
+        </p:nvSpPr>
+        <p:spPr>
+          <a:xfrm>
+            <a:off x="777240" y="3561588"/>
+            <a:ext cx="10637215" cy="1463040"/>
+          </a:xfrm>
+          <a:prstGeom prst="rect">
+            <a:avLst/>
+          </a:prstGeom>
+          <a:noFill/>
+        </p:spPr>
+        <p:txBody>
+          <a:bodyPr wrap="square" anchor="t" lIns="0" rIns="0" tIns="0" bIns="0">
+            <a:spAutoFit/>
+          </a:bodyPr>
+          <a:lstStyle/>
+          <a:p>
+            <a:pPr algn="l">
+              <a:lnSpc>
+                <a:spcPct val="130000"/>
+              </a:lnSpc>
+              <a:spcAft>
+                <a:spcPts val="1600"/>
+              </a:spcAft>
+            </a:pPr>
+            <a:r>
+              <a:rPr sz="2400" b="0" i="0">
+                <a:solidFill>
+                  <a:srgbClr val="E6EDF3"/>
+                </a:solidFill>
+                <a:latin typeface="Segoe UI"/>
+              </a:rPr>
+              <a:t>The compaction provider is added to the pipeline only when </a:t>
+            </a:r>
+            <a:r>
+              <a:rPr sz="2400" b="1" i="1">
+                <a:solidFill>
+                  <a:srgbClr val="E6EDF3"/>
+                </a:solidFill>
+                <a:latin typeface="Segoe UI"/>
+              </a:rPr>
+              <a:t>both</a:t>
+            </a:r>
+            <a:r>
+              <a:rPr sz="2400" b="0" i="0">
+                <a:solidFill>
+                  <a:srgbClr val="E6EDF3"/>
+                </a:solidFill>
+                <a:latin typeface="Segoe UI"/>
+              </a:rPr>
+              <a:t> are non-null.</a:t>
+            </a:r>
+          </a:p>
+          <a:p>
+            <a:pPr algn="l">
+              <a:lnSpc>
+                <a:spcPct val="130000"/>
+              </a:lnSpc>
+              <a:spcAft>
+                <a:spcPts val="1600"/>
+              </a:spcAft>
+            </a:pPr>
+            <a:r>
+              <a:rPr sz="2400" b="1" i="0">
+                <a:solidFill>
+                  <a:srgbClr val="F85149"/>
+                </a:solidFill>
+                <a:latin typeface="Segoe UI"/>
+              </a:rPr>
+              <a:t>You find out on the turn the context window overflows.</a:t>
+            </a:r>
+          </a:p>
+        </p:txBody>
+      </p:sp>
+    </p:spTree>
+  </p:cSld>
+  <p:clrMapOvr>
+    <a:masterClrMapping/>
+  </p:clrMapOvr>
+</p:sld>
+</file>
+
+<file path=ppt/slides/slide17.xml><?xml version="1.0" encoding="utf-8"?>
+<p:sld xmlns:a="http://schemas.openxmlformats.org/drawingml/2006/main" xmlns:p="http://schemas.openxmlformats.org/presentationml/2006/main" xmlns:r="http://schemas.openxmlformats.org/officeDocument/2006/relationships">
+  <p:cSld>
+    <p:bg>
+      <p:bgPr>
+        <a:solidFill>
+          <a:srgbClr val="0D1117"/>
+        </a:solidFill>
+        <a:effectLst/>
+      </p:bgPr>
+    </p:bg>
+    <p:spTree>
+      <p:nvGrpSpPr>
+        <p:cNvPr id="1" name=""/>
+        <p:cNvGrpSpPr/>
+        <p:nvPr/>
+      </p:nvGrpSpPr>
+      <p:grpSpPr/>
+      <p:sp>
+        <p:nvSpPr>
+          <p:cNvPr id="2" name="TextBox 1"/>
+          <p:cNvSpPr txBox="1"/>
+          <p:nvPr/>
+        </p:nvSpPr>
+        <p:spPr>
+          <a:xfrm>
+            <a:off x="777240" y="502920"/>
+            <a:ext cx="10637215" cy="274320"/>
+          </a:xfrm>
+          <a:prstGeom prst="rect">
+            <a:avLst/>
+          </a:prstGeom>
+          <a:noFill/>
+        </p:spPr>
+        <p:txBody>
+          <a:bodyPr wrap="square" anchor="t" lIns="0" rIns="0" tIns="0" bIns="0">
+            <a:spAutoFit/>
+          </a:bodyPr>
+          <a:lstStyle/>
+          <a:p>
+            <a:pPr algn="l">
+              <a:lnSpc>
+                <a:spcPct val="115000"/>
+              </a:lnSpc>
+              <a:spcAft>
+                <a:spcPts val="800"/>
+              </a:spcAft>
+            </a:pPr>
+            <a:r>
+              <a:rPr sz="1300" b="1" i="0">
+                <a:solidFill>
+                  <a:srgbClr val="F85149"/>
+                </a:solidFill>
+                <a:latin typeface="Segoe UI"/>
+              </a:rPr>
+              <a:t>THE BATTERIES HAVE A VOICE</a:t>
+            </a:r>
+          </a:p>
+        </p:txBody>
+      </p:sp>
+      <p:sp>
+        <p:nvSpPr>
+          <p:cNvPr id="3" name="TextBox 2"/>
+          <p:cNvSpPr txBox="1"/>
+          <p:nvPr/>
+        </p:nvSpPr>
+        <p:spPr>
+          <a:xfrm>
+            <a:off x="777240" y="914400"/>
+            <a:ext cx="10637215" cy="1005840"/>
+          </a:xfrm>
+          <a:prstGeom prst="rect">
+            <a:avLst/>
+          </a:prstGeom>
+          <a:noFill/>
+        </p:spPr>
+        <p:txBody>
+          <a:bodyPr wrap="square" anchor="t" lIns="0" rIns="0" tIns="0" bIns="0">
+            <a:spAutoFit/>
+          </a:bodyPr>
+          <a:lstStyle/>
+          <a:p>
+            <a:pPr algn="l">
+              <a:lnSpc>
+                <a:spcPct val="115000"/>
+              </a:lnSpc>
+              <a:spcAft>
+                <a:spcPts val="800"/>
+              </a:spcAft>
+            </a:pPr>
+            <a:r>
+              <a:rPr sz="3600" b="1" i="0">
+                <a:solidFill>
+                  <a:srgbClr val="E6EDF3"/>
+                </a:solidFill>
+                <a:latin typeface="Segoe UI"/>
+              </a:rPr>
+              <a:t>The framework talks through your character</a:t>
+            </a:r>
+          </a:p>
+        </p:txBody>
+      </p:sp>
+      <p:sp>
+        <p:nvSpPr>
+          <p:cNvPr id="4" name="Rectangle 3"/>
+          <p:cNvSpPr/>
+          <p:nvPr/>
+        </p:nvSpPr>
+        <p:spPr>
+          <a:xfrm>
+            <a:off x="777240" y="1965960"/>
+            <a:ext cx="10637215" cy="1573144"/>
+          </a:xfrm>
+          <a:prstGeom prst="rect">
+            <a:avLst/>
+          </a:prstGeom>
+          <a:solidFill>
+            <a:srgbClr val="161B22"/>
+          </a:solidFill>
+          <a:ln w="12700">
+            <a:solidFill>
+              <a:srgbClr val="30363D"/>
+            </a:solidFill>
+          </a:ln>
+          <a:effectLst/>
+        </p:spPr>
+        <p:style>
+          <a:lnRef idx="1">
+            <a:schemeClr val="accent1"/>
+          </a:lnRef>
+          <a:fillRef idx="3">
+            <a:schemeClr val="accent1"/>
+          </a:fillRef>
+          <a:effectRef idx="2">
+            <a:schemeClr val="accent1"/>
+          </a:effectRef>
+          <a:fontRef idx="minor">
+            <a:schemeClr val="lt1"/>
+          </a:fontRef>
+        </p:style>
+        <p:txBody>
+          <a:bodyPr rtlCol="0" anchor="ctr"/>
+          <a:lstStyle/>
+          <a:p>
+            <a:pPr algn="ctr"/>
+          </a:p>
+        </p:txBody>
+      </p:sp>
+      <p:sp>
+        <p:nvSpPr>
+          <p:cNvPr id="5" name="TextBox 4"/>
+          <p:cNvSpPr txBox="1"/>
+          <p:nvPr/>
+        </p:nvSpPr>
+        <p:spPr>
+          <a:xfrm>
+            <a:off x="1033272" y="2167128"/>
+            <a:ext cx="10125151" cy="1170808"/>
+          </a:xfrm>
+          <a:prstGeom prst="rect">
+            <a:avLst/>
+          </a:prstGeom>
+          <a:noFill/>
+        </p:spPr>
+        <p:txBody>
+          <a:bodyPr wrap="square" anchor="t" lIns="0" rIns="0" tIns="0" bIns="0">
+            <a:spAutoFit/>
+          </a:bodyPr>
+          <a:lstStyle/>
+          <a:p>
+            <a:pPr algn="l">
+              <a:lnSpc>
+                <a:spcPct val="100000"/>
+              </a:lnSpc>
+              <a:spcAft>
+                <a:spcPts val="0"/>
+              </a:spcAft>
+            </a:pPr>
+            <a:r>
+              <a:rPr sz="1500" b="0" i="0">
+                <a:solidFill>
+                  <a:srgbClr val="E6EDF3"/>
+                </a:solidFill>
+                <a:latin typeface="Consolas"/>
+              </a:rPr>
+              <a:t>  AURORA  · mode_set          ← harness</a:t>
+            </a:r>
+          </a:p>
+          <a:p>
+            <a:pPr algn="l">
+              <a:lnSpc>
+                <a:spcPct val="100000"/>
+              </a:lnSpc>
+              <a:spcAft>
+                <a:spcPts val="0"/>
+              </a:spcAft>
+            </a:pPr>
+            <a:r>
+              <a:rPr sz="1500" b="0" i="0">
+                <a:solidFill>
+                  <a:srgbClr val="E6EDF3"/>
+                </a:solidFill>
+                <a:latin typeface="Consolas"/>
+              </a:rPr>
+              <a:t>          · ScanSector        ← ship</a:t>
+            </a:r>
+          </a:p>
+          <a:p>
+            <a:pPr algn="l">
+              <a:lnSpc>
+                <a:spcPct val="100000"/>
+              </a:lnSpc>
+              <a:spcAft>
+                <a:spcPts val="0"/>
+              </a:spcAft>
+            </a:pPr>
+            <a:r>
+              <a:rPr sz="1500" b="0" i="0">
+                <a:solidFill>
+                  <a:srgbClr val="E6EDF3"/>
+                </a:solidFill>
+                <a:latin typeface="Consolas"/>
+              </a:rPr>
+              <a:t>          · ReadShipLog       ← ship</a:t>
+            </a:r>
+          </a:p>
+          <a:p>
+            <a:pPr algn="l">
+              <a:lnSpc>
+                <a:spcPct val="100000"/>
+              </a:lnSpc>
+              <a:spcAft>
+                <a:spcPts val="0"/>
+              </a:spcAft>
+            </a:pPr>
+            <a:r>
+              <a:rPr sz="1500" b="0" i="0">
+                <a:solidFill>
+                  <a:srgbClr val="E6EDF3"/>
+                </a:solidFill>
+                <a:latin typeface="Consolas"/>
+              </a:rPr>
+              <a:t>          · todos_complete    ← harness</a:t>
+            </a:r>
+          </a:p>
+          <a:p>
+            <a:pPr algn="l">
+              <a:lnSpc>
+                <a:spcPct val="100000"/>
+              </a:lnSpc>
+              <a:spcAft>
+                <a:spcPts val="0"/>
+              </a:spcAft>
+            </a:pPr>
+            <a:r>
+              <a:rPr sz="1500" b="0" i="0">
+                <a:solidFill>
+                  <a:srgbClr val="E6EDF3"/>
+                </a:solidFill>
+                <a:latin typeface="Consolas"/>
+              </a:rPr>
+              <a:t>          · todos_complete    ← harness</a:t>
+            </a:r>
+          </a:p>
+        </p:txBody>
+      </p:sp>
+      <p:sp>
+        <p:nvSpPr>
+          <p:cNvPr id="6" name="TextBox 5"/>
+          <p:cNvSpPr txBox="1"/>
+          <p:nvPr/>
+        </p:nvSpPr>
+        <p:spPr>
+          <a:xfrm>
+            <a:off x="777240" y="3749039"/>
+            <a:ext cx="10637215" cy="457200"/>
+          </a:xfrm>
+          <a:prstGeom prst="rect">
+            <a:avLst/>
+          </a:prstGeom>
+          <a:noFill/>
+        </p:spPr>
+        <p:txBody>
+          <a:bodyPr wrap="square" anchor="t" lIns="0" rIns="0" tIns="0" bIns="0">
+            <a:spAutoFit/>
+          </a:bodyPr>
+          <a:lstStyle/>
+          <a:p>
+            <a:pPr algn="l">
+              <a:lnSpc>
+                <a:spcPct val="115000"/>
+              </a:lnSpc>
+              <a:spcAft>
+                <a:spcPts val="800"/>
+              </a:spcAft>
+            </a:pPr>
+            <a:r>
+              <a:rPr sz="1900" b="0" i="0">
+                <a:solidFill>
+                  <a:srgbClr val="8B949E"/>
+                </a:solidFill>
+                <a:latin typeface="Segoe UI"/>
+              </a:rPr>
+              <a:t>Whole turns were nothing but </a:t>
+            </a:r>
+            <a:r>
+              <a:rPr sz="1900" b="0" i="0">
+                <a:solidFill>
+                  <a:srgbClr val="F0B429"/>
+                </a:solidFill>
+                <a:latin typeface="Consolas"/>
+              </a:rPr>
+              <a:t>todos_add</a:t>
+            </a:r>
+            <a:r>
+              <a:rPr sz="1900" b="0" i="0">
+                <a:solidFill>
+                  <a:srgbClr val="8B949E"/>
+                </a:solidFill>
+                <a:latin typeface="Segoe UI"/>
+              </a:rPr>
+              <a:t> — which reads as the agent working when it is the agent filing.</a:t>
+            </a:r>
+          </a:p>
+        </p:txBody>
+      </p:sp>
+      <p:sp>
+        <p:nvSpPr>
+          <p:cNvPr id="7" name="Rectangle 6"/>
+          <p:cNvSpPr/>
+          <p:nvPr/>
+        </p:nvSpPr>
+        <p:spPr>
+          <a:xfrm>
+            <a:off x="777240" y="4526280"/>
+            <a:ext cx="2926080" cy="19050"/>
+          </a:xfrm>
+          <a:prstGeom prst="rect">
+            <a:avLst/>
+          </a:prstGeom>
+          <a:solidFill>
+            <a:srgbClr val="30363D"/>
+          </a:solidFill>
+          <a:ln>
+            <a:noFill/>
+          </a:ln>
+          <a:effectLst/>
+        </p:spPr>
+        <p:style>
+          <a:lnRef idx="1">
+            <a:schemeClr val="accent1"/>
+          </a:lnRef>
+          <a:fillRef idx="3">
+            <a:schemeClr val="accent1"/>
+          </a:fillRef>
+          <a:effectRef idx="2">
+            <a:schemeClr val="accent1"/>
+          </a:effectRef>
+          <a:fontRef idx="minor">
+            <a:schemeClr val="lt1"/>
+          </a:fontRef>
+        </p:style>
+        <p:txBody>
+          <a:bodyPr rtlCol="0" anchor="ctr"/>
+          <a:lstStyle/>
+          <a:p>
+            <a:pPr algn="ctr"/>
+          </a:p>
+        </p:txBody>
+      </p:sp>
+      <p:sp>
+        <p:nvSpPr>
+          <p:cNvPr id="8" name="TextBox 7"/>
+          <p:cNvSpPr txBox="1"/>
+          <p:nvPr/>
+        </p:nvSpPr>
+        <p:spPr>
+          <a:xfrm>
+            <a:off x="777240" y="4800600"/>
+            <a:ext cx="10637215" cy="1097280"/>
+          </a:xfrm>
+          <a:prstGeom prst="rect">
+            <a:avLst/>
+          </a:prstGeom>
+          <a:noFill/>
+        </p:spPr>
+        <p:txBody>
+          <a:bodyPr wrap="square" anchor="t" lIns="0" rIns="0" tIns="0" bIns="0">
+            <a:spAutoFit/>
+          </a:bodyPr>
+          <a:lstStyle/>
+          <a:p>
+            <a:pPr algn="l">
+              <a:lnSpc>
+                <a:spcPct val="125000"/>
+              </a:lnSpc>
+              <a:spcAft>
+                <a:spcPts val="1000"/>
+              </a:spcAft>
+            </a:pPr>
+            <a:r>
+              <a:rPr sz="1700" b="0" i="0">
+                <a:solidFill>
+                  <a:srgbClr val="8B949E"/>
+                </a:solidFill>
+                <a:latin typeface="Segoe UI"/>
+              </a:rPr>
+              <a:t>And it leaks into the voice. AURORA opened a voyage with:</a:t>
+            </a:r>
+          </a:p>
+          <a:p>
+            <a:pPr algn="l">
+              <a:lnSpc>
+                <a:spcPct val="125000"/>
+              </a:lnSpc>
+              <a:spcAft>
+                <a:spcPts val="1000"/>
+              </a:spcAft>
+            </a:pPr>
+            <a:r>
+              <a:rPr sz="2400" b="0" i="1">
+                <a:solidFill>
+                  <a:srgbClr val="58A6FF"/>
+                </a:solidFill>
+                <a:latin typeface="Segoe UI"/>
+              </a:rPr>
+              <a:t>“No outstanding tasks. Standing by for orders.”</a:t>
+            </a:r>
+          </a:p>
+        </p:txBody>
+      </p:sp>
+    </p:spTree>
+  </p:cSld>
+  <p:clrMapOvr>
+    <a:masterClrMapping/>
+  </p:clrMapOvr>
+</p:sld>
+</file>
+
+<file path=ppt/slides/slide18.xml><?xml version="1.0" encoding="utf-8"?>
+<p:sld xmlns:a="http://schemas.openxmlformats.org/drawingml/2006/main" xmlns:p="http://schemas.openxmlformats.org/presentationml/2006/main" xmlns:r="http://schemas.openxmlformats.org/officeDocument/2006/relationships">
+  <p:cSld>
+    <p:bg>
+      <p:bgPr>
+        <a:solidFill>
+          <a:srgbClr val="0D1117"/>
+        </a:solidFill>
+        <a:effectLst/>
+      </p:bgPr>
+    </p:bg>
+    <p:spTree>
+      <p:nvGrpSpPr>
+        <p:cNvPr id="1" name=""/>
+        <p:cNvGrpSpPr/>
+        <p:nvPr/>
+      </p:nvGrpSpPr>
+      <p:grpSpPr/>
+      <p:sp>
+        <p:nvSpPr>
+          <p:cNvPr id="2" name="TextBox 1"/>
+          <p:cNvSpPr txBox="1"/>
+          <p:nvPr/>
+        </p:nvSpPr>
+        <p:spPr>
+          <a:xfrm>
+            <a:off x="777240" y="502920"/>
+            <a:ext cx="10637215" cy="274320"/>
+          </a:xfrm>
+          <a:prstGeom prst="rect">
+            <a:avLst/>
+          </a:prstGeom>
+          <a:noFill/>
+        </p:spPr>
+        <p:txBody>
+          <a:bodyPr wrap="square" anchor="t" lIns="0" rIns="0" tIns="0" bIns="0">
+            <a:spAutoFit/>
+          </a:bodyPr>
+          <a:lstStyle/>
+          <a:p>
+            <a:pPr algn="l">
+              <a:lnSpc>
+                <a:spcPct val="115000"/>
+              </a:lnSpc>
+              <a:spcAft>
+                <a:spcPts val="800"/>
+              </a:spcAft>
+            </a:pPr>
+            <a:r>
+              <a:rPr sz="1300" b="1" i="0">
+                <a:solidFill>
+                  <a:srgbClr val="F0B429"/>
+                </a:solidFill>
                 <a:latin typeface="Consolas"/>
               </a:rPr>
               <a:t>src/ShipAI.Agent/Tools/SensorTools.cs</a:t>
@@ -13062,7 +15636,7 @@
 </p:sld>
 </file>
 
-<file path=ppt/slides/slide15.xml><?xml version="1.0" encoding="utf-8"?>
+<file path=ppt/slides/slide19.xml><?xml version="1.0" encoding="utf-8"?>
 <p:sld xmlns:a="http://schemas.openxmlformats.org/drawingml/2006/main" xmlns:p="http://schemas.openxmlformats.org/presentationml/2006/main" xmlns:r="http://schemas.openxmlformats.org/officeDocument/2006/relationships">
   <p:cSld>
     <p:bg>
@@ -14245,7 +16819,330 @@
 </p:sld>
 </file>
 
-<file path=ppt/slides/slide16.xml><?xml version="1.0" encoding="utf-8"?>
+<file path=ppt/slides/slide2.xml><?xml version="1.0" encoding="utf-8"?>
+<p:sld xmlns:a="http://schemas.openxmlformats.org/drawingml/2006/main" xmlns:p="http://schemas.openxmlformats.org/presentationml/2006/main" xmlns:r="http://schemas.openxmlformats.org/officeDocument/2006/relationships">
+  <p:cSld>
+    <p:bg>
+      <p:bgPr>
+        <a:solidFill>
+          <a:srgbClr val="0D1117"/>
+        </a:solidFill>
+        <a:effectLst/>
+      </p:bgPr>
+    </p:bg>
+    <p:spTree>
+      <p:nvGrpSpPr>
+        <p:cNvPr id="1" name=""/>
+        <p:cNvGrpSpPr/>
+        <p:nvPr/>
+      </p:nvGrpSpPr>
+      <p:grpSpPr/>
+      <p:sp>
+        <p:nvSpPr>
+          <p:cNvPr id="2" name="TextBox 1"/>
+          <p:cNvSpPr txBox="1"/>
+          <p:nvPr/>
+        </p:nvSpPr>
+        <p:spPr>
+          <a:xfrm>
+            <a:off x="777240" y="502920"/>
+            <a:ext cx="10637215" cy="274320"/>
+          </a:xfrm>
+          <a:prstGeom prst="rect">
+            <a:avLst/>
+          </a:prstGeom>
+          <a:noFill/>
+        </p:spPr>
+        <p:txBody>
+          <a:bodyPr wrap="square" anchor="t" lIns="0" rIns="0" tIns="0" bIns="0">
+            <a:spAutoFit/>
+          </a:bodyPr>
+          <a:lstStyle/>
+          <a:p>
+            <a:pPr algn="l">
+              <a:lnSpc>
+                <a:spcPct val="115000"/>
+              </a:lnSpc>
+              <a:spcAft>
+                <a:spcPts val="800"/>
+              </a:spcAft>
+            </a:pPr>
+            <a:r>
+              <a:rPr sz="1300" b="1" i="0">
+                <a:solidFill>
+                  <a:srgbClr val="F0B429"/>
+                </a:solidFill>
+                <a:latin typeface="Segoe UI"/>
+              </a:rPr>
+              <a:t>BEFORE WE LAUNCH</a:t>
+            </a:r>
+          </a:p>
+        </p:txBody>
+      </p:sp>
+      <p:sp>
+        <p:nvSpPr>
+          <p:cNvPr id="3" name="TextBox 2"/>
+          <p:cNvSpPr txBox="1"/>
+          <p:nvPr/>
+        </p:nvSpPr>
+        <p:spPr>
+          <a:xfrm>
+            <a:off x="777240" y="914400"/>
+            <a:ext cx="10637215" cy="1005840"/>
+          </a:xfrm>
+          <a:prstGeom prst="rect">
+            <a:avLst/>
+          </a:prstGeom>
+          <a:noFill/>
+        </p:spPr>
+        <p:txBody>
+          <a:bodyPr wrap="square" anchor="t" lIns="0" rIns="0" tIns="0" bIns="0">
+            <a:spAutoFit/>
+          </a:bodyPr>
+          <a:lstStyle/>
+          <a:p>
+            <a:pPr algn="l">
+              <a:lnSpc>
+                <a:spcPct val="115000"/>
+              </a:lnSpc>
+              <a:spcAft>
+                <a:spcPts val="800"/>
+              </a:spcAft>
+            </a:pPr>
+            <a:r>
+              <a:rPr sz="4200" b="1" i="0">
+                <a:solidFill>
+                  <a:srgbClr val="E6EDF3"/>
+                </a:solidFill>
+                <a:latin typeface="Segoe UI"/>
+              </a:rPr>
+              <a:t>Stuart Dobson</a:t>
+            </a:r>
+          </a:p>
+        </p:txBody>
+      </p:sp>
+      <p:sp>
+        <p:nvSpPr>
+          <p:cNvPr id="4" name="TextBox 3"/>
+          <p:cNvSpPr txBox="1"/>
+          <p:nvPr/>
+        </p:nvSpPr>
+        <p:spPr>
+          <a:xfrm>
+            <a:off x="777240" y="2103120"/>
+            <a:ext cx="10637215" cy="4206240"/>
+          </a:xfrm>
+          <a:prstGeom prst="rect">
+            <a:avLst/>
+          </a:prstGeom>
+          <a:noFill/>
+        </p:spPr>
+        <p:txBody>
+          <a:bodyPr wrap="square" anchor="t" lIns="0" rIns="0" tIns="0" bIns="0">
+            <a:spAutoFit/>
+          </a:bodyPr>
+          <a:lstStyle/>
+          <a:p>
+            <a:pPr algn="l" marL="310896" indent="-310896">
+              <a:lnSpc>
+                <a:spcPct val="110000"/>
+              </a:lnSpc>
+              <a:spcAft>
+                <a:spcPts val="1500"/>
+              </a:spcAft>
+            </a:pPr>
+            <a:r>
+              <a:rPr sz="2100" b="1" i="0">
+                <a:solidFill>
+                  <a:srgbClr val="F0B429"/>
+                </a:solidFill>
+                <a:latin typeface="Segoe UI"/>
+              </a:rPr>
+              <a:t>▸  </a:t>
+            </a:r>
+            <a:r>
+              <a:rPr sz="2100" b="1" i="0">
+                <a:solidFill>
+                  <a:srgbClr val="E6EDF3"/>
+                </a:solidFill>
+                <a:latin typeface="Segoe UI"/>
+              </a:rPr>
+              <a:t>.NET and Azure</a:t>
+            </a:r>
+            <a:r>
+              <a:rPr sz="2100" b="0" i="0">
+                <a:solidFill>
+                  <a:srgbClr val="8B949E"/>
+                </a:solidFill>
+                <a:latin typeface="Segoe UI"/>
+              </a:rPr>
+              <a:t>  — and, lately, agents that have to be trusted with something</a:t>
+            </a:r>
+          </a:p>
+          <a:p>
+            <a:pPr algn="l" marL="310896" indent="-310896">
+              <a:lnSpc>
+                <a:spcPct val="110000"/>
+              </a:lnSpc>
+              <a:spcAft>
+                <a:spcPts val="1500"/>
+              </a:spcAft>
+            </a:pPr>
+            <a:r>
+              <a:rPr sz="2100" b="1" i="0">
+                <a:solidFill>
+                  <a:srgbClr val="F0B429"/>
+                </a:solidFill>
+                <a:latin typeface="Segoe UI"/>
+              </a:rPr>
+              <a:t>▸  </a:t>
+            </a:r>
+            <a:r>
+              <a:rPr sz="2100" b="1" i="0">
+                <a:solidFill>
+                  <a:srgbClr val="E6EDF3"/>
+                </a:solidFill>
+                <a:latin typeface="Segoe UI"/>
+              </a:rPr>
+              <a:t>The Grounded Developer</a:t>
+            </a:r>
+            <a:r>
+              <a:rPr sz="2100" b="0" i="0">
+                <a:solidFill>
+                  <a:srgbClr val="8B949E"/>
+                </a:solidFill>
+                <a:latin typeface="Segoe UI"/>
+              </a:rPr>
+              <a:t>  — blog: .NET, architecture, agentic AI</a:t>
+            </a:r>
+          </a:p>
+          <a:p>
+            <a:pPr algn="l" marL="310896" indent="-310896">
+              <a:lnSpc>
+                <a:spcPct val="110000"/>
+              </a:lnSpc>
+              <a:spcAft>
+                <a:spcPts val="1500"/>
+              </a:spcAft>
+            </a:pPr>
+            <a:r>
+              <a:rPr sz="2100" b="1" i="0">
+                <a:solidFill>
+                  <a:srgbClr val="F0B429"/>
+                </a:solidFill>
+                <a:latin typeface="Segoe UI"/>
+              </a:rPr>
+              <a:t>▸  </a:t>
+            </a:r>
+            <a:r>
+              <a:rPr sz="2100" b="1" i="0">
+                <a:solidFill>
+                  <a:srgbClr val="E6EDF3"/>
+                </a:solidFill>
+                <a:latin typeface="Segoe UI"/>
+              </a:rPr>
+              <a:t>Wired Legacy</a:t>
+            </a:r>
+            <a:r>
+              <a:rPr sz="2100" b="0" i="0">
+                <a:solidFill>
+                  <a:srgbClr val="8B949E"/>
+                </a:solidFill>
+                <a:latin typeface="Segoe UI"/>
+              </a:rPr>
+              <a:t>  — fifteen years of everything else</a:t>
+            </a:r>
+          </a:p>
+          <a:p>
+            <a:pPr algn="l" marL="310896" indent="-310896">
+              <a:lnSpc>
+                <a:spcPct val="110000"/>
+              </a:lnSpc>
+              <a:spcAft>
+                <a:spcPts val="1500"/>
+              </a:spcAft>
+            </a:pPr>
+            <a:r>
+              <a:rPr sz="2100" b="1" i="0">
+                <a:solidFill>
+                  <a:srgbClr val="F0B429"/>
+                </a:solidFill>
+                <a:latin typeface="Segoe UI"/>
+              </a:rPr>
+              <a:t>▸  </a:t>
+            </a:r>
+            <a:r>
+              <a:rPr sz="2100" b="1" i="0">
+                <a:solidFill>
+                  <a:srgbClr val="E6EDF3"/>
+                </a:solidFill>
+                <a:latin typeface="Segoe UI"/>
+              </a:rPr>
+              <a:t>This talk is a repo</a:t>
+            </a:r>
+            <a:r>
+              <a:rPr sz="2100" b="0" i="0">
+                <a:solidFill>
+                  <a:srgbClr val="8B949E"/>
+                </a:solidFill>
+                <a:latin typeface="Segoe UI"/>
+              </a:rPr>
+              <a:t>  — ship-ai-harness. Every line on screen is in it, and it runs</a:t>
+            </a:r>
+          </a:p>
+        </p:txBody>
+      </p:sp>
+      <p:sp>
+        <p:nvSpPr>
+          <p:cNvPr id="5" name="TextBox 4"/>
+          <p:cNvSpPr txBox="1"/>
+          <p:nvPr/>
+        </p:nvSpPr>
+        <p:spPr>
+          <a:xfrm>
+            <a:off x="777240" y="5760720"/>
+            <a:ext cx="10637215" cy="457200"/>
+          </a:xfrm>
+          <a:prstGeom prst="rect">
+            <a:avLst/>
+          </a:prstGeom>
+          <a:noFill/>
+        </p:spPr>
+        <p:txBody>
+          <a:bodyPr wrap="square" anchor="t" lIns="0" rIns="0" tIns="0" bIns="0">
+            <a:spAutoFit/>
+          </a:bodyPr>
+          <a:lstStyle/>
+          <a:p>
+            <a:pPr algn="l">
+              <a:lnSpc>
+                <a:spcPct val="115000"/>
+              </a:lnSpc>
+              <a:spcAft>
+                <a:spcPts val="800"/>
+              </a:spcAft>
+            </a:pPr>
+            <a:r>
+              <a:rPr sz="1700" b="0" i="0">
+                <a:solidFill>
+                  <a:srgbClr val="8B949E"/>
+                </a:solidFill>
+                <a:latin typeface="Segoe UI"/>
+              </a:rPr>
+              <a:t>Nothing tonight is C#-specific. The harness is; the failures are not.</a:t>
+            </a:r>
+          </a:p>
+        </p:txBody>
+      </p:sp>
+    </p:spTree>
+  </p:cSld>
+  <p:clrMapOvr>
+    <a:masterClrMapping/>
+  </p:clrMapOvr>
+</p:sld>
+</file>
+
+<file path=ppt/slides/slide20.xml><?xml version="1.0" encoding="utf-8"?>
 <p:sld xmlns:a="http://schemas.openxmlformats.org/drawingml/2006/main" xmlns:p="http://schemas.openxmlformats.org/presentationml/2006/main" xmlns:r="http://schemas.openxmlformats.org/officeDocument/2006/relationships">
   <p:cSld>
     <p:bg>
@@ -15536,7 +18433,7 @@
 </p:sld>
 </file>
 
-<file path=ppt/slides/slide17.xml><?xml version="1.0" encoding="utf-8"?>
+<file path=ppt/slides/slide21.xml><?xml version="1.0" encoding="utf-8"?>
 <p:sld xmlns:a="http://schemas.openxmlformats.org/drawingml/2006/main" xmlns:p="http://schemas.openxmlformats.org/presentationml/2006/main" xmlns:r="http://schemas.openxmlformats.org/officeDocument/2006/relationships">
   <p:cSld>
     <p:bg>
@@ -17446,7 +20343,7 @@
 </p:sld>
 </file>
 
-<file path=ppt/slides/slide18.xml><?xml version="1.0" encoding="utf-8"?>
+<file path=ppt/slides/slide22.xml><?xml version="1.0" encoding="utf-8"?>
 <p:sld xmlns:a="http://schemas.openxmlformats.org/drawingml/2006/main" xmlns:p="http://schemas.openxmlformats.org/presentationml/2006/main" xmlns:r="http://schemas.openxmlformats.org/officeDocument/2006/relationships">
   <p:cSld>
     <p:bg>
@@ -18763,7 +21660,7 @@
 </p:sld>
 </file>
 
-<file path=ppt/slides/slide19.xml><?xml version="1.0" encoding="utf-8"?>
+<file path=ppt/slides/slide23.xml><?xml version="1.0" encoding="utf-8"?>
 <p:sld xmlns:a="http://schemas.openxmlformats.org/drawingml/2006/main" xmlns:p="http://schemas.openxmlformats.org/presentationml/2006/main" xmlns:r="http://schemas.openxmlformats.org/officeDocument/2006/relationships">
   <p:cSld>
     <p:bg>
@@ -19350,2915 +22247,6 @@
 </p:sld>
 </file>
 
-<file path=ppt/slides/slide2.xml><?xml version="1.0" encoding="utf-8"?>
-<p:sld xmlns:a="http://schemas.openxmlformats.org/drawingml/2006/main" xmlns:p="http://schemas.openxmlformats.org/presentationml/2006/main" xmlns:r="http://schemas.openxmlformats.org/officeDocument/2006/relationships">
-  <p:cSld>
-    <p:bg>
-      <p:bgPr>
-        <a:solidFill>
-          <a:srgbClr val="0D1117"/>
-        </a:solidFill>
-        <a:effectLst/>
-      </p:bgPr>
-    </p:bg>
-    <p:spTree>
-      <p:nvGrpSpPr>
-        <p:cNvPr id="1" name=""/>
-        <p:cNvGrpSpPr/>
-        <p:nvPr/>
-      </p:nvGrpSpPr>
-      <p:grpSpPr/>
-      <p:sp>
-        <p:nvSpPr>
-          <p:cNvPr id="2" name="TextBox 1"/>
-          <p:cNvSpPr txBox="1"/>
-          <p:nvPr/>
-        </p:nvSpPr>
-        <p:spPr>
-          <a:xfrm>
-            <a:off x="777240" y="502920"/>
-            <a:ext cx="10637215" cy="274320"/>
-          </a:xfrm>
-          <a:prstGeom prst="rect">
-            <a:avLst/>
-          </a:prstGeom>
-          <a:noFill/>
-        </p:spPr>
-        <p:txBody>
-          <a:bodyPr wrap="square" anchor="t" lIns="0" rIns="0" tIns="0" bIns="0">
-            <a:spAutoFit/>
-          </a:bodyPr>
-          <a:lstStyle/>
-          <a:p>
-            <a:pPr algn="l">
-              <a:lnSpc>
-                <a:spcPct val="115000"/>
-              </a:lnSpc>
-              <a:spcAft>
-                <a:spcPts val="800"/>
-              </a:spcAft>
-            </a:pPr>
-            <a:r>
-              <a:rPr sz="1300" b="1" i="0">
-                <a:solidFill>
-                  <a:srgbClr val="F0B429"/>
-                </a:solidFill>
-                <a:latin typeface="Segoe UI"/>
-              </a:rPr>
-              <a:t>BEFORE WE LAUNCH</a:t>
-            </a:r>
-          </a:p>
-        </p:txBody>
-      </p:sp>
-      <p:sp>
-        <p:nvSpPr>
-          <p:cNvPr id="3" name="TextBox 2"/>
-          <p:cNvSpPr txBox="1"/>
-          <p:nvPr/>
-        </p:nvSpPr>
-        <p:spPr>
-          <a:xfrm>
-            <a:off x="777240" y="914400"/>
-            <a:ext cx="10637215" cy="1005840"/>
-          </a:xfrm>
-          <a:prstGeom prst="rect">
-            <a:avLst/>
-          </a:prstGeom>
-          <a:noFill/>
-        </p:spPr>
-        <p:txBody>
-          <a:bodyPr wrap="square" anchor="t" lIns="0" rIns="0" tIns="0" bIns="0">
-            <a:spAutoFit/>
-          </a:bodyPr>
-          <a:lstStyle/>
-          <a:p>
-            <a:pPr algn="l">
-              <a:lnSpc>
-                <a:spcPct val="115000"/>
-              </a:lnSpc>
-              <a:spcAft>
-                <a:spcPts val="800"/>
-              </a:spcAft>
-            </a:pPr>
-            <a:r>
-              <a:rPr sz="4200" b="1" i="0">
-                <a:solidFill>
-                  <a:srgbClr val="E6EDF3"/>
-                </a:solidFill>
-                <a:latin typeface="Segoe UI"/>
-              </a:rPr>
-              <a:t>Stuart Dobson</a:t>
-            </a:r>
-          </a:p>
-        </p:txBody>
-      </p:sp>
-      <p:sp>
-        <p:nvSpPr>
-          <p:cNvPr id="4" name="TextBox 3"/>
-          <p:cNvSpPr txBox="1"/>
-          <p:nvPr/>
-        </p:nvSpPr>
-        <p:spPr>
-          <a:xfrm>
-            <a:off x="777240" y="2103120"/>
-            <a:ext cx="10637215" cy="4206240"/>
-          </a:xfrm>
-          <a:prstGeom prst="rect">
-            <a:avLst/>
-          </a:prstGeom>
-          <a:noFill/>
-        </p:spPr>
-        <p:txBody>
-          <a:bodyPr wrap="square" anchor="t" lIns="0" rIns="0" tIns="0" bIns="0">
-            <a:spAutoFit/>
-          </a:bodyPr>
-          <a:lstStyle/>
-          <a:p>
-            <a:pPr algn="l" marL="310896" indent="-310896">
-              <a:lnSpc>
-                <a:spcPct val="110000"/>
-              </a:lnSpc>
-              <a:spcAft>
-                <a:spcPts val="1500"/>
-              </a:spcAft>
-            </a:pPr>
-            <a:r>
-              <a:rPr sz="2100" b="1" i="0">
-                <a:solidFill>
-                  <a:srgbClr val="F0B429"/>
-                </a:solidFill>
-                <a:latin typeface="Segoe UI"/>
-              </a:rPr>
-              <a:t>▸  </a:t>
-            </a:r>
-            <a:r>
-              <a:rPr sz="2100" b="1" i="0">
-                <a:solidFill>
-                  <a:srgbClr val="E6EDF3"/>
-                </a:solidFill>
-                <a:latin typeface="Segoe UI"/>
-              </a:rPr>
-              <a:t>.NET and Azure</a:t>
-            </a:r>
-            <a:r>
-              <a:rPr sz="2100" b="0" i="0">
-                <a:solidFill>
-                  <a:srgbClr val="8B949E"/>
-                </a:solidFill>
-                <a:latin typeface="Segoe UI"/>
-              </a:rPr>
-              <a:t>  — and, lately, agents that have to be trusted with something</a:t>
-            </a:r>
-          </a:p>
-          <a:p>
-            <a:pPr algn="l" marL="310896" indent="-310896">
-              <a:lnSpc>
-                <a:spcPct val="110000"/>
-              </a:lnSpc>
-              <a:spcAft>
-                <a:spcPts val="1500"/>
-              </a:spcAft>
-            </a:pPr>
-            <a:r>
-              <a:rPr sz="2100" b="1" i="0">
-                <a:solidFill>
-                  <a:srgbClr val="F0B429"/>
-                </a:solidFill>
-                <a:latin typeface="Segoe UI"/>
-              </a:rPr>
-              <a:t>▸  </a:t>
-            </a:r>
-            <a:r>
-              <a:rPr sz="2100" b="1" i="0">
-                <a:solidFill>
-                  <a:srgbClr val="E6EDF3"/>
-                </a:solidFill>
-                <a:latin typeface="Segoe UI"/>
-              </a:rPr>
-              <a:t>The Grounded Developer</a:t>
-            </a:r>
-            <a:r>
-              <a:rPr sz="2100" b="0" i="0">
-                <a:solidFill>
-                  <a:srgbClr val="8B949E"/>
-                </a:solidFill>
-                <a:latin typeface="Segoe UI"/>
-              </a:rPr>
-              <a:t>  — blog: .NET, architecture, agentic AI</a:t>
-            </a:r>
-          </a:p>
-          <a:p>
-            <a:pPr algn="l" marL="310896" indent="-310896">
-              <a:lnSpc>
-                <a:spcPct val="110000"/>
-              </a:lnSpc>
-              <a:spcAft>
-                <a:spcPts val="1500"/>
-              </a:spcAft>
-            </a:pPr>
-            <a:r>
-              <a:rPr sz="2100" b="1" i="0">
-                <a:solidFill>
-                  <a:srgbClr val="F0B429"/>
-                </a:solidFill>
-                <a:latin typeface="Segoe UI"/>
-              </a:rPr>
-              <a:t>▸  </a:t>
-            </a:r>
-            <a:r>
-              <a:rPr sz="2100" b="1" i="0">
-                <a:solidFill>
-                  <a:srgbClr val="E6EDF3"/>
-                </a:solidFill>
-                <a:latin typeface="Segoe UI"/>
-              </a:rPr>
-              <a:t>Wired Legacy</a:t>
-            </a:r>
-            <a:r>
-              <a:rPr sz="2100" b="0" i="0">
-                <a:solidFill>
-                  <a:srgbClr val="8B949E"/>
-                </a:solidFill>
-                <a:latin typeface="Segoe UI"/>
-              </a:rPr>
-              <a:t>  — fifteen years of everything else</a:t>
-            </a:r>
-          </a:p>
-          <a:p>
-            <a:pPr algn="l" marL="310896" indent="-310896">
-              <a:lnSpc>
-                <a:spcPct val="110000"/>
-              </a:lnSpc>
-              <a:spcAft>
-                <a:spcPts val="1500"/>
-              </a:spcAft>
-            </a:pPr>
-            <a:r>
-              <a:rPr sz="2100" b="1" i="0">
-                <a:solidFill>
-                  <a:srgbClr val="F0B429"/>
-                </a:solidFill>
-                <a:latin typeface="Segoe UI"/>
-              </a:rPr>
-              <a:t>▸  </a:t>
-            </a:r>
-            <a:r>
-              <a:rPr sz="2100" b="1" i="0">
-                <a:solidFill>
-                  <a:srgbClr val="E6EDF3"/>
-                </a:solidFill>
-                <a:latin typeface="Segoe UI"/>
-              </a:rPr>
-              <a:t>This talk is a repo</a:t>
-            </a:r>
-            <a:r>
-              <a:rPr sz="2100" b="0" i="0">
-                <a:solidFill>
-                  <a:srgbClr val="8B949E"/>
-                </a:solidFill>
-                <a:latin typeface="Segoe UI"/>
-              </a:rPr>
-              <a:t>  — ship-ai-harness. Every line on screen is in it, and it runs</a:t>
-            </a:r>
-          </a:p>
-        </p:txBody>
-      </p:sp>
-      <p:sp>
-        <p:nvSpPr>
-          <p:cNvPr id="5" name="TextBox 4"/>
-          <p:cNvSpPr txBox="1"/>
-          <p:nvPr/>
-        </p:nvSpPr>
-        <p:spPr>
-          <a:xfrm>
-            <a:off x="777240" y="5760720"/>
-            <a:ext cx="10637215" cy="457200"/>
-          </a:xfrm>
-          <a:prstGeom prst="rect">
-            <a:avLst/>
-          </a:prstGeom>
-          <a:noFill/>
-        </p:spPr>
-        <p:txBody>
-          <a:bodyPr wrap="square" anchor="t" lIns="0" rIns="0" tIns="0" bIns="0">
-            <a:spAutoFit/>
-          </a:bodyPr>
-          <a:lstStyle/>
-          <a:p>
-            <a:pPr algn="l">
-              <a:lnSpc>
-                <a:spcPct val="115000"/>
-              </a:lnSpc>
-              <a:spcAft>
-                <a:spcPts val="800"/>
-              </a:spcAft>
-            </a:pPr>
-            <a:r>
-              <a:rPr sz="1700" b="0" i="0">
-                <a:solidFill>
-                  <a:srgbClr val="8B949E"/>
-                </a:solidFill>
-                <a:latin typeface="Segoe UI"/>
-              </a:rPr>
-              <a:t>Nothing tonight is C#-specific. The harness is; the failures are not.</a:t>
-            </a:r>
-          </a:p>
-        </p:txBody>
-      </p:sp>
-    </p:spTree>
-  </p:cSld>
-  <p:clrMapOvr>
-    <a:masterClrMapping/>
-  </p:clrMapOvr>
-</p:sld>
-</file>
-
-<file path=ppt/slides/slide20.xml><?xml version="1.0" encoding="utf-8"?>
-<p:sld xmlns:a="http://schemas.openxmlformats.org/drawingml/2006/main" xmlns:p="http://schemas.openxmlformats.org/presentationml/2006/main" xmlns:r="http://schemas.openxmlformats.org/officeDocument/2006/relationships">
-  <p:cSld>
-    <p:bg>
-      <p:bgPr>
-        <a:solidFill>
-          <a:srgbClr val="0D1117"/>
-        </a:solidFill>
-        <a:effectLst/>
-      </p:bgPr>
-    </p:bg>
-    <p:spTree>
-      <p:nvGrpSpPr>
-        <p:cNvPr id="1" name=""/>
-        <p:cNvGrpSpPr/>
-        <p:nvPr/>
-      </p:nvGrpSpPr>
-      <p:grpSpPr/>
-      <p:sp>
-        <p:nvSpPr>
-          <p:cNvPr id="2" name="TextBox 1"/>
-          <p:cNvSpPr txBox="1"/>
-          <p:nvPr/>
-        </p:nvSpPr>
-        <p:spPr>
-          <a:xfrm>
-            <a:off x="777240" y="502920"/>
-            <a:ext cx="10637215" cy="274320"/>
-          </a:xfrm>
-          <a:prstGeom prst="rect">
-            <a:avLst/>
-          </a:prstGeom>
-          <a:noFill/>
-        </p:spPr>
-        <p:txBody>
-          <a:bodyPr wrap="square" anchor="t" lIns="0" rIns="0" tIns="0" bIns="0">
-            <a:spAutoFit/>
-          </a:bodyPr>
-          <a:lstStyle/>
-          <a:p>
-            <a:pPr algn="l">
-              <a:lnSpc>
-                <a:spcPct val="115000"/>
-              </a:lnSpc>
-              <a:spcAft>
-                <a:spcPts val="800"/>
-              </a:spcAft>
-            </a:pPr>
-            <a:r>
-              <a:rPr sz="1300" b="1" i="0">
-                <a:solidFill>
-                  <a:srgbClr val="F0B429"/>
-                </a:solidFill>
-                <a:latin typeface="Segoe UI"/>
-              </a:rPr>
-              <a:t>HARNESSAGENTOPTIONS</a:t>
-            </a:r>
-          </a:p>
-        </p:txBody>
-      </p:sp>
-      <p:sp>
-        <p:nvSpPr>
-          <p:cNvPr id="3" name="TextBox 2"/>
-          <p:cNvSpPr txBox="1"/>
-          <p:nvPr/>
-        </p:nvSpPr>
-        <p:spPr>
-          <a:xfrm>
-            <a:off x="777240" y="914400"/>
-            <a:ext cx="10637215" cy="1005840"/>
-          </a:xfrm>
-          <a:prstGeom prst="rect">
-            <a:avLst/>
-          </a:prstGeom>
-          <a:noFill/>
-        </p:spPr>
-        <p:txBody>
-          <a:bodyPr wrap="square" anchor="t" lIns="0" rIns="0" tIns="0" bIns="0">
-            <a:spAutoFit/>
-          </a:bodyPr>
-          <a:lstStyle/>
-          <a:p>
-            <a:pPr algn="l">
-              <a:lnSpc>
-                <a:spcPct val="115000"/>
-              </a:lnSpc>
-              <a:spcAft>
-                <a:spcPts val="800"/>
-              </a:spcAft>
-            </a:pPr>
-            <a:r>
-              <a:rPr sz="3600" b="1" i="0">
-                <a:solidFill>
-                  <a:srgbClr val="E6EDF3"/>
-                </a:solidFill>
-                <a:latin typeface="Segoe UI"/>
-              </a:rPr>
-              <a:t>What is on before you decide anything</a:t>
-            </a:r>
-          </a:p>
-        </p:txBody>
-      </p:sp>
-      <p:sp>
-        <p:nvSpPr>
-          <p:cNvPr id="4" name="TextBox 3"/>
-          <p:cNvSpPr txBox="1"/>
-          <p:nvPr/>
-        </p:nvSpPr>
-        <p:spPr>
-          <a:xfrm>
-            <a:off x="777240" y="2148840"/>
-            <a:ext cx="2697480" cy="384048"/>
-          </a:xfrm>
-          <a:prstGeom prst="rect">
-            <a:avLst/>
-          </a:prstGeom>
-          <a:noFill/>
-        </p:spPr>
-        <p:txBody>
-          <a:bodyPr wrap="square" anchor="t" lIns="0" rIns="0" tIns="0" bIns="0">
-            <a:spAutoFit/>
-          </a:bodyPr>
-          <a:lstStyle/>
-          <a:p>
-            <a:pPr algn="l">
-              <a:lnSpc>
-                <a:spcPct val="115000"/>
-              </a:lnSpc>
-              <a:spcAft>
-                <a:spcPts val="800"/>
-              </a:spcAft>
-            </a:pPr>
-            <a:r>
-              <a:rPr sz="1400" b="1" i="0">
-                <a:solidFill>
-                  <a:srgbClr val="F0B429"/>
-                </a:solidFill>
-                <a:latin typeface="Segoe UI"/>
-              </a:rPr>
-              <a:t>DEFAULT</a:t>
-            </a:r>
-          </a:p>
-        </p:txBody>
-      </p:sp>
-      <p:sp>
-        <p:nvSpPr>
-          <p:cNvPr id="5" name="TextBox 4"/>
-          <p:cNvSpPr txBox="1"/>
-          <p:nvPr/>
-        </p:nvSpPr>
-        <p:spPr>
-          <a:xfrm>
-            <a:off x="3611880" y="2148840"/>
-            <a:ext cx="3063240" cy="384048"/>
-          </a:xfrm>
-          <a:prstGeom prst="rect">
-            <a:avLst/>
-          </a:prstGeom>
-          <a:noFill/>
-        </p:spPr>
-        <p:txBody>
-          <a:bodyPr wrap="square" anchor="t" lIns="0" rIns="0" tIns="0" bIns="0">
-            <a:spAutoFit/>
-          </a:bodyPr>
-          <a:lstStyle/>
-          <a:p>
-            <a:pPr algn="l">
-              <a:lnSpc>
-                <a:spcPct val="115000"/>
-              </a:lnSpc>
-              <a:spcAft>
-                <a:spcPts val="800"/>
-              </a:spcAft>
-            </a:pPr>
-            <a:r>
-              <a:rPr sz="1400" b="1" i="0">
-                <a:solidFill>
-                  <a:srgbClr val="F0B429"/>
-                </a:solidFill>
-                <a:latin typeface="Segoe UI"/>
-              </a:rPr>
-              <a:t>WHAT I DID</a:t>
-            </a:r>
-          </a:p>
-        </p:txBody>
-      </p:sp>
-      <p:sp>
-        <p:nvSpPr>
-          <p:cNvPr id="6" name="TextBox 5"/>
-          <p:cNvSpPr txBox="1"/>
-          <p:nvPr/>
-        </p:nvSpPr>
-        <p:spPr>
-          <a:xfrm>
-            <a:off x="6812280" y="2148840"/>
-            <a:ext cx="4434840" cy="384048"/>
-          </a:xfrm>
-          <a:prstGeom prst="rect">
-            <a:avLst/>
-          </a:prstGeom>
-          <a:noFill/>
-        </p:spPr>
-        <p:txBody>
-          <a:bodyPr wrap="square" anchor="t" lIns="0" rIns="0" tIns="0" bIns="0">
-            <a:spAutoFit/>
-          </a:bodyPr>
-          <a:lstStyle/>
-          <a:p>
-            <a:pPr algn="l">
-              <a:lnSpc>
-                <a:spcPct val="115000"/>
-              </a:lnSpc>
-              <a:spcAft>
-                <a:spcPts val="800"/>
-              </a:spcAft>
-            </a:pPr>
-            <a:r>
-              <a:rPr sz="1400" b="1" i="0">
-                <a:solidFill>
-                  <a:srgbClr val="F0B429"/>
-                </a:solidFill>
-                <a:latin typeface="Segoe UI"/>
-              </a:rPr>
-              <a:t>WHY</a:t>
-            </a:r>
-          </a:p>
-        </p:txBody>
-      </p:sp>
-      <p:sp>
-        <p:nvSpPr>
-          <p:cNvPr id="7" name="Rectangle 6"/>
-          <p:cNvSpPr/>
-          <p:nvPr/>
-        </p:nvSpPr>
-        <p:spPr>
-          <a:xfrm>
-            <a:off x="777240" y="2496312"/>
-            <a:ext cx="10637215" cy="19050"/>
-          </a:xfrm>
-          <a:prstGeom prst="rect">
-            <a:avLst/>
-          </a:prstGeom>
-          <a:solidFill>
-            <a:srgbClr val="30363D"/>
-          </a:solidFill>
-          <a:ln>
-            <a:noFill/>
-          </a:ln>
-          <a:effectLst/>
-        </p:spPr>
-        <p:style>
-          <a:lnRef idx="1">
-            <a:schemeClr val="accent1"/>
-          </a:lnRef>
-          <a:fillRef idx="3">
-            <a:schemeClr val="accent1"/>
-          </a:fillRef>
-          <a:effectRef idx="2">
-            <a:schemeClr val="accent1"/>
-          </a:effectRef>
-          <a:fontRef idx="minor">
-            <a:schemeClr val="lt1"/>
-          </a:fontRef>
-        </p:style>
-        <p:txBody>
-          <a:bodyPr rtlCol="0" anchor="ctr"/>
-          <a:lstStyle/>
-          <a:p>
-            <a:pPr algn="ctr"/>
-          </a:p>
-        </p:txBody>
-      </p:sp>
-      <p:sp>
-        <p:nvSpPr>
-          <p:cNvPr id="8" name="TextBox 7"/>
-          <p:cNvSpPr txBox="1"/>
-          <p:nvPr/>
-        </p:nvSpPr>
-        <p:spPr>
-          <a:xfrm>
-            <a:off x="777240" y="2679192"/>
-            <a:ext cx="2670048" cy="384048"/>
-          </a:xfrm>
-          <a:prstGeom prst="rect">
-            <a:avLst/>
-          </a:prstGeom>
-          <a:noFill/>
-        </p:spPr>
-        <p:txBody>
-          <a:bodyPr wrap="square" anchor="t" lIns="0" rIns="0" tIns="0" bIns="0">
-            <a:spAutoFit/>
-          </a:bodyPr>
-          <a:lstStyle/>
-          <a:p>
-            <a:pPr algn="l">
-              <a:lnSpc>
-                <a:spcPct val="105000"/>
-              </a:lnSpc>
-              <a:spcAft>
-                <a:spcPts val="800"/>
-              </a:spcAft>
-            </a:pPr>
-            <a:r>
-              <a:rPr sz="1400" b="0" i="0">
-                <a:solidFill>
-                  <a:srgbClr val="E6EDF3"/>
-                </a:solidFill>
-                <a:latin typeface="Consolas"/>
-              </a:rPr>
-              <a:t>HostedWebSearchTool</a:t>
-            </a:r>
-          </a:p>
-        </p:txBody>
-      </p:sp>
-      <p:sp>
-        <p:nvSpPr>
-          <p:cNvPr id="9" name="TextBox 8"/>
-          <p:cNvSpPr txBox="1"/>
-          <p:nvPr/>
-        </p:nvSpPr>
-        <p:spPr>
-          <a:xfrm>
-            <a:off x="3611880" y="2679192"/>
-            <a:ext cx="3035808" cy="384048"/>
-          </a:xfrm>
-          <a:prstGeom prst="rect">
-            <a:avLst/>
-          </a:prstGeom>
-          <a:noFill/>
-        </p:spPr>
-        <p:txBody>
-          <a:bodyPr wrap="square" anchor="t" lIns="0" rIns="0" tIns="0" bIns="0">
-            <a:spAutoFit/>
-          </a:bodyPr>
-          <a:lstStyle/>
-          <a:p>
-            <a:pPr algn="l">
-              <a:lnSpc>
-                <a:spcPct val="105000"/>
-              </a:lnSpc>
-              <a:spcAft>
-                <a:spcPts val="800"/>
-              </a:spcAft>
-            </a:pPr>
-            <a:r>
-              <a:rPr sz="1400" b="0" i="0">
-                <a:solidFill>
-                  <a:srgbClr val="F85149"/>
-                </a:solidFill>
-                <a:latin typeface="Consolas"/>
-              </a:rPr>
-              <a:t>DisableWebSearch = true</a:t>
-            </a:r>
-          </a:p>
-        </p:txBody>
-      </p:sp>
-      <p:sp>
-        <p:nvSpPr>
-          <p:cNvPr id="10" name="TextBox 9"/>
-          <p:cNvSpPr txBox="1"/>
-          <p:nvPr/>
-        </p:nvSpPr>
-        <p:spPr>
-          <a:xfrm>
-            <a:off x="6812280" y="2679192"/>
-            <a:ext cx="4407408" cy="384048"/>
-          </a:xfrm>
-          <a:prstGeom prst="rect">
-            <a:avLst/>
-          </a:prstGeom>
-          <a:noFill/>
-        </p:spPr>
-        <p:txBody>
-          <a:bodyPr wrap="square" anchor="t" lIns="0" rIns="0" tIns="0" bIns="0">
-            <a:spAutoFit/>
-          </a:bodyPr>
-          <a:lstStyle/>
-          <a:p>
-            <a:pPr algn="l">
-              <a:lnSpc>
-                <a:spcPct val="105000"/>
-              </a:lnSpc>
-              <a:spcAft>
-                <a:spcPts val="800"/>
-              </a:spcAft>
-            </a:pPr>
-            <a:r>
-              <a:rPr sz="1400" b="0" i="0">
-                <a:solidFill>
-                  <a:srgbClr val="8B949E"/>
-                </a:solidFill>
-                <a:latin typeface="Segoe UI"/>
-              </a:rPr>
-              <a:t>A starship googling breaks the fiction</a:t>
-            </a:r>
-          </a:p>
-        </p:txBody>
-      </p:sp>
-      <p:sp>
-        <p:nvSpPr>
-          <p:cNvPr id="11" name="Rectangle 10"/>
-          <p:cNvSpPr/>
-          <p:nvPr/>
-        </p:nvSpPr>
-        <p:spPr>
-          <a:xfrm>
-            <a:off x="777240" y="2980944"/>
-            <a:ext cx="10637215" cy="19050"/>
-          </a:xfrm>
-          <a:prstGeom prst="rect">
-            <a:avLst/>
-          </a:prstGeom>
-          <a:solidFill>
-            <a:srgbClr val="21262D"/>
-          </a:solidFill>
-          <a:ln>
-            <a:noFill/>
-          </a:ln>
-          <a:effectLst/>
-        </p:spPr>
-        <p:style>
-          <a:lnRef idx="1">
-            <a:schemeClr val="accent1"/>
-          </a:lnRef>
-          <a:fillRef idx="3">
-            <a:schemeClr val="accent1"/>
-          </a:fillRef>
-          <a:effectRef idx="2">
-            <a:schemeClr val="accent1"/>
-          </a:effectRef>
-          <a:fontRef idx="minor">
-            <a:schemeClr val="lt1"/>
-          </a:fontRef>
-        </p:style>
-        <p:txBody>
-          <a:bodyPr rtlCol="0" anchor="ctr"/>
-          <a:lstStyle/>
-          <a:p>
-            <a:pPr algn="ctr"/>
-          </a:p>
-        </p:txBody>
-      </p:sp>
-      <p:sp>
-        <p:nvSpPr>
-          <p:cNvPr id="12" name="TextBox 11"/>
-          <p:cNvSpPr txBox="1"/>
-          <p:nvPr/>
-        </p:nvSpPr>
-        <p:spPr>
-          <a:xfrm>
-            <a:off x="777240" y="3099816"/>
-            <a:ext cx="2670048" cy="384048"/>
-          </a:xfrm>
-          <a:prstGeom prst="rect">
-            <a:avLst/>
-          </a:prstGeom>
-          <a:noFill/>
-        </p:spPr>
-        <p:txBody>
-          <a:bodyPr wrap="square" anchor="t" lIns="0" rIns="0" tIns="0" bIns="0">
-            <a:spAutoFit/>
-          </a:bodyPr>
-          <a:lstStyle/>
-          <a:p>
-            <a:pPr algn="l">
-              <a:lnSpc>
-                <a:spcPct val="105000"/>
-              </a:lnSpc>
-              <a:spcAft>
-                <a:spcPts val="800"/>
-              </a:spcAft>
-            </a:pPr>
-            <a:r>
-              <a:rPr sz="1400" b="0" i="0">
-                <a:solidFill>
-                  <a:srgbClr val="E6EDF3"/>
-                </a:solidFill>
-                <a:latin typeface="Consolas"/>
-              </a:rPr>
-              <a:t>FileMemoryProvider</a:t>
-            </a:r>
-          </a:p>
-        </p:txBody>
-      </p:sp>
-      <p:sp>
-        <p:nvSpPr>
-          <p:cNvPr id="13" name="TextBox 12"/>
-          <p:cNvSpPr txBox="1"/>
-          <p:nvPr/>
-        </p:nvSpPr>
-        <p:spPr>
-          <a:xfrm>
-            <a:off x="3611880" y="3099816"/>
-            <a:ext cx="3035808" cy="384048"/>
-          </a:xfrm>
-          <a:prstGeom prst="rect">
-            <a:avLst/>
-          </a:prstGeom>
-          <a:noFill/>
-        </p:spPr>
-        <p:txBody>
-          <a:bodyPr wrap="square" anchor="t" lIns="0" rIns="0" tIns="0" bIns="0">
-            <a:spAutoFit/>
-          </a:bodyPr>
-          <a:lstStyle/>
-          <a:p>
-            <a:pPr algn="l">
-              <a:lnSpc>
-                <a:spcPct val="105000"/>
-              </a:lnSpc>
-              <a:spcAft>
-                <a:spcPts val="800"/>
-              </a:spcAft>
-            </a:pPr>
-            <a:r>
-              <a:rPr sz="1400" b="0" i="0">
-                <a:solidFill>
-                  <a:srgbClr val="F85149"/>
-                </a:solidFill>
-                <a:latin typeface="Consolas"/>
-              </a:rPr>
-              <a:t>DisableFileMemory = true</a:t>
-            </a:r>
-          </a:p>
-        </p:txBody>
-      </p:sp>
-      <p:sp>
-        <p:nvSpPr>
-          <p:cNvPr id="14" name="TextBox 13"/>
-          <p:cNvSpPr txBox="1"/>
-          <p:nvPr/>
-        </p:nvSpPr>
-        <p:spPr>
-          <a:xfrm>
-            <a:off x="6812280" y="3099816"/>
-            <a:ext cx="4407408" cy="384048"/>
-          </a:xfrm>
-          <a:prstGeom prst="rect">
-            <a:avLst/>
-          </a:prstGeom>
-          <a:noFill/>
-        </p:spPr>
-        <p:txBody>
-          <a:bodyPr wrap="square" anchor="t" lIns="0" rIns="0" tIns="0" bIns="0">
-            <a:spAutoFit/>
-          </a:bodyPr>
-          <a:lstStyle/>
-          <a:p>
-            <a:pPr algn="l">
-              <a:lnSpc>
-                <a:spcPct val="105000"/>
-              </a:lnSpc>
-              <a:spcAft>
-                <a:spcPts val="800"/>
-              </a:spcAft>
-            </a:pPr>
-            <a:r>
-              <a:rPr sz="1400" b="0" i="0">
-                <a:solidFill>
-                  <a:srgbClr val="8B949E"/>
-                </a:solidFill>
-                <a:latin typeface="Segoe UI"/>
-              </a:rPr>
-              <a:t>Writes into your repo at construction</a:t>
-            </a:r>
-          </a:p>
-        </p:txBody>
-      </p:sp>
-      <p:sp>
-        <p:nvSpPr>
-          <p:cNvPr id="15" name="Rectangle 14"/>
-          <p:cNvSpPr/>
-          <p:nvPr/>
-        </p:nvSpPr>
-        <p:spPr>
-          <a:xfrm>
-            <a:off x="777240" y="3401568"/>
-            <a:ext cx="10637215" cy="19050"/>
-          </a:xfrm>
-          <a:prstGeom prst="rect">
-            <a:avLst/>
-          </a:prstGeom>
-          <a:solidFill>
-            <a:srgbClr val="21262D"/>
-          </a:solidFill>
-          <a:ln>
-            <a:noFill/>
-          </a:ln>
-          <a:effectLst/>
-        </p:spPr>
-        <p:style>
-          <a:lnRef idx="1">
-            <a:schemeClr val="accent1"/>
-          </a:lnRef>
-          <a:fillRef idx="3">
-            <a:schemeClr val="accent1"/>
-          </a:fillRef>
-          <a:effectRef idx="2">
-            <a:schemeClr val="accent1"/>
-          </a:effectRef>
-          <a:fontRef idx="minor">
-            <a:schemeClr val="lt1"/>
-          </a:fontRef>
-        </p:style>
-        <p:txBody>
-          <a:bodyPr rtlCol="0" anchor="ctr"/>
-          <a:lstStyle/>
-          <a:p>
-            <a:pPr algn="ctr"/>
-          </a:p>
-        </p:txBody>
-      </p:sp>
-      <p:sp>
-        <p:nvSpPr>
-          <p:cNvPr id="16" name="TextBox 15"/>
-          <p:cNvSpPr txBox="1"/>
-          <p:nvPr/>
-        </p:nvSpPr>
-        <p:spPr>
-          <a:xfrm>
-            <a:off x="777240" y="3520440"/>
-            <a:ext cx="2670048" cy="384048"/>
-          </a:xfrm>
-          <a:prstGeom prst="rect">
-            <a:avLst/>
-          </a:prstGeom>
-          <a:noFill/>
-        </p:spPr>
-        <p:txBody>
-          <a:bodyPr wrap="square" anchor="t" lIns="0" rIns="0" tIns="0" bIns="0">
-            <a:spAutoFit/>
-          </a:bodyPr>
-          <a:lstStyle/>
-          <a:p>
-            <a:pPr algn="l">
-              <a:lnSpc>
-                <a:spcPct val="105000"/>
-              </a:lnSpc>
-              <a:spcAft>
-                <a:spcPts val="800"/>
-              </a:spcAft>
-            </a:pPr>
-            <a:r>
-              <a:rPr sz="1400" b="0" i="0">
-                <a:solidFill>
-                  <a:srgbClr val="E6EDF3"/>
-                </a:solidFill>
-                <a:latin typeface="Consolas"/>
-              </a:rPr>
-              <a:t>AgentSkillsProvider</a:t>
-            </a:r>
-          </a:p>
-        </p:txBody>
-      </p:sp>
-      <p:sp>
-        <p:nvSpPr>
-          <p:cNvPr id="17" name="TextBox 16"/>
-          <p:cNvSpPr txBox="1"/>
-          <p:nvPr/>
-        </p:nvSpPr>
-        <p:spPr>
-          <a:xfrm>
-            <a:off x="3611880" y="3520440"/>
-            <a:ext cx="3035808" cy="384048"/>
-          </a:xfrm>
-          <a:prstGeom prst="rect">
-            <a:avLst/>
-          </a:prstGeom>
-          <a:noFill/>
-        </p:spPr>
-        <p:txBody>
-          <a:bodyPr wrap="square" anchor="t" lIns="0" rIns="0" tIns="0" bIns="0">
-            <a:spAutoFit/>
-          </a:bodyPr>
-          <a:lstStyle/>
-          <a:p>
-            <a:pPr algn="l">
-              <a:lnSpc>
-                <a:spcPct val="105000"/>
-              </a:lnSpc>
-              <a:spcAft>
-                <a:spcPts val="800"/>
-              </a:spcAft>
-            </a:pPr>
-            <a:r>
-              <a:rPr sz="1400" b="0" i="0">
-                <a:solidFill>
-                  <a:srgbClr val="F85149"/>
-                </a:solidFill>
-                <a:latin typeface="Consolas"/>
-              </a:rPr>
-              <a:t>Disable…Provider = true</a:t>
-            </a:r>
-          </a:p>
-        </p:txBody>
-      </p:sp>
-      <p:sp>
-        <p:nvSpPr>
-          <p:cNvPr id="18" name="TextBox 17"/>
-          <p:cNvSpPr txBox="1"/>
-          <p:nvPr/>
-        </p:nvSpPr>
-        <p:spPr>
-          <a:xfrm>
-            <a:off x="6812280" y="3520440"/>
-            <a:ext cx="4407408" cy="384048"/>
-          </a:xfrm>
-          <a:prstGeom prst="rect">
-            <a:avLst/>
-          </a:prstGeom>
-          <a:noFill/>
-        </p:spPr>
-        <p:txBody>
-          <a:bodyPr wrap="square" anchor="t" lIns="0" rIns="0" tIns="0" bIns="0">
-            <a:spAutoFit/>
-          </a:bodyPr>
-          <a:lstStyle/>
-          <a:p>
-            <a:pPr algn="l">
-              <a:lnSpc>
-                <a:spcPct val="105000"/>
-              </a:lnSpc>
-              <a:spcAft>
-                <a:spcPts val="800"/>
-              </a:spcAft>
-            </a:pPr>
-            <a:r>
-              <a:rPr sz="1400" b="0" i="0">
-                <a:solidFill>
-                  <a:srgbClr val="8B949E"/>
-                </a:solidFill>
-                <a:latin typeface="Segoe UI"/>
-              </a:rPr>
-              <a:t>Walks the working directory for nothing</a:t>
-            </a:r>
-          </a:p>
-        </p:txBody>
-      </p:sp>
-      <p:sp>
-        <p:nvSpPr>
-          <p:cNvPr id="19" name="Rectangle 18"/>
-          <p:cNvSpPr/>
-          <p:nvPr/>
-        </p:nvSpPr>
-        <p:spPr>
-          <a:xfrm>
-            <a:off x="777240" y="3822192"/>
-            <a:ext cx="10637215" cy="19050"/>
-          </a:xfrm>
-          <a:prstGeom prst="rect">
-            <a:avLst/>
-          </a:prstGeom>
-          <a:solidFill>
-            <a:srgbClr val="21262D"/>
-          </a:solidFill>
-          <a:ln>
-            <a:noFill/>
-          </a:ln>
-          <a:effectLst/>
-        </p:spPr>
-        <p:style>
-          <a:lnRef idx="1">
-            <a:schemeClr val="accent1"/>
-          </a:lnRef>
-          <a:fillRef idx="3">
-            <a:schemeClr val="accent1"/>
-          </a:fillRef>
-          <a:effectRef idx="2">
-            <a:schemeClr val="accent1"/>
-          </a:effectRef>
-          <a:fontRef idx="minor">
-            <a:schemeClr val="lt1"/>
-          </a:fontRef>
-        </p:style>
-        <p:txBody>
-          <a:bodyPr rtlCol="0" anchor="ctr"/>
-          <a:lstStyle/>
-          <a:p>
-            <a:pPr algn="ctr"/>
-          </a:p>
-        </p:txBody>
-      </p:sp>
-      <p:sp>
-        <p:nvSpPr>
-          <p:cNvPr id="20" name="TextBox 19"/>
-          <p:cNvSpPr txBox="1"/>
-          <p:nvPr/>
-        </p:nvSpPr>
-        <p:spPr>
-          <a:xfrm>
-            <a:off x="777240" y="3941064"/>
-            <a:ext cx="2670048" cy="384048"/>
-          </a:xfrm>
-          <a:prstGeom prst="rect">
-            <a:avLst/>
-          </a:prstGeom>
-          <a:noFill/>
-        </p:spPr>
-        <p:txBody>
-          <a:bodyPr wrap="square" anchor="t" lIns="0" rIns="0" tIns="0" bIns="0">
-            <a:spAutoFit/>
-          </a:bodyPr>
-          <a:lstStyle/>
-          <a:p>
-            <a:pPr algn="l">
-              <a:lnSpc>
-                <a:spcPct val="105000"/>
-              </a:lnSpc>
-              <a:spcAft>
-                <a:spcPts val="800"/>
-              </a:spcAft>
-            </a:pPr>
-            <a:r>
-              <a:rPr sz="1400" b="0" i="0">
-                <a:solidFill>
-                  <a:srgbClr val="E6EDF3"/>
-                </a:solidFill>
-                <a:latin typeface="Consolas"/>
-              </a:rPr>
-              <a:t>FileAccessProvider</a:t>
-            </a:r>
-          </a:p>
-        </p:txBody>
-      </p:sp>
-      <p:sp>
-        <p:nvSpPr>
-          <p:cNvPr id="21" name="TextBox 20"/>
-          <p:cNvSpPr txBox="1"/>
-          <p:nvPr/>
-        </p:nvSpPr>
-        <p:spPr>
-          <a:xfrm>
-            <a:off x="3611880" y="3941064"/>
-            <a:ext cx="3035808" cy="384048"/>
-          </a:xfrm>
-          <a:prstGeom prst="rect">
-            <a:avLst/>
-          </a:prstGeom>
-          <a:noFill/>
-        </p:spPr>
-        <p:txBody>
-          <a:bodyPr wrap="square" anchor="t" lIns="0" rIns="0" tIns="0" bIns="0">
-            <a:spAutoFit/>
-          </a:bodyPr>
-          <a:lstStyle/>
-          <a:p>
-            <a:pPr algn="l">
-              <a:lnSpc>
-                <a:spcPct val="105000"/>
-              </a:lnSpc>
-              <a:spcAft>
-                <a:spcPts val="800"/>
-              </a:spcAft>
-            </a:pPr>
-            <a:r>
-              <a:rPr sz="1400" b="0" i="0">
-                <a:solidFill>
-                  <a:srgbClr val="3FB950"/>
-                </a:solidFill>
-                <a:latin typeface="Consolas"/>
-              </a:rPr>
-              <a:t>(nothing)</a:t>
-            </a:r>
-          </a:p>
-        </p:txBody>
-      </p:sp>
-      <p:sp>
-        <p:nvSpPr>
-          <p:cNvPr id="22" name="TextBox 21"/>
-          <p:cNvSpPr txBox="1"/>
-          <p:nvPr/>
-        </p:nvSpPr>
-        <p:spPr>
-          <a:xfrm>
-            <a:off x="6812280" y="3941064"/>
-            <a:ext cx="4407408" cy="384048"/>
-          </a:xfrm>
-          <a:prstGeom prst="rect">
-            <a:avLst/>
-          </a:prstGeom>
-          <a:noFill/>
-        </p:spPr>
-        <p:txBody>
-          <a:bodyPr wrap="square" anchor="t" lIns="0" rIns="0" tIns="0" bIns="0">
-            <a:spAutoFit/>
-          </a:bodyPr>
-          <a:lstStyle/>
-          <a:p>
-            <a:pPr algn="l">
-              <a:lnSpc>
-                <a:spcPct val="105000"/>
-              </a:lnSpc>
-              <a:spcAft>
-                <a:spcPts val="800"/>
-              </a:spcAft>
-            </a:pPr>
-            <a:r>
-              <a:rPr sz="1400" b="0" i="0">
-                <a:solidFill>
-                  <a:srgbClr val="8B949E"/>
-                </a:solidFill>
-                <a:latin typeface="Segoe UI"/>
-              </a:rPr>
-              <a:t>Opt-in. No setting is the setting</a:t>
-            </a:r>
-          </a:p>
-        </p:txBody>
-      </p:sp>
-      <p:sp>
-        <p:nvSpPr>
-          <p:cNvPr id="23" name="Rectangle 22"/>
-          <p:cNvSpPr/>
-          <p:nvPr/>
-        </p:nvSpPr>
-        <p:spPr>
-          <a:xfrm>
-            <a:off x="777240" y="4242816"/>
-            <a:ext cx="10637215" cy="19050"/>
-          </a:xfrm>
-          <a:prstGeom prst="rect">
-            <a:avLst/>
-          </a:prstGeom>
-          <a:solidFill>
-            <a:srgbClr val="21262D"/>
-          </a:solidFill>
-          <a:ln>
-            <a:noFill/>
-          </a:ln>
-          <a:effectLst/>
-        </p:spPr>
-        <p:style>
-          <a:lnRef idx="1">
-            <a:schemeClr val="accent1"/>
-          </a:lnRef>
-          <a:fillRef idx="3">
-            <a:schemeClr val="accent1"/>
-          </a:fillRef>
-          <a:effectRef idx="2">
-            <a:schemeClr val="accent1"/>
-          </a:effectRef>
-          <a:fontRef idx="minor">
-            <a:schemeClr val="lt1"/>
-          </a:fontRef>
-        </p:style>
-        <p:txBody>
-          <a:bodyPr rtlCol="0" anchor="ctr"/>
-          <a:lstStyle/>
-          <a:p>
-            <a:pPr algn="ctr"/>
-          </a:p>
-        </p:txBody>
-      </p:sp>
-      <p:sp>
-        <p:nvSpPr>
-          <p:cNvPr id="24" name="TextBox 23"/>
-          <p:cNvSpPr txBox="1"/>
-          <p:nvPr/>
-        </p:nvSpPr>
-        <p:spPr>
-          <a:xfrm>
-            <a:off x="777240" y="4361688"/>
-            <a:ext cx="2670048" cy="384048"/>
-          </a:xfrm>
-          <a:prstGeom prst="rect">
-            <a:avLst/>
-          </a:prstGeom>
-          <a:noFill/>
-        </p:spPr>
-        <p:txBody>
-          <a:bodyPr wrap="square" anchor="t" lIns="0" rIns="0" tIns="0" bIns="0">
-            <a:spAutoFit/>
-          </a:bodyPr>
-          <a:lstStyle/>
-          <a:p>
-            <a:pPr algn="l">
-              <a:lnSpc>
-                <a:spcPct val="105000"/>
-              </a:lnSpc>
-              <a:spcAft>
-                <a:spcPts val="800"/>
-              </a:spcAft>
-            </a:pPr>
-            <a:r>
-              <a:rPr sz="1400" b="0" i="0">
-                <a:solidFill>
-                  <a:srgbClr val="E6EDF3"/>
-                </a:solidFill>
-                <a:latin typeface="Consolas"/>
-              </a:rPr>
-              <a:t>TodoProvider</a:t>
-            </a:r>
-          </a:p>
-        </p:txBody>
-      </p:sp>
-      <p:sp>
-        <p:nvSpPr>
-          <p:cNvPr id="25" name="TextBox 24"/>
-          <p:cNvSpPr txBox="1"/>
-          <p:nvPr/>
-        </p:nvSpPr>
-        <p:spPr>
-          <a:xfrm>
-            <a:off x="3611880" y="4361688"/>
-            <a:ext cx="3035808" cy="384048"/>
-          </a:xfrm>
-          <a:prstGeom prst="rect">
-            <a:avLst/>
-          </a:prstGeom>
-          <a:noFill/>
-        </p:spPr>
-        <p:txBody>
-          <a:bodyPr wrap="square" anchor="t" lIns="0" rIns="0" tIns="0" bIns="0">
-            <a:spAutoFit/>
-          </a:bodyPr>
-          <a:lstStyle/>
-          <a:p>
-            <a:pPr algn="l">
-              <a:lnSpc>
-                <a:spcPct val="105000"/>
-              </a:lnSpc>
-              <a:spcAft>
-                <a:spcPts val="800"/>
-              </a:spcAft>
-            </a:pPr>
-            <a:r>
-              <a:rPr sz="1400" b="0" i="0">
-                <a:solidFill>
-                  <a:srgbClr val="3FB950"/>
-                </a:solidFill>
-                <a:latin typeface="Consolas"/>
-              </a:rPr>
-              <a:t>kept</a:t>
-            </a:r>
-          </a:p>
-        </p:txBody>
-      </p:sp>
-      <p:sp>
-        <p:nvSpPr>
-          <p:cNvPr id="26" name="TextBox 25"/>
-          <p:cNvSpPr txBox="1"/>
-          <p:nvPr/>
-        </p:nvSpPr>
-        <p:spPr>
-          <a:xfrm>
-            <a:off x="6812280" y="4361688"/>
-            <a:ext cx="4407408" cy="384048"/>
-          </a:xfrm>
-          <a:prstGeom prst="rect">
-            <a:avLst/>
-          </a:prstGeom>
-          <a:noFill/>
-        </p:spPr>
-        <p:txBody>
-          <a:bodyPr wrap="square" anchor="t" lIns="0" rIns="0" tIns="0" bIns="0">
-            <a:spAutoFit/>
-          </a:bodyPr>
-          <a:lstStyle/>
-          <a:p>
-            <a:pPr algn="l">
-              <a:lnSpc>
-                <a:spcPct val="105000"/>
-              </a:lnSpc>
-              <a:spcAft>
-                <a:spcPts val="800"/>
-              </a:spcAft>
-            </a:pPr>
-            <a:r>
-              <a:rPr sz="1400" b="0" i="0">
-                <a:solidFill>
-                  <a:srgbClr val="8B949E"/>
-                </a:solidFill>
-                <a:latin typeface="Segoe UI"/>
-              </a:rPr>
-              <a:t>Becomes the damage-control checklist for free</a:t>
-            </a:r>
-          </a:p>
-        </p:txBody>
-      </p:sp>
-      <p:sp>
-        <p:nvSpPr>
-          <p:cNvPr id="27" name="Rectangle 26"/>
-          <p:cNvSpPr/>
-          <p:nvPr/>
-        </p:nvSpPr>
-        <p:spPr>
-          <a:xfrm>
-            <a:off x="777240" y="4663440"/>
-            <a:ext cx="10637215" cy="19050"/>
-          </a:xfrm>
-          <a:prstGeom prst="rect">
-            <a:avLst/>
-          </a:prstGeom>
-          <a:solidFill>
-            <a:srgbClr val="21262D"/>
-          </a:solidFill>
-          <a:ln>
-            <a:noFill/>
-          </a:ln>
-          <a:effectLst/>
-        </p:spPr>
-        <p:style>
-          <a:lnRef idx="1">
-            <a:schemeClr val="accent1"/>
-          </a:lnRef>
-          <a:fillRef idx="3">
-            <a:schemeClr val="accent1"/>
-          </a:fillRef>
-          <a:effectRef idx="2">
-            <a:schemeClr val="accent1"/>
-          </a:effectRef>
-          <a:fontRef idx="minor">
-            <a:schemeClr val="lt1"/>
-          </a:fontRef>
-        </p:style>
-        <p:txBody>
-          <a:bodyPr rtlCol="0" anchor="ctr"/>
-          <a:lstStyle/>
-          <a:p>
-            <a:pPr algn="ctr"/>
-          </a:p>
-        </p:txBody>
-      </p:sp>
-      <p:sp>
-        <p:nvSpPr>
-          <p:cNvPr id="28" name="TextBox 27"/>
-          <p:cNvSpPr txBox="1"/>
-          <p:nvPr/>
-        </p:nvSpPr>
-        <p:spPr>
-          <a:xfrm>
-            <a:off x="777240" y="4782312"/>
-            <a:ext cx="2670048" cy="384048"/>
-          </a:xfrm>
-          <a:prstGeom prst="rect">
-            <a:avLst/>
-          </a:prstGeom>
-          <a:noFill/>
-        </p:spPr>
-        <p:txBody>
-          <a:bodyPr wrap="square" anchor="t" lIns="0" rIns="0" tIns="0" bIns="0">
-            <a:spAutoFit/>
-          </a:bodyPr>
-          <a:lstStyle/>
-          <a:p>
-            <a:pPr algn="l">
-              <a:lnSpc>
-                <a:spcPct val="105000"/>
-              </a:lnSpc>
-              <a:spcAft>
-                <a:spcPts val="800"/>
-              </a:spcAft>
-            </a:pPr>
-            <a:r>
-              <a:rPr sz="1400" b="0" i="0">
-                <a:solidFill>
-                  <a:srgbClr val="E6EDF3"/>
-                </a:solidFill>
-                <a:latin typeface="Consolas"/>
-              </a:rPr>
-              <a:t>Compaction</a:t>
-            </a:r>
-          </a:p>
-        </p:txBody>
-      </p:sp>
-      <p:sp>
-        <p:nvSpPr>
-          <p:cNvPr id="29" name="TextBox 28"/>
-          <p:cNvSpPr txBox="1"/>
-          <p:nvPr/>
-        </p:nvSpPr>
-        <p:spPr>
-          <a:xfrm>
-            <a:off x="3611880" y="4782312"/>
-            <a:ext cx="3035808" cy="384048"/>
-          </a:xfrm>
-          <a:prstGeom prst="rect">
-            <a:avLst/>
-          </a:prstGeom>
-          <a:noFill/>
-        </p:spPr>
-        <p:txBody>
-          <a:bodyPr wrap="square" anchor="t" lIns="0" rIns="0" tIns="0" bIns="0">
-            <a:spAutoFit/>
-          </a:bodyPr>
-          <a:lstStyle/>
-          <a:p>
-            <a:pPr algn="l">
-              <a:lnSpc>
-                <a:spcPct val="105000"/>
-              </a:lnSpc>
-              <a:spcAft>
-                <a:spcPts val="800"/>
-              </a:spcAft>
-            </a:pPr>
-            <a:r>
-              <a:rPr sz="1400" b="0" i="0">
-                <a:solidFill>
-                  <a:srgbClr val="F0B429"/>
-                </a:solidFill>
-                <a:latin typeface="Consolas"/>
-              </a:rPr>
-              <a:t>both token limits</a:t>
-            </a:r>
-          </a:p>
-        </p:txBody>
-      </p:sp>
-      <p:sp>
-        <p:nvSpPr>
-          <p:cNvPr id="30" name="TextBox 29"/>
-          <p:cNvSpPr txBox="1"/>
-          <p:nvPr/>
-        </p:nvSpPr>
-        <p:spPr>
-          <a:xfrm>
-            <a:off x="6812280" y="4782312"/>
-            <a:ext cx="4407408" cy="384048"/>
-          </a:xfrm>
-          <a:prstGeom prst="rect">
-            <a:avLst/>
-          </a:prstGeom>
-          <a:noFill/>
-        </p:spPr>
-        <p:txBody>
-          <a:bodyPr wrap="square" anchor="t" lIns="0" rIns="0" tIns="0" bIns="0">
-            <a:spAutoFit/>
-          </a:bodyPr>
-          <a:lstStyle/>
-          <a:p>
-            <a:pPr algn="l">
-              <a:lnSpc>
-                <a:spcPct val="105000"/>
-              </a:lnSpc>
-              <a:spcAft>
-                <a:spcPts val="800"/>
-              </a:spcAft>
-            </a:pPr>
-            <a:r>
-              <a:rPr sz="1400" b="0" i="0">
-                <a:solidFill>
-                  <a:srgbClr val="8B949E"/>
-                </a:solidFill>
-                <a:latin typeface="Segoe UI"/>
-              </a:rPr>
-              <a:t>Setting only one silently disables it</a:t>
-            </a:r>
-          </a:p>
-        </p:txBody>
-      </p:sp>
-      <p:sp>
-        <p:nvSpPr>
-          <p:cNvPr id="31" name="Rectangle 30"/>
-          <p:cNvSpPr/>
-          <p:nvPr/>
-        </p:nvSpPr>
-        <p:spPr>
-          <a:xfrm>
-            <a:off x="777240" y="5084064"/>
-            <a:ext cx="10637215" cy="19050"/>
-          </a:xfrm>
-          <a:prstGeom prst="rect">
-            <a:avLst/>
-          </a:prstGeom>
-          <a:solidFill>
-            <a:srgbClr val="21262D"/>
-          </a:solidFill>
-          <a:ln>
-            <a:noFill/>
-          </a:ln>
-          <a:effectLst/>
-        </p:spPr>
-        <p:style>
-          <a:lnRef idx="1">
-            <a:schemeClr val="accent1"/>
-          </a:lnRef>
-          <a:fillRef idx="3">
-            <a:schemeClr val="accent1"/>
-          </a:fillRef>
-          <a:effectRef idx="2">
-            <a:schemeClr val="accent1"/>
-          </a:effectRef>
-          <a:fontRef idx="minor">
-            <a:schemeClr val="lt1"/>
-          </a:fontRef>
-        </p:style>
-        <p:txBody>
-          <a:bodyPr rtlCol="0" anchor="ctr"/>
-          <a:lstStyle/>
-          <a:p>
-            <a:pPr algn="ctr"/>
-          </a:p>
-        </p:txBody>
-      </p:sp>
-      <p:sp>
-        <p:nvSpPr>
-          <p:cNvPr id="32" name="TextBox 31"/>
-          <p:cNvSpPr txBox="1"/>
-          <p:nvPr/>
-        </p:nvSpPr>
-        <p:spPr>
-          <a:xfrm>
-            <a:off x="777240" y="6126480"/>
-            <a:ext cx="10637215" cy="365760"/>
-          </a:xfrm>
-          <a:prstGeom prst="rect">
-            <a:avLst/>
-          </a:prstGeom>
-          <a:noFill/>
-        </p:spPr>
-        <p:txBody>
-          <a:bodyPr wrap="square" anchor="t" lIns="0" rIns="0" tIns="0" bIns="0">
-            <a:spAutoFit/>
-          </a:bodyPr>
-          <a:lstStyle/>
-          <a:p>
-            <a:pPr algn="l">
-              <a:lnSpc>
-                <a:spcPct val="115000"/>
-              </a:lnSpc>
-              <a:spcAft>
-                <a:spcPts val="800"/>
-              </a:spcAft>
-            </a:pPr>
-            <a:r>
-              <a:rPr sz="1700" b="1" i="0">
-                <a:solidFill>
-                  <a:srgbClr val="F0B429"/>
-                </a:solidFill>
-                <a:latin typeface="Segoe UI"/>
-              </a:rPr>
-              <a:t>Two of them touch your filesystem the moment the agent is constructed.</a:t>
-            </a:r>
-          </a:p>
-        </p:txBody>
-      </p:sp>
-    </p:spTree>
-  </p:cSld>
-  <p:clrMapOvr>
-    <a:masterClrMapping/>
-  </p:clrMapOvr>
-</p:sld>
-</file>
-
-<file path=ppt/slides/slide21.xml><?xml version="1.0" encoding="utf-8"?>
-<p:sld xmlns:a="http://schemas.openxmlformats.org/drawingml/2006/main" xmlns:p="http://schemas.openxmlformats.org/presentationml/2006/main" xmlns:r="http://schemas.openxmlformats.org/officeDocument/2006/relationships">
-  <p:cSld>
-    <p:bg>
-      <p:bgPr>
-        <a:solidFill>
-          <a:srgbClr val="0D1117"/>
-        </a:solidFill>
-        <a:effectLst/>
-      </p:bgPr>
-    </p:bg>
-    <p:spTree>
-      <p:nvGrpSpPr>
-        <p:cNvPr id="1" name=""/>
-        <p:cNvGrpSpPr/>
-        <p:nvPr/>
-      </p:nvGrpSpPr>
-      <p:grpSpPr/>
-      <p:sp>
-        <p:nvSpPr>
-          <p:cNvPr id="2" name="TextBox 1"/>
-          <p:cNvSpPr txBox="1"/>
-          <p:nvPr/>
-        </p:nvSpPr>
-        <p:spPr>
-          <a:xfrm>
-            <a:off x="777240" y="502920"/>
-            <a:ext cx="10637215" cy="274320"/>
-          </a:xfrm>
-          <a:prstGeom prst="rect">
-            <a:avLst/>
-          </a:prstGeom>
-          <a:noFill/>
-        </p:spPr>
-        <p:txBody>
-          <a:bodyPr wrap="square" anchor="t" lIns="0" rIns="0" tIns="0" bIns="0">
-            <a:spAutoFit/>
-          </a:bodyPr>
-          <a:lstStyle/>
-          <a:p>
-            <a:pPr algn="l">
-              <a:lnSpc>
-                <a:spcPct val="115000"/>
-              </a:lnSpc>
-              <a:spcAft>
-                <a:spcPts val="800"/>
-              </a:spcAft>
-            </a:pPr>
-            <a:r>
-              <a:rPr sz="1300" b="1" i="0">
-                <a:solidFill>
-                  <a:srgbClr val="F85149"/>
-                </a:solidFill>
-                <a:latin typeface="Segoe UI"/>
-              </a:rPr>
-              <a:t>THE ONE THAT MADE ME LOOK</a:t>
-            </a:r>
-          </a:p>
-        </p:txBody>
-      </p:sp>
-      <p:sp>
-        <p:nvSpPr>
-          <p:cNvPr id="3" name="TextBox 2"/>
-          <p:cNvSpPr txBox="1"/>
-          <p:nvPr/>
-        </p:nvSpPr>
-        <p:spPr>
-          <a:xfrm>
-            <a:off x="777240" y="914400"/>
-            <a:ext cx="10637215" cy="1005840"/>
-          </a:xfrm>
-          <a:prstGeom prst="rect">
-            <a:avLst/>
-          </a:prstGeom>
-          <a:noFill/>
-        </p:spPr>
-        <p:txBody>
-          <a:bodyPr wrap="square" anchor="t" lIns="0" rIns="0" tIns="0" bIns="0">
-            <a:spAutoFit/>
-          </a:bodyPr>
-          <a:lstStyle/>
-          <a:p>
-            <a:pPr algn="l">
-              <a:lnSpc>
-                <a:spcPct val="115000"/>
-              </a:lnSpc>
-              <a:spcAft>
-                <a:spcPts val="800"/>
-              </a:spcAft>
-            </a:pPr>
-            <a:r>
-              <a:rPr sz="3800" b="1" i="0">
-                <a:solidFill>
-                  <a:srgbClr val="E6EDF3"/>
-                </a:solidFill>
-                <a:latin typeface="Segoe UI"/>
-              </a:rPr>
-              <a:t>Memory is on, and it is in your repo</a:t>
-            </a:r>
-          </a:p>
-        </p:txBody>
-      </p:sp>
-      <p:sp>
-        <p:nvSpPr>
-          <p:cNvPr id="4" name="Rectangle 3"/>
-          <p:cNvSpPr/>
-          <p:nvPr/>
-        </p:nvSpPr>
-        <p:spPr>
-          <a:xfrm>
-            <a:off x="777240" y="2103120"/>
-            <a:ext cx="10637215" cy="712597"/>
-          </a:xfrm>
-          <a:prstGeom prst="rect">
-            <a:avLst/>
-          </a:prstGeom>
-          <a:solidFill>
-            <a:srgbClr val="161B22"/>
-          </a:solidFill>
-          <a:ln w="12700">
-            <a:solidFill>
-              <a:srgbClr val="30363D"/>
-            </a:solidFill>
-          </a:ln>
-          <a:effectLst/>
-        </p:spPr>
-        <p:style>
-          <a:lnRef idx="1">
-            <a:schemeClr val="accent1"/>
-          </a:lnRef>
-          <a:fillRef idx="3">
-            <a:schemeClr val="accent1"/>
-          </a:fillRef>
-          <a:effectRef idx="2">
-            <a:schemeClr val="accent1"/>
-          </a:effectRef>
-          <a:fontRef idx="minor">
-            <a:schemeClr val="lt1"/>
-          </a:fontRef>
-        </p:style>
-        <p:txBody>
-          <a:bodyPr rtlCol="0" anchor="ctr"/>
-          <a:lstStyle/>
-          <a:p>
-            <a:pPr algn="ctr"/>
-          </a:p>
-        </p:txBody>
-      </p:sp>
-      <p:sp>
-        <p:nvSpPr>
-          <p:cNvPr id="5" name="TextBox 4"/>
-          <p:cNvSpPr txBox="1"/>
-          <p:nvPr/>
-        </p:nvSpPr>
-        <p:spPr>
-          <a:xfrm>
-            <a:off x="1033272" y="2304288"/>
-            <a:ext cx="10125151" cy="310261"/>
-          </a:xfrm>
-          <a:prstGeom prst="rect">
-            <a:avLst/>
-          </a:prstGeom>
-          <a:noFill/>
-        </p:spPr>
-        <p:txBody>
-          <a:bodyPr wrap="square" anchor="t" lIns="0" rIns="0" tIns="0" bIns="0">
-            <a:spAutoFit/>
-          </a:bodyPr>
-          <a:lstStyle/>
-          <a:p>
-            <a:pPr algn="l">
-              <a:lnSpc>
-                <a:spcPct val="100000"/>
-              </a:lnSpc>
-              <a:spcAft>
-                <a:spcPts val="0"/>
-              </a:spcAft>
-            </a:pPr>
-            <a:r>
-              <a:rPr sz="1900" b="0" i="0">
-                <a:solidFill>
-                  <a:srgbClr val="F0B429"/>
-                </a:solidFill>
-                <a:latin typeface="Consolas"/>
-              </a:rPr>
-              <a:t>{cwd}/agent-file-memory/{timestamp}_{guid}/</a:t>
-            </a:r>
-          </a:p>
-        </p:txBody>
-      </p:sp>
-      <p:sp>
-        <p:nvSpPr>
-          <p:cNvPr id="6" name="TextBox 5"/>
-          <p:cNvSpPr txBox="1"/>
-          <p:nvPr/>
-        </p:nvSpPr>
-        <p:spPr>
-          <a:xfrm>
-            <a:off x="777240" y="3200400"/>
-            <a:ext cx="10637215" cy="3108960"/>
-          </a:xfrm>
-          <a:prstGeom prst="rect">
-            <a:avLst/>
-          </a:prstGeom>
-          <a:noFill/>
-        </p:spPr>
-        <p:txBody>
-          <a:bodyPr wrap="square" anchor="t" lIns="0" rIns="0" tIns="0" bIns="0">
-            <a:spAutoFit/>
-          </a:bodyPr>
-          <a:lstStyle/>
-          <a:p>
-            <a:pPr algn="l" marL="310896" indent="-310896">
-              <a:lnSpc>
-                <a:spcPct val="110000"/>
-              </a:lnSpc>
-              <a:spcAft>
-                <a:spcPts val="1500"/>
-              </a:spcAft>
-            </a:pPr>
-            <a:r>
-              <a:rPr sz="2100" b="1" i="0">
-                <a:solidFill>
-                  <a:srgbClr val="F0B429"/>
-                </a:solidFill>
-                <a:latin typeface="Segoe UI"/>
-              </a:rPr>
-              <a:t>▸  </a:t>
-            </a:r>
-            <a:r>
-              <a:rPr sz="2100" b="1" i="0">
-                <a:solidFill>
-                  <a:srgbClr val="E6EDF3"/>
-                </a:solidFill>
-                <a:latin typeface="Segoe UI"/>
-              </a:rPr>
-              <a:t>DisableFileMemory defaults to false</a:t>
-            </a:r>
-            <a:r>
-              <a:rPr sz="2100" b="0" i="0">
-                <a:solidFill>
-                  <a:srgbClr val="8B949E"/>
-                </a:solidFill>
-                <a:latin typeface="Segoe UI"/>
-              </a:rPr>
-              <a:t>  </a:t>
-            </a:r>
-          </a:p>
-          <a:p>
-            <a:pPr algn="l" marL="310896" indent="-310896">
-              <a:lnSpc>
-                <a:spcPct val="110000"/>
-              </a:lnSpc>
-              <a:spcAft>
-                <a:spcPts val="1500"/>
-              </a:spcAft>
-            </a:pPr>
-            <a:r>
-              <a:rPr sz="2100" b="1" i="0">
-                <a:solidFill>
-                  <a:srgbClr val="F0B429"/>
-                </a:solidFill>
-                <a:latin typeface="Segoe UI"/>
-              </a:rPr>
-              <a:t>▸  </a:t>
-            </a:r>
-            <a:r>
-              <a:rPr sz="2100" b="1" i="0">
-                <a:solidFill>
-                  <a:srgbClr val="E6EDF3"/>
-                </a:solidFill>
-                <a:latin typeface="Segoe UI"/>
-              </a:rPr>
-              <a:t>No store supplied?</a:t>
-            </a:r>
-            <a:r>
-              <a:rPr sz="2100" b="0" i="0">
-                <a:solidFill>
-                  <a:srgbClr val="8B949E"/>
-                </a:solidFill>
-                <a:latin typeface="Segoe UI"/>
-              </a:rPr>
-              <a:t>  The harness builds one, rooted at your working directory</a:t>
-            </a:r>
-          </a:p>
-          <a:p>
-            <a:pPr algn="l" marL="310896" indent="-310896">
-              <a:lnSpc>
-                <a:spcPct val="110000"/>
-              </a:lnSpc>
-              <a:spcAft>
-                <a:spcPts val="1500"/>
-              </a:spcAft>
-            </a:pPr>
-            <a:r>
-              <a:rPr sz="2100" b="1" i="0">
-                <a:solidFill>
-                  <a:srgbClr val="F0B429"/>
-                </a:solidFill>
-                <a:latin typeface="Segoe UI"/>
-              </a:rPr>
-              <a:t>▸  </a:t>
-            </a:r>
-            <a:r>
-              <a:rPr sz="2100" b="1" i="0">
-                <a:solidFill>
-                  <a:srgbClr val="E6EDF3"/>
-                </a:solidFill>
-                <a:latin typeface="Segoe UI"/>
-              </a:rPr>
-              <a:t>Run the console six times</a:t>
-            </a:r>
-            <a:r>
-              <a:rPr sz="2100" b="0" i="0">
-                <a:solidFill>
-                  <a:srgbClr val="8B949E"/>
-                </a:solidFill>
-                <a:latin typeface="Segoe UI"/>
-              </a:rPr>
-              <a:t>  and get six directories in your repo root</a:t>
-            </a:r>
-          </a:p>
-        </p:txBody>
-      </p:sp>
-      <p:sp>
-        <p:nvSpPr>
-          <p:cNvPr id="7" name="TextBox 6"/>
-          <p:cNvSpPr txBox="1"/>
-          <p:nvPr/>
-        </p:nvSpPr>
-        <p:spPr>
-          <a:xfrm>
-            <a:off x="777240" y="5669280"/>
-            <a:ext cx="10637215" cy="548640"/>
-          </a:xfrm>
-          <a:prstGeom prst="rect">
-            <a:avLst/>
-          </a:prstGeom>
-          <a:noFill/>
-        </p:spPr>
-        <p:txBody>
-          <a:bodyPr wrap="square" anchor="t" lIns="0" rIns="0" tIns="0" bIns="0">
-            <a:spAutoFit/>
-          </a:bodyPr>
-          <a:lstStyle/>
-          <a:p>
-            <a:pPr algn="l">
-              <a:lnSpc>
-                <a:spcPct val="115000"/>
-              </a:lnSpc>
-              <a:spcAft>
-                <a:spcPts val="800"/>
-              </a:spcAft>
-            </a:pPr>
-            <a:r>
-              <a:rPr sz="1800" b="0" i="0">
-                <a:solidFill>
-                  <a:srgbClr val="3FB950"/>
-                </a:solidFill>
-                <a:latin typeface="Segoe UI"/>
-              </a:rPr>
-              <a:t>Now regression-tested: construct the agent in a temp directory, assert it stays empty.</a:t>
-            </a:r>
-          </a:p>
-        </p:txBody>
-      </p:sp>
-    </p:spTree>
-  </p:cSld>
-  <p:clrMapOvr>
-    <a:masterClrMapping/>
-  </p:clrMapOvr>
-</p:sld>
-</file>
-
-<file path=ppt/slides/slide22.xml><?xml version="1.0" encoding="utf-8"?>
-<p:sld xmlns:a="http://schemas.openxmlformats.org/drawingml/2006/main" xmlns:p="http://schemas.openxmlformats.org/presentationml/2006/main" xmlns:r="http://schemas.openxmlformats.org/officeDocument/2006/relationships">
-  <p:cSld>
-    <p:bg>
-      <p:bgPr>
-        <a:solidFill>
-          <a:srgbClr val="0D1117"/>
-        </a:solidFill>
-        <a:effectLst/>
-      </p:bgPr>
-    </p:bg>
-    <p:spTree>
-      <p:nvGrpSpPr>
-        <p:cNvPr id="1" name=""/>
-        <p:cNvGrpSpPr/>
-        <p:nvPr/>
-      </p:nvGrpSpPr>
-      <p:grpSpPr/>
-      <p:sp>
-        <p:nvSpPr>
-          <p:cNvPr id="2" name="TextBox 1"/>
-          <p:cNvSpPr txBox="1"/>
-          <p:nvPr/>
-        </p:nvSpPr>
-        <p:spPr>
-          <a:xfrm>
-            <a:off x="777240" y="502920"/>
-            <a:ext cx="10637215" cy="274320"/>
-          </a:xfrm>
-          <a:prstGeom prst="rect">
-            <a:avLst/>
-          </a:prstGeom>
-          <a:noFill/>
-        </p:spPr>
-        <p:txBody>
-          <a:bodyPr wrap="square" anchor="t" lIns="0" rIns="0" tIns="0" bIns="0">
-            <a:spAutoFit/>
-          </a:bodyPr>
-          <a:lstStyle/>
-          <a:p>
-            <a:pPr algn="l">
-              <a:lnSpc>
-                <a:spcPct val="115000"/>
-              </a:lnSpc>
-              <a:spcAft>
-                <a:spcPts val="800"/>
-              </a:spcAft>
-            </a:pPr>
-            <a:r>
-              <a:rPr sz="1300" b="1" i="0">
-                <a:solidFill>
-                  <a:srgbClr val="F85149"/>
-                </a:solidFill>
-                <a:latin typeface="Segoe UI"/>
-              </a:rPr>
-              <a:t>THE ONE THAT WILL BITE YOU IN PRODUCTION</a:t>
-            </a:r>
-          </a:p>
-        </p:txBody>
-      </p:sp>
-      <p:sp>
-        <p:nvSpPr>
-          <p:cNvPr id="3" name="TextBox 2"/>
-          <p:cNvSpPr txBox="1"/>
-          <p:nvPr/>
-        </p:nvSpPr>
-        <p:spPr>
-          <a:xfrm>
-            <a:off x="777240" y="914400"/>
-            <a:ext cx="10637215" cy="1005840"/>
-          </a:xfrm>
-          <a:prstGeom prst="rect">
-            <a:avLst/>
-          </a:prstGeom>
-          <a:noFill/>
-        </p:spPr>
-        <p:txBody>
-          <a:bodyPr wrap="square" anchor="t" lIns="0" rIns="0" tIns="0" bIns="0">
-            <a:spAutoFit/>
-          </a:bodyPr>
-          <a:lstStyle/>
-          <a:p>
-            <a:pPr algn="l">
-              <a:lnSpc>
-                <a:spcPct val="115000"/>
-              </a:lnSpc>
-              <a:spcAft>
-                <a:spcPts val="800"/>
-              </a:spcAft>
-            </a:pPr>
-            <a:r>
-              <a:rPr sz="3400" b="1" i="0">
-                <a:solidFill>
-                  <a:srgbClr val="E6EDF3"/>
-                </a:solidFill>
-                <a:latin typeface="Segoe UI"/>
-              </a:rPr>
-              <a:t>Compaction is off unless you set both limits</a:t>
-            </a:r>
-          </a:p>
-        </p:txBody>
-      </p:sp>
-      <p:sp>
-        <p:nvSpPr>
-          <p:cNvPr id="4" name="Rectangle 3"/>
-          <p:cNvSpPr/>
-          <p:nvPr/>
-        </p:nvSpPr>
-        <p:spPr>
-          <a:xfrm>
-            <a:off x="777240" y="2011680"/>
-            <a:ext cx="10637215" cy="1092708"/>
-          </a:xfrm>
-          <a:prstGeom prst="rect">
-            <a:avLst/>
-          </a:prstGeom>
-          <a:solidFill>
-            <a:srgbClr val="0F141C"/>
-          </a:solidFill>
-          <a:ln w="12700">
-            <a:solidFill>
-              <a:srgbClr val="30363D"/>
-            </a:solidFill>
-          </a:ln>
-          <a:effectLst/>
-        </p:spPr>
-        <p:style>
-          <a:lnRef idx="1">
-            <a:schemeClr val="accent1"/>
-          </a:lnRef>
-          <a:fillRef idx="3">
-            <a:schemeClr val="accent1"/>
-          </a:fillRef>
-          <a:effectRef idx="2">
-            <a:schemeClr val="accent1"/>
-          </a:effectRef>
-          <a:fontRef idx="minor">
-            <a:schemeClr val="lt1"/>
-          </a:fontRef>
-        </p:style>
-        <p:txBody>
-          <a:bodyPr rtlCol="0" anchor="ctr"/>
-          <a:lstStyle/>
-          <a:p>
-            <a:pPr algn="ctr"/>
-          </a:p>
-        </p:txBody>
-      </p:sp>
-      <p:sp>
-        <p:nvSpPr>
-          <p:cNvPr id="5" name="Rectangle 4"/>
-          <p:cNvSpPr/>
-          <p:nvPr/>
-        </p:nvSpPr>
-        <p:spPr>
-          <a:xfrm>
-            <a:off x="777240" y="2011680"/>
-            <a:ext cx="38100" cy="1092708"/>
-          </a:xfrm>
-          <a:prstGeom prst="rect">
-            <a:avLst/>
-          </a:prstGeom>
-          <a:solidFill>
-            <a:srgbClr val="30363D"/>
-          </a:solidFill>
-          <a:ln>
-            <a:noFill/>
-          </a:ln>
-          <a:effectLst/>
-        </p:spPr>
-        <p:style>
-          <a:lnRef idx="1">
-            <a:schemeClr val="accent1"/>
-          </a:lnRef>
-          <a:fillRef idx="3">
-            <a:schemeClr val="accent1"/>
-          </a:fillRef>
-          <a:effectRef idx="2">
-            <a:schemeClr val="accent1"/>
-          </a:effectRef>
-          <a:fontRef idx="minor">
-            <a:schemeClr val="lt1"/>
-          </a:fontRef>
-        </p:style>
-        <p:txBody>
-          <a:bodyPr rtlCol="0" anchor="ctr"/>
-          <a:lstStyle/>
-          <a:p>
-            <a:pPr algn="ctr"/>
-          </a:p>
-        </p:txBody>
-      </p:sp>
-      <p:sp>
-        <p:nvSpPr>
-          <p:cNvPr id="6" name="TextBox 5"/>
-          <p:cNvSpPr txBox="1"/>
-          <p:nvPr/>
-        </p:nvSpPr>
-        <p:spPr>
-          <a:xfrm>
-            <a:off x="1051560" y="2194560"/>
-            <a:ext cx="10134295" cy="726948"/>
-          </a:xfrm>
-          <a:prstGeom prst="rect">
-            <a:avLst/>
-          </a:prstGeom>
-          <a:noFill/>
-        </p:spPr>
-        <p:txBody>
-          <a:bodyPr wrap="square" anchor="t" lIns="0" rIns="0" tIns="0" bIns="0">
-            <a:spAutoFit/>
-          </a:bodyPr>
-          <a:lstStyle/>
-          <a:p>
-            <a:pPr algn="l">
-              <a:lnSpc>
-                <a:spcPct val="100000"/>
-              </a:lnSpc>
-              <a:spcAft>
-                <a:spcPts val="0"/>
-              </a:spcAft>
-            </a:pPr>
-            <a:r>
-              <a:rPr sz="1500" b="0" i="0">
-                <a:solidFill>
-                  <a:srgbClr val="79D6BE"/>
-                </a:solidFill>
-                <a:latin typeface="Consolas"/>
-              </a:rPr>
-              <a:t>MaxContextWindowTokens</a:t>
-            </a:r>
-            <a:r>
-              <a:rPr sz="1500" b="0" i="0">
-                <a:solidFill>
-                  <a:srgbClr val="E6EDF3"/>
-                </a:solidFill>
-                <a:latin typeface="Consolas"/>
-              </a:rPr>
-              <a:t> = </a:t>
-            </a:r>
-            <a:r>
-              <a:rPr sz="1500" b="0" i="0">
-                <a:solidFill>
-                  <a:srgbClr val="E8A87C"/>
-                </a:solidFill>
-                <a:latin typeface="Consolas"/>
-              </a:rPr>
-              <a:t>128_000</a:t>
-            </a:r>
-            <a:r>
-              <a:rPr sz="1500" b="0" i="0">
-                <a:solidFill>
-                  <a:srgbClr val="E6EDF3"/>
-                </a:solidFill>
-                <a:latin typeface="Consolas"/>
-              </a:rPr>
-              <a:t>,</a:t>
-            </a:r>
-          </a:p>
-          <a:p>
-            <a:pPr algn="l">
-              <a:lnSpc>
-                <a:spcPct val="100000"/>
-              </a:lnSpc>
-              <a:spcAft>
-                <a:spcPts val="0"/>
-              </a:spcAft>
-            </a:pPr>
-            <a:r>
-              <a:rPr sz="1500" b="0" i="0">
-                <a:solidFill>
-                  <a:srgbClr val="79D6BE"/>
-                </a:solidFill>
-                <a:latin typeface="Consolas"/>
-              </a:rPr>
-              <a:t>MaxOutputTokens</a:t>
-            </a:r>
-            <a:r>
-              <a:rPr sz="1500" b="0" i="0">
-                <a:solidFill>
-                  <a:srgbClr val="E6EDF3"/>
-                </a:solidFill>
-                <a:latin typeface="Consolas"/>
-              </a:rPr>
-              <a:t>        = </a:t>
-            </a:r>
-            <a:r>
-              <a:rPr sz="1500" b="0" i="0">
-                <a:solidFill>
-                  <a:srgbClr val="E8A87C"/>
-                </a:solidFill>
-                <a:latin typeface="Consolas"/>
-              </a:rPr>
-              <a:t>16_384</a:t>
-            </a:r>
-            <a:r>
-              <a:rPr sz="1500" b="0" i="0">
-                <a:solidFill>
-                  <a:srgbClr val="E6EDF3"/>
-                </a:solidFill>
-                <a:latin typeface="Consolas"/>
-              </a:rPr>
-              <a:t>,     </a:t>
-            </a:r>
-            <a:r>
-              <a:rPr sz="1500" b="0" i="0">
-                <a:solidFill>
-                  <a:srgbClr val="6A7889"/>
-                </a:solidFill>
-                <a:latin typeface="Consolas"/>
-              </a:rPr>
-              <a:t>// set one and not the other:</a:t>
-            </a:r>
-          </a:p>
-          <a:p>
-            <a:pPr algn="l">
-              <a:lnSpc>
-                <a:spcPct val="100000"/>
-              </a:lnSpc>
-              <a:spcAft>
-                <a:spcPts val="0"/>
-              </a:spcAft>
-            </a:pPr>
-            <a:r>
-              <a:rPr sz="1500" b="0" i="0">
-                <a:solidFill>
-                  <a:srgbClr val="E6EDF3"/>
-                </a:solidFill>
-                <a:latin typeface="Consolas"/>
-              </a:rPr>
-              <a:t>                                     </a:t>
-            </a:r>
-            <a:r>
-              <a:rPr sz="1500" b="0" i="0">
-                <a:solidFill>
-                  <a:srgbClr val="6A7889"/>
-                </a:solidFill>
-                <a:latin typeface="Consolas"/>
-              </a:rPr>
-              <a:t>//   no compaction, no warning, no error</a:t>
-            </a:r>
-          </a:p>
-        </p:txBody>
-      </p:sp>
-      <p:sp>
-        <p:nvSpPr>
-          <p:cNvPr id="7" name="TextBox 6"/>
-          <p:cNvSpPr txBox="1"/>
-          <p:nvPr/>
-        </p:nvSpPr>
-        <p:spPr>
-          <a:xfrm>
-            <a:off x="777240" y="3561588"/>
-            <a:ext cx="10637215" cy="1463040"/>
-          </a:xfrm>
-          <a:prstGeom prst="rect">
-            <a:avLst/>
-          </a:prstGeom>
-          <a:noFill/>
-        </p:spPr>
-        <p:txBody>
-          <a:bodyPr wrap="square" anchor="t" lIns="0" rIns="0" tIns="0" bIns="0">
-            <a:spAutoFit/>
-          </a:bodyPr>
-          <a:lstStyle/>
-          <a:p>
-            <a:pPr algn="l">
-              <a:lnSpc>
-                <a:spcPct val="130000"/>
-              </a:lnSpc>
-              <a:spcAft>
-                <a:spcPts val="1600"/>
-              </a:spcAft>
-            </a:pPr>
-            <a:r>
-              <a:rPr sz="2400" b="0" i="0">
-                <a:solidFill>
-                  <a:srgbClr val="E6EDF3"/>
-                </a:solidFill>
-                <a:latin typeface="Segoe UI"/>
-              </a:rPr>
-              <a:t>The compaction provider is added to the pipeline only when </a:t>
-            </a:r>
-            <a:r>
-              <a:rPr sz="2400" b="1" i="1">
-                <a:solidFill>
-                  <a:srgbClr val="E6EDF3"/>
-                </a:solidFill>
-                <a:latin typeface="Segoe UI"/>
-              </a:rPr>
-              <a:t>both</a:t>
-            </a:r>
-            <a:r>
-              <a:rPr sz="2400" b="0" i="0">
-                <a:solidFill>
-                  <a:srgbClr val="E6EDF3"/>
-                </a:solidFill>
-                <a:latin typeface="Segoe UI"/>
-              </a:rPr>
-              <a:t> are non-null.</a:t>
-            </a:r>
-          </a:p>
-          <a:p>
-            <a:pPr algn="l">
-              <a:lnSpc>
-                <a:spcPct val="130000"/>
-              </a:lnSpc>
-              <a:spcAft>
-                <a:spcPts val="1600"/>
-              </a:spcAft>
-            </a:pPr>
-            <a:r>
-              <a:rPr sz="2400" b="1" i="0">
-                <a:solidFill>
-                  <a:srgbClr val="F85149"/>
-                </a:solidFill>
-                <a:latin typeface="Segoe UI"/>
-              </a:rPr>
-              <a:t>You find out on the turn the context window overflows.</a:t>
-            </a:r>
-          </a:p>
-        </p:txBody>
-      </p:sp>
-    </p:spTree>
-  </p:cSld>
-  <p:clrMapOvr>
-    <a:masterClrMapping/>
-  </p:clrMapOvr>
-</p:sld>
-</file>
-
-<file path=ppt/slides/slide23.xml><?xml version="1.0" encoding="utf-8"?>
-<p:sld xmlns:a="http://schemas.openxmlformats.org/drawingml/2006/main" xmlns:p="http://schemas.openxmlformats.org/presentationml/2006/main" xmlns:r="http://schemas.openxmlformats.org/officeDocument/2006/relationships">
-  <p:cSld>
-    <p:bg>
-      <p:bgPr>
-        <a:solidFill>
-          <a:srgbClr val="0D1117"/>
-        </a:solidFill>
-        <a:effectLst/>
-      </p:bgPr>
-    </p:bg>
-    <p:spTree>
-      <p:nvGrpSpPr>
-        <p:cNvPr id="1" name=""/>
-        <p:cNvGrpSpPr/>
-        <p:nvPr/>
-      </p:nvGrpSpPr>
-      <p:grpSpPr/>
-      <p:sp>
-        <p:nvSpPr>
-          <p:cNvPr id="2" name="TextBox 1"/>
-          <p:cNvSpPr txBox="1"/>
-          <p:nvPr/>
-        </p:nvSpPr>
-        <p:spPr>
-          <a:xfrm>
-            <a:off x="777240" y="502920"/>
-            <a:ext cx="10637215" cy="274320"/>
-          </a:xfrm>
-          <a:prstGeom prst="rect">
-            <a:avLst/>
-          </a:prstGeom>
-          <a:noFill/>
-        </p:spPr>
-        <p:txBody>
-          <a:bodyPr wrap="square" anchor="t" lIns="0" rIns="0" tIns="0" bIns="0">
-            <a:spAutoFit/>
-          </a:bodyPr>
-          <a:lstStyle/>
-          <a:p>
-            <a:pPr algn="l">
-              <a:lnSpc>
-                <a:spcPct val="115000"/>
-              </a:lnSpc>
-              <a:spcAft>
-                <a:spcPts val="800"/>
-              </a:spcAft>
-            </a:pPr>
-            <a:r>
-              <a:rPr sz="1300" b="1" i="0">
-                <a:solidFill>
-                  <a:srgbClr val="F85149"/>
-                </a:solidFill>
-                <a:latin typeface="Segoe UI"/>
-              </a:rPr>
-              <a:t>THE BATTERIES HAVE A VOICE</a:t>
-            </a:r>
-          </a:p>
-        </p:txBody>
-      </p:sp>
-      <p:sp>
-        <p:nvSpPr>
-          <p:cNvPr id="3" name="TextBox 2"/>
-          <p:cNvSpPr txBox="1"/>
-          <p:nvPr/>
-        </p:nvSpPr>
-        <p:spPr>
-          <a:xfrm>
-            <a:off x="777240" y="914400"/>
-            <a:ext cx="10637215" cy="1005840"/>
-          </a:xfrm>
-          <a:prstGeom prst="rect">
-            <a:avLst/>
-          </a:prstGeom>
-          <a:noFill/>
-        </p:spPr>
-        <p:txBody>
-          <a:bodyPr wrap="square" anchor="t" lIns="0" rIns="0" tIns="0" bIns="0">
-            <a:spAutoFit/>
-          </a:bodyPr>
-          <a:lstStyle/>
-          <a:p>
-            <a:pPr algn="l">
-              <a:lnSpc>
-                <a:spcPct val="115000"/>
-              </a:lnSpc>
-              <a:spcAft>
-                <a:spcPts val="800"/>
-              </a:spcAft>
-            </a:pPr>
-            <a:r>
-              <a:rPr sz="3600" b="1" i="0">
-                <a:solidFill>
-                  <a:srgbClr val="E6EDF3"/>
-                </a:solidFill>
-                <a:latin typeface="Segoe UI"/>
-              </a:rPr>
-              <a:t>The framework talks through your character</a:t>
-            </a:r>
-          </a:p>
-        </p:txBody>
-      </p:sp>
-      <p:sp>
-        <p:nvSpPr>
-          <p:cNvPr id="4" name="Rectangle 3"/>
-          <p:cNvSpPr/>
-          <p:nvPr/>
-        </p:nvSpPr>
-        <p:spPr>
-          <a:xfrm>
-            <a:off x="777240" y="1965960"/>
-            <a:ext cx="10637215" cy="1573144"/>
-          </a:xfrm>
-          <a:prstGeom prst="rect">
-            <a:avLst/>
-          </a:prstGeom>
-          <a:solidFill>
-            <a:srgbClr val="161B22"/>
-          </a:solidFill>
-          <a:ln w="12700">
-            <a:solidFill>
-              <a:srgbClr val="30363D"/>
-            </a:solidFill>
-          </a:ln>
-          <a:effectLst/>
-        </p:spPr>
-        <p:style>
-          <a:lnRef idx="1">
-            <a:schemeClr val="accent1"/>
-          </a:lnRef>
-          <a:fillRef idx="3">
-            <a:schemeClr val="accent1"/>
-          </a:fillRef>
-          <a:effectRef idx="2">
-            <a:schemeClr val="accent1"/>
-          </a:effectRef>
-          <a:fontRef idx="minor">
-            <a:schemeClr val="lt1"/>
-          </a:fontRef>
-        </p:style>
-        <p:txBody>
-          <a:bodyPr rtlCol="0" anchor="ctr"/>
-          <a:lstStyle/>
-          <a:p>
-            <a:pPr algn="ctr"/>
-          </a:p>
-        </p:txBody>
-      </p:sp>
-      <p:sp>
-        <p:nvSpPr>
-          <p:cNvPr id="5" name="TextBox 4"/>
-          <p:cNvSpPr txBox="1"/>
-          <p:nvPr/>
-        </p:nvSpPr>
-        <p:spPr>
-          <a:xfrm>
-            <a:off x="1033272" y="2167128"/>
-            <a:ext cx="10125151" cy="1170808"/>
-          </a:xfrm>
-          <a:prstGeom prst="rect">
-            <a:avLst/>
-          </a:prstGeom>
-          <a:noFill/>
-        </p:spPr>
-        <p:txBody>
-          <a:bodyPr wrap="square" anchor="t" lIns="0" rIns="0" tIns="0" bIns="0">
-            <a:spAutoFit/>
-          </a:bodyPr>
-          <a:lstStyle/>
-          <a:p>
-            <a:pPr algn="l">
-              <a:lnSpc>
-                <a:spcPct val="100000"/>
-              </a:lnSpc>
-              <a:spcAft>
-                <a:spcPts val="0"/>
-              </a:spcAft>
-            </a:pPr>
-            <a:r>
-              <a:rPr sz="1500" b="0" i="0">
-                <a:solidFill>
-                  <a:srgbClr val="E6EDF3"/>
-                </a:solidFill>
-                <a:latin typeface="Consolas"/>
-              </a:rPr>
-              <a:t>  AURORA  · mode_set          ← harness</a:t>
-            </a:r>
-          </a:p>
-          <a:p>
-            <a:pPr algn="l">
-              <a:lnSpc>
-                <a:spcPct val="100000"/>
-              </a:lnSpc>
-              <a:spcAft>
-                <a:spcPts val="0"/>
-              </a:spcAft>
-            </a:pPr>
-            <a:r>
-              <a:rPr sz="1500" b="0" i="0">
-                <a:solidFill>
-                  <a:srgbClr val="E6EDF3"/>
-                </a:solidFill>
-                <a:latin typeface="Consolas"/>
-              </a:rPr>
-              <a:t>          · ScanSector        ← ship</a:t>
-            </a:r>
-          </a:p>
-          <a:p>
-            <a:pPr algn="l">
-              <a:lnSpc>
-                <a:spcPct val="100000"/>
-              </a:lnSpc>
-              <a:spcAft>
-                <a:spcPts val="0"/>
-              </a:spcAft>
-            </a:pPr>
-            <a:r>
-              <a:rPr sz="1500" b="0" i="0">
-                <a:solidFill>
-                  <a:srgbClr val="E6EDF3"/>
-                </a:solidFill>
-                <a:latin typeface="Consolas"/>
-              </a:rPr>
-              <a:t>          · ReadShipLog       ← ship</a:t>
-            </a:r>
-          </a:p>
-          <a:p>
-            <a:pPr algn="l">
-              <a:lnSpc>
-                <a:spcPct val="100000"/>
-              </a:lnSpc>
-              <a:spcAft>
-                <a:spcPts val="0"/>
-              </a:spcAft>
-            </a:pPr>
-            <a:r>
-              <a:rPr sz="1500" b="0" i="0">
-                <a:solidFill>
-                  <a:srgbClr val="E6EDF3"/>
-                </a:solidFill>
-                <a:latin typeface="Consolas"/>
-              </a:rPr>
-              <a:t>          · todos_complete    ← harness</a:t>
-            </a:r>
-          </a:p>
-          <a:p>
-            <a:pPr algn="l">
-              <a:lnSpc>
-                <a:spcPct val="100000"/>
-              </a:lnSpc>
-              <a:spcAft>
-                <a:spcPts val="0"/>
-              </a:spcAft>
-            </a:pPr>
-            <a:r>
-              <a:rPr sz="1500" b="0" i="0">
-                <a:solidFill>
-                  <a:srgbClr val="E6EDF3"/>
-                </a:solidFill>
-                <a:latin typeface="Consolas"/>
-              </a:rPr>
-              <a:t>          · todos_complete    ← harness</a:t>
-            </a:r>
-          </a:p>
-        </p:txBody>
-      </p:sp>
-      <p:sp>
-        <p:nvSpPr>
-          <p:cNvPr id="6" name="TextBox 5"/>
-          <p:cNvSpPr txBox="1"/>
-          <p:nvPr/>
-        </p:nvSpPr>
-        <p:spPr>
-          <a:xfrm>
-            <a:off x="777240" y="3749039"/>
-            <a:ext cx="10637215" cy="457200"/>
-          </a:xfrm>
-          <a:prstGeom prst="rect">
-            <a:avLst/>
-          </a:prstGeom>
-          <a:noFill/>
-        </p:spPr>
-        <p:txBody>
-          <a:bodyPr wrap="square" anchor="t" lIns="0" rIns="0" tIns="0" bIns="0">
-            <a:spAutoFit/>
-          </a:bodyPr>
-          <a:lstStyle/>
-          <a:p>
-            <a:pPr algn="l">
-              <a:lnSpc>
-                <a:spcPct val="115000"/>
-              </a:lnSpc>
-              <a:spcAft>
-                <a:spcPts val="800"/>
-              </a:spcAft>
-            </a:pPr>
-            <a:r>
-              <a:rPr sz="1900" b="0" i="0">
-                <a:solidFill>
-                  <a:srgbClr val="8B949E"/>
-                </a:solidFill>
-                <a:latin typeface="Segoe UI"/>
-              </a:rPr>
-              <a:t>Whole turns were nothing but </a:t>
-            </a:r>
-            <a:r>
-              <a:rPr sz="1900" b="0" i="0">
-                <a:solidFill>
-                  <a:srgbClr val="F0B429"/>
-                </a:solidFill>
-                <a:latin typeface="Consolas"/>
-              </a:rPr>
-              <a:t>todos_add</a:t>
-            </a:r>
-            <a:r>
-              <a:rPr sz="1900" b="0" i="0">
-                <a:solidFill>
-                  <a:srgbClr val="8B949E"/>
-                </a:solidFill>
-                <a:latin typeface="Segoe UI"/>
-              </a:rPr>
-              <a:t> — which reads as the agent working when it is the agent filing.</a:t>
-            </a:r>
-          </a:p>
-        </p:txBody>
-      </p:sp>
-      <p:sp>
-        <p:nvSpPr>
-          <p:cNvPr id="7" name="Rectangle 6"/>
-          <p:cNvSpPr/>
-          <p:nvPr/>
-        </p:nvSpPr>
-        <p:spPr>
-          <a:xfrm>
-            <a:off x="777240" y="4526280"/>
-            <a:ext cx="2926080" cy="19050"/>
-          </a:xfrm>
-          <a:prstGeom prst="rect">
-            <a:avLst/>
-          </a:prstGeom>
-          <a:solidFill>
-            <a:srgbClr val="30363D"/>
-          </a:solidFill>
-          <a:ln>
-            <a:noFill/>
-          </a:ln>
-          <a:effectLst/>
-        </p:spPr>
-        <p:style>
-          <a:lnRef idx="1">
-            <a:schemeClr val="accent1"/>
-          </a:lnRef>
-          <a:fillRef idx="3">
-            <a:schemeClr val="accent1"/>
-          </a:fillRef>
-          <a:effectRef idx="2">
-            <a:schemeClr val="accent1"/>
-          </a:effectRef>
-          <a:fontRef idx="minor">
-            <a:schemeClr val="lt1"/>
-          </a:fontRef>
-        </p:style>
-        <p:txBody>
-          <a:bodyPr rtlCol="0" anchor="ctr"/>
-          <a:lstStyle/>
-          <a:p>
-            <a:pPr algn="ctr"/>
-          </a:p>
-        </p:txBody>
-      </p:sp>
-      <p:sp>
-        <p:nvSpPr>
-          <p:cNvPr id="8" name="TextBox 7"/>
-          <p:cNvSpPr txBox="1"/>
-          <p:nvPr/>
-        </p:nvSpPr>
-        <p:spPr>
-          <a:xfrm>
-            <a:off x="777240" y="4800600"/>
-            <a:ext cx="10637215" cy="1097280"/>
-          </a:xfrm>
-          <a:prstGeom prst="rect">
-            <a:avLst/>
-          </a:prstGeom>
-          <a:noFill/>
-        </p:spPr>
-        <p:txBody>
-          <a:bodyPr wrap="square" anchor="t" lIns="0" rIns="0" tIns="0" bIns="0">
-            <a:spAutoFit/>
-          </a:bodyPr>
-          <a:lstStyle/>
-          <a:p>
-            <a:pPr algn="l">
-              <a:lnSpc>
-                <a:spcPct val="125000"/>
-              </a:lnSpc>
-              <a:spcAft>
-                <a:spcPts val="1000"/>
-              </a:spcAft>
-            </a:pPr>
-            <a:r>
-              <a:rPr sz="1700" b="0" i="0">
-                <a:solidFill>
-                  <a:srgbClr val="8B949E"/>
-                </a:solidFill>
-                <a:latin typeface="Segoe UI"/>
-              </a:rPr>
-              <a:t>And it leaks into the voice. AURORA opened a voyage with:</a:t>
-            </a:r>
-          </a:p>
-          <a:p>
-            <a:pPr algn="l">
-              <a:lnSpc>
-                <a:spcPct val="125000"/>
-              </a:lnSpc>
-              <a:spcAft>
-                <a:spcPts val="1000"/>
-              </a:spcAft>
-            </a:pPr>
-            <a:r>
-              <a:rPr sz="2400" b="0" i="1">
-                <a:solidFill>
-                  <a:srgbClr val="58A6FF"/>
-                </a:solidFill>
-                <a:latin typeface="Segoe UI"/>
-              </a:rPr>
-              <a:t>“No outstanding tasks. Standing by for orders.”</a:t>
-            </a:r>
-          </a:p>
-        </p:txBody>
-      </p:sp>
-    </p:spTree>
-  </p:cSld>
-  <p:clrMapOvr>
-    <a:masterClrMapping/>
-  </p:clrMapOvr>
-</p:sld>
-</file>
-
 <file path=ppt/slides/slide24.xml><?xml version="1.0" encoding="utf-8"?>
 <p:sld xmlns:a="http://schemas.openxmlformats.org/drawingml/2006/main" xmlns:p="http://schemas.openxmlformats.org/presentationml/2006/main" xmlns:r="http://schemas.openxmlformats.org/officeDocument/2006/relationships">
   <p:cSld>
@@ -26577,7 +26565,7 @@
                 </a:solidFill>
                 <a:latin typeface="Segoe UI"/>
               </a:rPr>
-              <a:t>Same reason there is no </a:t>
+              <a:t>Not a </a:t>
             </a:r>
             <a:r>
               <a:rPr sz="1600" b="0" i="0">
@@ -26595,7 +26583,7 @@
                 </a:solidFill>
                 <a:latin typeface="Segoe UI"/>
               </a:rPr>
-              <a:t> tool: an agent that has to ask how its own ship is doing will not think to ask.</a:t>
+              <a:t> tool call: force one every turn and this block is the answer you already know — you would just be paying for a round trip and faking that the agent asked.</a:t>
             </a:r>
           </a:p>
         </p:txBody>
@@ -27638,7 +27626,7 @@
                 </a:solidFill>
                 <a:latin typeface="Segoe UI"/>
               </a:rPr>
-              <a:t>38 tests. No model calls. Under half a second.</a:t>
+              <a:t>57 tests. No model calls. Under half a second.</a:t>
             </a:r>
           </a:p>
         </p:txBody>
@@ -28444,7 +28432,7 @@
                 </a:solidFill>
                 <a:latin typeface="Segoe UI"/>
               </a:rPr>
-              <a:t>Five things</a:t>
+              <a:t>Six things</a:t>
             </a:r>
           </a:p>
         </p:txBody>
@@ -28457,8 +28445,8 @@
         </p:nvSpPr>
         <p:spPr>
           <a:xfrm>
-            <a:off x="777240" y="1965960"/>
-            <a:ext cx="10637215" cy="4343400"/>
+            <a:off x="777240" y="1828800"/>
+            <a:ext cx="10637215" cy="4480560"/>
           </a:xfrm>
           <a:prstGeom prst="rect">
             <a:avLst/>
@@ -28476,11 +28464,11 @@
                 <a:spcPct val="110000"/>
               </a:lnSpc>
               <a:spcAft>
-                <a:spcPts val="1600"/>
-              </a:spcAft>
-            </a:pPr>
-            <a:r>
-              <a:rPr sz="2000" b="1" i="0">
+                <a:spcPts val="1400"/>
+              </a:spcAft>
+            </a:pPr>
+            <a:r>
+              <a:rPr sz="1900" b="1" i="0">
                 <a:solidFill>
                   <a:srgbClr val="F0B429"/>
                 </a:solidFill>
@@ -28489,7 +28477,7 @@
               <a:t>▸  </a:t>
             </a:r>
             <a:r>
-              <a:rPr sz="2000" b="1" i="0">
+              <a:rPr sz="1900" b="1" i="0">
                 <a:solidFill>
                   <a:srgbClr val="E6EDF3"/>
                 </a:solidFill>
@@ -28498,7 +28486,7 @@
               <a:t>Constrain verbs, not just nouns.</a:t>
             </a:r>
             <a:r>
-              <a:rPr sz="2000" b="0" i="0">
+              <a:rPr sz="1900" b="0" i="0">
                 <a:solidFill>
                   <a:srgbClr val="8B949E"/>
                 </a:solidFill>
@@ -28513,11 +28501,11 @@
                 <a:spcPct val="110000"/>
               </a:lnSpc>
               <a:spcAft>
-                <a:spcPts val="1600"/>
-              </a:spcAft>
-            </a:pPr>
-            <a:r>
-              <a:rPr sz="2000" b="1" i="0">
+                <a:spcPts val="1400"/>
+              </a:spcAft>
+            </a:pPr>
+            <a:r>
+              <a:rPr sz="1900" b="1" i="0">
                 <a:solidFill>
                   <a:srgbClr val="F0B429"/>
                 </a:solidFill>
@@ -28526,7 +28514,7 @@
               <a:t>▸  </a:t>
             </a:r>
             <a:r>
-              <a:rPr sz="2000" b="1" i="0">
+              <a:rPr sz="1900" b="1" i="0">
                 <a:solidFill>
                   <a:srgbClr val="E6EDF3"/>
                 </a:solidFill>
@@ -28535,7 +28523,7 @@
               <a:t>Tell it what changed; let it ask for the rest.</a:t>
             </a:r>
             <a:r>
-              <a:rPr sz="2000" b="0" i="0">
+              <a:rPr sz="1900" b="0" i="0">
                 <a:solidFill>
                   <a:srgbClr val="8B949E"/>
                 </a:solidFill>
@@ -28550,11 +28538,11 @@
                 <a:spcPct val="110000"/>
               </a:lnSpc>
               <a:spcAft>
-                <a:spcPts val="1600"/>
-              </a:spcAft>
-            </a:pPr>
-            <a:r>
-              <a:rPr sz="2000" b="1" i="0">
+                <a:spcPts val="1400"/>
+              </a:spcAft>
+            </a:pPr>
+            <a:r>
+              <a:rPr sz="1900" b="1" i="0">
                 <a:solidFill>
                   <a:srgbClr val="F0B429"/>
                 </a:solidFill>
@@ -28563,7 +28551,7 @@
               <a:t>▸  </a:t>
             </a:r>
             <a:r>
-              <a:rPr sz="2000" b="1" i="0">
+              <a:rPr sz="1900" b="1" i="0">
                 <a:solidFill>
                   <a:srgbClr val="E6EDF3"/>
                 </a:solidFill>
@@ -28572,7 +28560,7 @@
               <a:t>Read the defaults as decisions you have not made yet.</a:t>
             </a:r>
             <a:r>
-              <a:rPr sz="2000" b="0" i="0">
+              <a:rPr sz="1900" b="0" i="0">
                 <a:solidFill>
                   <a:srgbClr val="8B949E"/>
                 </a:solidFill>
@@ -28587,11 +28575,11 @@
                 <a:spcPct val="110000"/>
               </a:lnSpc>
               <a:spcAft>
-                <a:spcPts val="1600"/>
-              </a:spcAft>
-            </a:pPr>
-            <a:r>
-              <a:rPr sz="2000" b="1" i="0">
+                <a:spcPts val="1400"/>
+              </a:spcAft>
+            </a:pPr>
+            <a:r>
+              <a:rPr sz="1900" b="1" i="0">
                 <a:solidFill>
                   <a:srgbClr val="F0B429"/>
                 </a:solidFill>
@@ -28600,7 +28588,7 @@
               <a:t>▸  </a:t>
             </a:r>
             <a:r>
-              <a:rPr sz="2000" b="1" i="0">
+              <a:rPr sz="1900" b="1" i="0">
                 <a:solidFill>
                   <a:srgbClr val="E6EDF3"/>
                 </a:solidFill>
@@ -28609,7 +28597,7 @@
               <a:t>Gate by consequence, not category.</a:t>
             </a:r>
             <a:r>
-              <a:rPr sz="2000" b="0" i="0">
+              <a:rPr sz="1900" b="0" i="0">
                 <a:solidFill>
                   <a:srgbClr val="8B949E"/>
                 </a:solidFill>
@@ -28624,11 +28612,11 @@
                 <a:spcPct val="110000"/>
               </a:lnSpc>
               <a:spcAft>
-                <a:spcPts val="1600"/>
-              </a:spcAft>
-            </a:pPr>
-            <a:r>
-              <a:rPr sz="2000" b="1" i="0">
+                <a:spcPts val="1400"/>
+              </a:spcAft>
+            </a:pPr>
+            <a:r>
+              <a:rPr sz="1900" b="1" i="0">
                 <a:solidFill>
                   <a:srgbClr val="F0B429"/>
                 </a:solidFill>
@@ -28637,7 +28625,7 @@
               <a:t>▸  </a:t>
             </a:r>
             <a:r>
-              <a:rPr sz="2000" b="1" i="0">
+              <a:rPr sz="1900" b="1" i="0">
                 <a:solidFill>
                   <a:srgbClr val="E6EDF3"/>
                 </a:solidFill>
@@ -28646,13 +28634,50 @@
               <a:t>Keep the domain free of the framework.</a:t>
             </a:r>
             <a:r>
-              <a:rPr sz="2000" b="0" i="0">
+              <a:rPr sz="1900" b="0" i="0">
                 <a:solidFill>
                   <a:srgbClr val="8B949E"/>
                 </a:solidFill>
                 <a:latin typeface="Segoe UI"/>
               </a:rPr>
               <a:t>  It is what makes any of this testable, repeatable, and honest.</a:t>
+            </a:r>
+          </a:p>
+          <a:p>
+            <a:pPr algn="l" marL="310896" indent="-310896">
+              <a:lnSpc>
+                <a:spcPct val="110000"/>
+              </a:lnSpc>
+              <a:spcAft>
+                <a:spcPts val="1400"/>
+              </a:spcAft>
+            </a:pPr>
+            <a:r>
+              <a:rPr sz="1900" b="1" i="0">
+                <a:solidFill>
+                  <a:srgbClr val="F0B429"/>
+                </a:solidFill>
+                <a:latin typeface="Segoe UI"/>
+              </a:rPr>
+              <a:t>▸  </a:t>
+            </a:r>
+            <a:r>
+              <a:rPr sz="1900" b="1" i="0">
+                <a:solidFill>
+                  <a:srgbClr val="E6EDF3"/>
+                </a:solidFill>
+                <a:latin typeface="Segoe UI"/>
+              </a:rPr>
+              <a:t>Tool failures are values, not exceptions.</a:t>
+            </a:r>
+            <a:r>
+              <a:rPr sz="1900" b="0" i="0">
+                <a:solidFill>
+                  <a:srgbClr val="8B949E"/>
+                </a:solidFill>
+                <a:latin typeface="Segoe UI"/>
+              </a:rPr>
+              <a:t>  A stack trace gives the model nothing to re-plan from; a refusal it can read does.</a:t>
             </a:r>
           </a:p>
         </p:txBody>
@@ -29268,7 +29293,7 @@
                 </a:solidFill>
                 <a:latin typeface="Segoe UI"/>
               </a:rPr>
-              <a:t>github.com/…/ship-ai-harness</a:t>
+              <a:t>github.com/stuartdotnet/ship-ai-harness</a:t>
             </a:r>
             <a:r>
               <a:rPr sz="2100" b="0" i="0">
@@ -29277,7 +29302,7 @@
                 </a:solidFill>
                 <a:latin typeface="Segoe UI"/>
               </a:rPr>
-              <a:t>  — the whole ship, 38 tests, run it yourself</a:t>
+              <a:t>  — the whole ship, 57 tests, run it yourself</a:t>
             </a:r>
           </a:p>
           <a:p>
